--- a/SGMW HDC solution Proposal.pptx
+++ b/SGMW HDC solution Proposal.pptx
@@ -5,10 +5,10 @@
     <p:sldMasterId id="2147483648" r:id="rId4"/>
   </p:sldMasterIdLst>
   <p:notesMasterIdLst>
-    <p:notesMasterId r:id="rId17"/>
+    <p:notesMasterId r:id="rId18"/>
   </p:notesMasterIdLst>
   <p:handoutMasterIdLst>
-    <p:handoutMasterId r:id="rId18"/>
+    <p:handoutMasterId r:id="rId19"/>
   </p:handoutMasterIdLst>
   <p:sldIdLst>
     <p:sldId id="272" r:id="rId5"/>
@@ -17,12 +17,13 @@
     <p:sldId id="278" r:id="rId8"/>
     <p:sldId id="269" r:id="rId9"/>
     <p:sldId id="270" r:id="rId10"/>
-    <p:sldId id="271" r:id="rId11"/>
-    <p:sldId id="280" r:id="rId12"/>
-    <p:sldId id="279" r:id="rId13"/>
-    <p:sldId id="273" r:id="rId14"/>
-    <p:sldId id="274" r:id="rId15"/>
-    <p:sldId id="275" r:id="rId16"/>
+    <p:sldId id="281" r:id="rId11"/>
+    <p:sldId id="271" r:id="rId12"/>
+    <p:sldId id="280" r:id="rId13"/>
+    <p:sldId id="279" r:id="rId14"/>
+    <p:sldId id="273" r:id="rId15"/>
+    <p:sldId id="274" r:id="rId16"/>
+    <p:sldId id="275" r:id="rId17"/>
   </p:sldIdLst>
   <p:sldSz cx="9144000" cy="5143500" type="screen16x9"/>
   <p:notesSz cx="6858000" cy="9144000"/>
@@ -132,6 +133,7 @@
             <p14:sldId id="278"/>
             <p14:sldId id="269"/>
             <p14:sldId id="270"/>
+            <p14:sldId id="281"/>
             <p14:sldId id="271"/>
             <p14:sldId id="280"/>
             <p14:sldId id="279"/>
@@ -211,7 +213,7 @@
 <file path=ppt/revisionInfo.xml><?xml version="1.0" encoding="utf-8"?>
 <p1510:revInfo xmlns:a="http://schemas.openxmlformats.org/drawingml/2006/main" xmlns:r="http://schemas.openxmlformats.org/officeDocument/2006/relationships" xmlns:p1510="http://schemas.microsoft.com/office/powerpoint/2015/10/main">
   <p1510:revLst>
-    <p1510:client id="{6D805A81-41E9-C4C8-F83F-224488ABF27E}" v="130" dt="2025-10-28T06:56:10.595"/>
+    <p1510:client id="{71BF5AD1-F93D-4FC8-A2AD-C496DC818E50}" v="36" dt="2026-07-31T02:12:13.017"/>
   </p1510:revLst>
 </p1510:revInfo>
 </file>
@@ -219,80 +221,82 @@
 <file path=ppt/changesInfos/changesInfo1.xml><?xml version="1.0" encoding="utf-8"?>
 <pc:chgInfo xmlns:a="http://schemas.openxmlformats.org/drawingml/2006/main" xmlns:r="http://schemas.openxmlformats.org/officeDocument/2006/relationships" xmlns:ac="http://schemas.microsoft.com/office/drawing/2013/main/command" xmlns:pc="http://schemas.microsoft.com/office/powerpoint/2013/main/command">
   <pc:docChgLst>
-    <pc:chgData name="Du Deqing SGH CDAY623" userId="S::deqing.du@zf.com::952bfef8-563c-4a9e-8e04-9697c056075b" providerId="AD" clId="Web-{6D805A81-41E9-C4C8-F83F-224488ABF27E}"/>
-    <pc:docChg chg="modSld">
-      <pc:chgData name="Du Deqing SGH CDAY623" userId="S::deqing.du@zf.com::952bfef8-563c-4a9e-8e04-9697c056075b" providerId="AD" clId="Web-{6D805A81-41E9-C4C8-F83F-224488ABF27E}" dt="2025-10-28T06:56:08.688" v="83" actId="20577"/>
+    <pc:chgData name="Yang Zhen SGH CDAY223" userId="58c6818a-3577-4ae3-8238-bcb4cc81b368" providerId="ADAL" clId="{BEBCD458-1472-443B-8616-221ED4FCAD17}"/>
+    <pc:docChg chg="undo custSel addSld modSld modSection">
+      <pc:chgData name="Yang Zhen SGH CDAY223" userId="58c6818a-3577-4ae3-8238-bcb4cc81b368" providerId="ADAL" clId="{BEBCD458-1472-443B-8616-221ED4FCAD17}" dt="2026-07-31T02:12:13.017" v="172" actId="1035"/>
       <pc:docMkLst>
         <pc:docMk/>
       </pc:docMkLst>
-      <pc:sldChg chg="modSp">
-        <pc:chgData name="Du Deqing SGH CDAY623" userId="S::deqing.du@zf.com::952bfef8-563c-4a9e-8e04-9697c056075b" providerId="AD" clId="Web-{6D805A81-41E9-C4C8-F83F-224488ABF27E}" dt="2025-10-28T06:04:11.357" v="51"/>
+      <pc:sldChg chg="addSp delSp modSp new mod">
+        <pc:chgData name="Yang Zhen SGH CDAY223" userId="58c6818a-3577-4ae3-8238-bcb4cc81b368" providerId="ADAL" clId="{BEBCD458-1472-443B-8616-221ED4FCAD17}" dt="2026-07-31T02:12:13.017" v="172" actId="1035"/>
         <pc:sldMkLst>
           <pc:docMk/>
-          <pc:sldMk cId="2687396772" sldId="276"/>
+          <pc:sldMk cId="1558857800" sldId="281"/>
         </pc:sldMkLst>
-        <pc:graphicFrameChg chg="mod modGraphic">
-          <ac:chgData name="Du Deqing SGH CDAY623" userId="S::deqing.du@zf.com::952bfef8-563c-4a9e-8e04-9697c056075b" providerId="AD" clId="Web-{6D805A81-41E9-C4C8-F83F-224488ABF27E}" dt="2025-10-28T06:04:11.357" v="51"/>
-          <ac:graphicFrameMkLst>
-            <pc:docMk/>
-            <pc:sldMk cId="2687396772" sldId="276"/>
-            <ac:graphicFrameMk id="56" creationId="{3D00C4C2-E323-5478-9D6F-C279B93A096D}"/>
-          </ac:graphicFrameMkLst>
-        </pc:graphicFrameChg>
-      </pc:sldChg>
-      <pc:sldChg chg="modSp">
-        <pc:chgData name="Du Deqing SGH CDAY623" userId="S::deqing.du@zf.com::952bfef8-563c-4a9e-8e04-9697c056075b" providerId="AD" clId="Web-{6D805A81-41E9-C4C8-F83F-224488ABF27E}" dt="2025-10-28T06:35:06.635" v="55" actId="20577"/>
-        <pc:sldMkLst>
-          <pc:docMk/>
-          <pc:sldMk cId="541563067" sldId="277"/>
-        </pc:sldMkLst>
-        <pc:spChg chg="mod">
-          <ac:chgData name="Du Deqing SGH CDAY623" userId="S::deqing.du@zf.com::952bfef8-563c-4a9e-8e04-9697c056075b" providerId="AD" clId="Web-{6D805A81-41E9-C4C8-F83F-224488ABF27E}" dt="2025-10-28T06:35:06.635" v="55" actId="20577"/>
+        <pc:spChg chg="del">
+          <ac:chgData name="Yang Zhen SGH CDAY223" userId="58c6818a-3577-4ae3-8238-bcb4cc81b368" providerId="ADAL" clId="{BEBCD458-1472-443B-8616-221ED4FCAD17}" dt="2026-07-31T01:55:46.740" v="1" actId="478"/>
           <ac:spMkLst>
             <pc:docMk/>
-            <pc:sldMk cId="541563067" sldId="277"/>
-            <ac:spMk id="88" creationId="{6EFAC7B1-18F7-BCBD-3374-F2D6766A8DBE}"/>
+            <pc:sldMk cId="1558857800" sldId="281"/>
+            <ac:spMk id="2" creationId="{1B40888F-25BD-BFAE-F2C2-E1B6FB51292E}"/>
           </ac:spMkLst>
         </pc:spChg>
-      </pc:sldChg>
-      <pc:sldChg chg="addSp delSp modSp">
-        <pc:chgData name="Du Deqing SGH CDAY623" userId="S::deqing.du@zf.com::952bfef8-563c-4a9e-8e04-9697c056075b" providerId="AD" clId="Web-{6D805A81-41E9-C4C8-F83F-224488ABF27E}" dt="2025-10-28T06:56:08.688" v="83" actId="20577"/>
-        <pc:sldMkLst>
-          <pc:docMk/>
-          <pc:sldMk cId="315028215" sldId="279"/>
-        </pc:sldMkLst>
-        <pc:spChg chg="add mod">
-          <ac:chgData name="Du Deqing SGH CDAY623" userId="S::deqing.du@zf.com::952bfef8-563c-4a9e-8e04-9697c056075b" providerId="AD" clId="Web-{6D805A81-41E9-C4C8-F83F-224488ABF27E}" dt="2025-10-28T05:48:40.390" v="22" actId="1076"/>
+        <pc:spChg chg="del">
+          <ac:chgData name="Yang Zhen SGH CDAY223" userId="58c6818a-3577-4ae3-8238-bcb4cc81b368" providerId="ADAL" clId="{BEBCD458-1472-443B-8616-221ED4FCAD17}" dt="2026-07-31T01:55:46.740" v="1" actId="478"/>
           <ac:spMkLst>
             <pc:docMk/>
-            <pc:sldMk cId="315028215" sldId="279"/>
-            <ac:spMk id="3" creationId="{5B545839-4A33-A09A-8661-4561AECEF3A6}"/>
+            <pc:sldMk cId="1558857800" sldId="281"/>
+            <ac:spMk id="3" creationId="{72E73374-7313-5B6C-45B8-FF1FADC18894}"/>
           </ac:spMkLst>
         </pc:spChg>
         <pc:spChg chg="add mod">
-          <ac:chgData name="Du Deqing SGH CDAY623" userId="S::deqing.du@zf.com::952bfef8-563c-4a9e-8e04-9697c056075b" providerId="AD" clId="Web-{6D805A81-41E9-C4C8-F83F-224488ABF27E}" dt="2025-10-28T05:50:48.598" v="31" actId="1076"/>
+          <ac:chgData name="Yang Zhen SGH CDAY223" userId="58c6818a-3577-4ae3-8238-bcb4cc81b368" providerId="ADAL" clId="{BEBCD458-1472-443B-8616-221ED4FCAD17}" dt="2026-07-31T02:12:13.017" v="172" actId="1035"/>
           <ac:spMkLst>
             <pc:docMk/>
-            <pc:sldMk cId="315028215" sldId="279"/>
-            <ac:spMk id="6" creationId="{5CDE5CF9-A263-9C28-E44D-F4EE37069770}"/>
+            <pc:sldMk cId="1558857800" sldId="281"/>
+            <ac:spMk id="8" creationId="{187699B7-1D90-4F1A-FFD6-998076C474B1}"/>
           </ac:spMkLst>
         </pc:spChg>
-        <pc:spChg chg="mod">
-          <ac:chgData name="Du Deqing SGH CDAY623" userId="S::deqing.du@zf.com::952bfef8-563c-4a9e-8e04-9697c056075b" providerId="AD" clId="Web-{6D805A81-41E9-C4C8-F83F-224488ABF27E}" dt="2025-10-28T06:56:08.688" v="83" actId="20577"/>
+        <pc:spChg chg="add mod">
+          <ac:chgData name="Yang Zhen SGH CDAY223" userId="58c6818a-3577-4ae3-8238-bcb4cc81b368" providerId="ADAL" clId="{BEBCD458-1472-443B-8616-221ED4FCAD17}" dt="2026-07-31T02:12:13.017" v="172" actId="1035"/>
           <ac:spMkLst>
             <pc:docMk/>
-            <pc:sldMk cId="315028215" sldId="279"/>
-            <ac:spMk id="24" creationId="{37F1B980-636B-8C07-CBC3-569FC310C84E}"/>
+            <pc:sldMk cId="1558857800" sldId="281"/>
+            <ac:spMk id="10" creationId="{DCEDEB52-AA73-F68E-3559-3CB564F2EC10}"/>
           </ac:spMkLst>
         </pc:spChg>
-        <pc:spChg chg="del mod">
-          <ac:chgData name="Du Deqing SGH CDAY623" userId="S::deqing.du@zf.com::952bfef8-563c-4a9e-8e04-9697c056075b" providerId="AD" clId="Web-{6D805A81-41E9-C4C8-F83F-224488ABF27E}" dt="2025-10-28T05:48:37.265" v="21"/>
-          <ac:spMkLst>
+        <pc:graphicFrameChg chg="add mod">
+          <ac:chgData name="Yang Zhen SGH CDAY223" userId="58c6818a-3577-4ae3-8238-bcb4cc81b368" providerId="ADAL" clId="{BEBCD458-1472-443B-8616-221ED4FCAD17}" dt="2026-07-31T02:12:13.017" v="172" actId="1035"/>
+          <ac:graphicFrameMkLst>
             <pc:docMk/>
-            <pc:sldMk cId="315028215" sldId="279"/>
-            <ac:spMk id="25" creationId="{1FA7CDFC-BE3C-2F43-60FC-59E6B3910F0A}"/>
-          </ac:spMkLst>
-        </pc:spChg>
+            <pc:sldMk cId="1558857800" sldId="281"/>
+            <ac:graphicFrameMk id="6" creationId="{347EDB2B-9F47-0A04-991E-12A2648E53AC}"/>
+          </ac:graphicFrameMkLst>
+        </pc:graphicFrameChg>
+        <pc:graphicFrameChg chg="add mod">
+          <ac:chgData name="Yang Zhen SGH CDAY223" userId="58c6818a-3577-4ae3-8238-bcb4cc81b368" providerId="ADAL" clId="{BEBCD458-1472-443B-8616-221ED4FCAD17}" dt="2026-07-31T02:12:13.017" v="172" actId="1035"/>
+          <ac:graphicFrameMkLst>
+            <pc:docMk/>
+            <pc:sldMk cId="1558857800" sldId="281"/>
+            <ac:graphicFrameMk id="7" creationId="{4A6B301A-F7B4-5AC6-8145-1D047576D413}"/>
+          </ac:graphicFrameMkLst>
+        </pc:graphicFrameChg>
+        <pc:graphicFrameChg chg="add mod modGraphic">
+          <ac:chgData name="Yang Zhen SGH CDAY223" userId="58c6818a-3577-4ae3-8238-bcb4cc81b368" providerId="ADAL" clId="{BEBCD458-1472-443B-8616-221ED4FCAD17}" dt="2026-07-31T02:12:13.017" v="172" actId="1035"/>
+          <ac:graphicFrameMkLst>
+            <pc:docMk/>
+            <pc:sldMk cId="1558857800" sldId="281"/>
+            <ac:graphicFrameMk id="11" creationId="{B66C5573-F4DC-5228-3C78-CDB648F20CF4}"/>
+          </ac:graphicFrameMkLst>
+        </pc:graphicFrameChg>
+        <pc:graphicFrameChg chg="add mod">
+          <ac:chgData name="Yang Zhen SGH CDAY223" userId="58c6818a-3577-4ae3-8238-bcb4cc81b368" providerId="ADAL" clId="{BEBCD458-1472-443B-8616-221ED4FCAD17}" dt="2026-07-31T02:12:13.017" v="172" actId="1035"/>
+          <ac:graphicFrameMkLst>
+            <pc:docMk/>
+            <pc:sldMk cId="1558857800" sldId="281"/>
+            <ac:graphicFrameMk id="12" creationId="{8A2D3F4D-0283-EA60-7B64-F8F59D06910E}"/>
+          </ac:graphicFrameMkLst>
+        </pc:graphicFrameChg>
       </pc:sldChg>
     </pc:docChg>
   </pc:docChgLst>
@@ -381,7 +385,7 @@
           <a:p>
             <a:fld id="{37581487-DED7-4908-9A01-0A45EDCB1D6C}" type="datetimeFigureOut">
               <a:rPr lang="de-DE" sz="1000" smtClean="0"/>
-              <a:t>27.10.2025</a:t>
+              <a:t>30.07.2026</a:t>
             </a:fld>
             <a:endParaRPr lang="de-DE" sz="1000"/>
           </a:p>
@@ -16946,6 +16950,1462 @@
         <p:cNvPr id="1" name="">
           <a:extLst>
             <a:ext uri="{FF2B5EF4-FFF2-40B4-BE49-F238E27FC236}">
+              <a16:creationId xmlns:a16="http://schemas.microsoft.com/office/drawing/2014/main" id="{764B31EE-7C82-CF2C-8967-4AC6BA884BF9}"/>
+            </a:ext>
+          </a:extLst>
+        </p:cNvPr>
+        <p:cNvGrpSpPr/>
+        <p:nvPr/>
+      </p:nvGrpSpPr>
+      <p:grpSpPr>
+        <a:xfrm>
+          <a:off x="0" y="0"/>
+          <a:ext cx="0" cy="0"/>
+          <a:chOff x="0" y="0"/>
+          <a:chExt cx="0" cy="0"/>
+        </a:xfrm>
+      </p:grpSpPr>
+      <p:sp>
+        <p:nvSpPr>
+          <p:cNvPr id="2" name="Title 1">
+            <a:extLst>
+              <a:ext uri="{FF2B5EF4-FFF2-40B4-BE49-F238E27FC236}">
+                <a16:creationId xmlns:a16="http://schemas.microsoft.com/office/drawing/2014/main" id="{21767375-9BD3-45AB-E4D2-417905005B92}"/>
+              </a:ext>
+            </a:extLst>
+          </p:cNvPr>
+          <p:cNvSpPr>
+            <a:spLocks noGrp="1"/>
+          </p:cNvSpPr>
+          <p:nvPr>
+            <p:ph type="title"/>
+          </p:nvPr>
+        </p:nvSpPr>
+        <p:spPr>
+          <a:xfrm>
+            <a:off x="58083" y="75943"/>
+            <a:ext cx="8424001" cy="593817"/>
+          </a:xfrm>
+        </p:spPr>
+        <p:txBody>
+          <a:bodyPr/>
+          <a:lstStyle/>
+          <a:p>
+            <a:r>
+              <a:rPr lang="en-US" altLang="zh-CN"/>
+              <a:t>HDC function architecture design</a:t>
+            </a:r>
+            <a:endParaRPr lang="zh-CN" altLang="en-US"/>
+          </a:p>
+        </p:txBody>
+      </p:sp>
+      <p:sp>
+        <p:nvSpPr>
+          <p:cNvPr id="4" name="Footer Placeholder 3">
+            <a:extLst>
+              <a:ext uri="{FF2B5EF4-FFF2-40B4-BE49-F238E27FC236}">
+                <a16:creationId xmlns:a16="http://schemas.microsoft.com/office/drawing/2014/main" id="{9163F796-D80A-4D17-F058-3DEED6745D70}"/>
+              </a:ext>
+            </a:extLst>
+          </p:cNvPr>
+          <p:cNvSpPr>
+            <a:spLocks noGrp="1"/>
+          </p:cNvSpPr>
+          <p:nvPr>
+            <p:ph type="ftr" sz="quarter" idx="11"/>
+          </p:nvPr>
+        </p:nvSpPr>
+        <p:spPr/>
+        <p:txBody>
+          <a:bodyPr/>
+          <a:lstStyle/>
+          <a:p>
+            <a:endParaRPr lang="de-DE"/>
+          </a:p>
+        </p:txBody>
+      </p:sp>
+      <p:sp>
+        <p:nvSpPr>
+          <p:cNvPr id="5" name="Slide Number Placeholder 4">
+            <a:extLst>
+              <a:ext uri="{FF2B5EF4-FFF2-40B4-BE49-F238E27FC236}">
+                <a16:creationId xmlns:a16="http://schemas.microsoft.com/office/drawing/2014/main" id="{C0CEEAE6-A2F6-06EA-6568-E54520E8C869}"/>
+              </a:ext>
+            </a:extLst>
+          </p:cNvPr>
+          <p:cNvSpPr>
+            <a:spLocks noGrp="1"/>
+          </p:cNvSpPr>
+          <p:nvPr>
+            <p:ph type="sldNum" sz="quarter" idx="12"/>
+          </p:nvPr>
+        </p:nvSpPr>
+        <p:spPr/>
+        <p:txBody>
+          <a:bodyPr/>
+          <a:lstStyle/>
+          <a:p>
+            <a:fld id="{AE839375-43AA-4A5D-B991-4343C4570BCB}" type="slidenum">
+              <a:rPr lang="de-DE" smtClean="0"/>
+              <a:t>10</a:t>
+            </a:fld>
+            <a:endParaRPr lang="de-DE"/>
+          </a:p>
+        </p:txBody>
+      </p:sp>
+      <p:sp>
+        <p:nvSpPr>
+          <p:cNvPr id="7" name="Rectangle 6">
+            <a:extLst>
+              <a:ext uri="{FF2B5EF4-FFF2-40B4-BE49-F238E27FC236}">
+                <a16:creationId xmlns:a16="http://schemas.microsoft.com/office/drawing/2014/main" id="{85423592-75D6-161D-03DD-28CDE606EC69}"/>
+              </a:ext>
+            </a:extLst>
+          </p:cNvPr>
+          <p:cNvSpPr/>
+          <p:nvPr/>
+        </p:nvSpPr>
+        <p:spPr>
+          <a:xfrm>
+            <a:off x="555354" y="1897396"/>
+            <a:ext cx="1073200" cy="582967"/>
+          </a:xfrm>
+          <a:prstGeom prst="rect">
+            <a:avLst/>
+          </a:prstGeom>
+          <a:noFill/>
+          <a:ln w="12700" cap="flat" cmpd="sng" algn="ctr">
+            <a:solidFill>
+              <a:schemeClr val="tx1"/>
+            </a:solidFill>
+            <a:prstDash val="solid"/>
+          </a:ln>
+          <a:effectLst/>
+        </p:spPr>
+        <p:txBody>
+          <a:bodyPr rot="0" spcFirstLastPara="0" vertOverflow="overflow" horzOverflow="overflow" vert="horz" wrap="square" lIns="90000" tIns="90000" rIns="90000" bIns="90000" numCol="1" spcCol="0" rtlCol="0" fromWordArt="0" anchor="ctr" anchorCtr="0" forceAA="0" compatLnSpc="1">
+            <a:prstTxWarp prst="textNoShape">
+              <a:avLst/>
+            </a:prstTxWarp>
+            <a:noAutofit/>
+          </a:bodyPr>
+          <a:lstStyle/>
+          <a:p>
+            <a:pPr algn="ctr" fontAlgn="base">
+              <a:spcAft>
+                <a:spcPct val="0"/>
+              </a:spcAft>
+            </a:pPr>
+            <a:r>
+              <a:rPr lang="en-US" altLang="zh-CN" sz="800" kern="0">
+                <a:latin typeface="Tahoma"/>
+                <a:cs typeface="Tahoma" pitchFamily="34" charset="0"/>
+              </a:rPr>
+              <a:t>HDC</a:t>
+            </a:r>
+          </a:p>
+          <a:p>
+            <a:pPr algn="ctr" fontAlgn="base">
+              <a:spcAft>
+                <a:spcPct val="0"/>
+              </a:spcAft>
+            </a:pPr>
+            <a:r>
+              <a:rPr lang="en-US" altLang="zh-CN" sz="800" kern="0">
+                <a:latin typeface="Tahoma"/>
+                <a:cs typeface="Tahoma" pitchFamily="34" charset="0"/>
+              </a:rPr>
+              <a:t>(Calc sum </a:t>
+            </a:r>
+            <a:r>
+              <a:rPr lang="en-US" altLang="zh-CN" sz="800" kern="0" err="1">
+                <a:latin typeface="Tahoma"/>
+                <a:cs typeface="Tahoma" pitchFamily="34" charset="0"/>
+              </a:rPr>
+              <a:t>decel</a:t>
+            </a:r>
+            <a:r>
+              <a:rPr lang="en-US" altLang="zh-CN" sz="800" kern="0">
+                <a:latin typeface="Tahoma"/>
+                <a:cs typeface="Tahoma" pitchFamily="34" charset="0"/>
+              </a:rPr>
+              <a:t> torque)</a:t>
+            </a:r>
+            <a:endParaRPr lang="zh-CN" altLang="en-US" sz="800" kern="0" err="1">
+              <a:latin typeface="Tahoma"/>
+              <a:cs typeface="Tahoma" pitchFamily="34" charset="0"/>
+            </a:endParaRPr>
+          </a:p>
+        </p:txBody>
+      </p:sp>
+      <p:sp>
+        <p:nvSpPr>
+          <p:cNvPr id="8" name="Rectangle 7">
+            <a:extLst>
+              <a:ext uri="{FF2B5EF4-FFF2-40B4-BE49-F238E27FC236}">
+                <a16:creationId xmlns:a16="http://schemas.microsoft.com/office/drawing/2014/main" id="{B63EB8A0-EAB1-F075-777F-7005A5E7A194}"/>
+              </a:ext>
+            </a:extLst>
+          </p:cNvPr>
+          <p:cNvSpPr/>
+          <p:nvPr/>
+        </p:nvSpPr>
+        <p:spPr>
+          <a:xfrm>
+            <a:off x="2972871" y="1790367"/>
+            <a:ext cx="1159388" cy="795791"/>
+          </a:xfrm>
+          <a:prstGeom prst="rect">
+            <a:avLst/>
+          </a:prstGeom>
+          <a:noFill/>
+          <a:ln w="12700" cap="flat" cmpd="sng" algn="ctr">
+            <a:solidFill>
+              <a:schemeClr val="tx1"/>
+            </a:solidFill>
+            <a:prstDash val="solid"/>
+          </a:ln>
+          <a:effectLst/>
+        </p:spPr>
+        <p:txBody>
+          <a:bodyPr rot="0" spcFirstLastPara="0" vertOverflow="overflow" horzOverflow="overflow" vert="horz" wrap="square" lIns="90000" tIns="90000" rIns="90000" bIns="90000" numCol="1" spcCol="0" rtlCol="0" fromWordArt="0" anchor="ctr" anchorCtr="0" forceAA="0" compatLnSpc="1">
+            <a:prstTxWarp prst="textNoShape">
+              <a:avLst/>
+            </a:prstTxWarp>
+            <a:noAutofit/>
+          </a:bodyPr>
+          <a:lstStyle/>
+          <a:p>
+            <a:pPr algn="ctr" fontAlgn="base">
+              <a:spcAft>
+                <a:spcPct val="0"/>
+              </a:spcAft>
+            </a:pPr>
+            <a:r>
+              <a:rPr lang="en-US" altLang="zh-CN" sz="800" kern="0">
+                <a:latin typeface="Tahoma"/>
+                <a:cs typeface="Tahoma" pitchFamily="34" charset="0"/>
+              </a:rPr>
+              <a:t>ARB</a:t>
+            </a:r>
+          </a:p>
+          <a:p>
+            <a:pPr algn="ctr" fontAlgn="base">
+              <a:spcAft>
+                <a:spcPct val="0"/>
+              </a:spcAft>
+            </a:pPr>
+            <a:r>
+              <a:rPr lang="en-US" altLang="zh-CN" sz="800" kern="0">
+                <a:latin typeface="Tahoma"/>
+                <a:cs typeface="Tahoma" pitchFamily="34" charset="0"/>
+              </a:rPr>
+              <a:t>(Torque distribution)</a:t>
+            </a:r>
+          </a:p>
+        </p:txBody>
+      </p:sp>
+      <p:cxnSp>
+        <p:nvCxnSpPr>
+          <p:cNvPr id="9" name="Connector: Elbow 8">
+            <a:extLst>
+              <a:ext uri="{FF2B5EF4-FFF2-40B4-BE49-F238E27FC236}">
+                <a16:creationId xmlns:a16="http://schemas.microsoft.com/office/drawing/2014/main" id="{4CE8EE85-9E58-BEB9-BF74-AC7C1108FE79}"/>
+              </a:ext>
+            </a:extLst>
+          </p:cNvPr>
+          <p:cNvCxnSpPr>
+            <a:cxnSpLocks/>
+            <a:stCxn id="7" idx="3"/>
+            <a:endCxn id="8" idx="1"/>
+          </p:cNvCxnSpPr>
+          <p:nvPr/>
+        </p:nvCxnSpPr>
+        <p:spPr>
+          <a:xfrm flipV="1">
+            <a:off x="1628554" y="2188263"/>
+            <a:ext cx="1344317" cy="617"/>
+          </a:xfrm>
+          <a:prstGeom prst="bentConnector3">
+            <a:avLst/>
+          </a:prstGeom>
+          <a:ln>
+            <a:tailEnd type="triangle"/>
+          </a:ln>
+        </p:spPr>
+        <p:style>
+          <a:lnRef idx="1">
+            <a:schemeClr val="dk1"/>
+          </a:lnRef>
+          <a:fillRef idx="0">
+            <a:schemeClr val="dk1"/>
+          </a:fillRef>
+          <a:effectRef idx="0">
+            <a:schemeClr val="dk1"/>
+          </a:effectRef>
+          <a:fontRef idx="minor">
+            <a:schemeClr val="tx1"/>
+          </a:fontRef>
+        </p:style>
+      </p:cxnSp>
+      <p:sp>
+        <p:nvSpPr>
+          <p:cNvPr id="10" name="TextBox 9">
+            <a:extLst>
+              <a:ext uri="{FF2B5EF4-FFF2-40B4-BE49-F238E27FC236}">
+                <a16:creationId xmlns:a16="http://schemas.microsoft.com/office/drawing/2014/main" id="{8F01DC34-80F3-CD8D-288A-ABCE333660A4}"/>
+              </a:ext>
+            </a:extLst>
+          </p:cNvPr>
+          <p:cNvSpPr txBox="1"/>
+          <p:nvPr/>
+        </p:nvSpPr>
+        <p:spPr>
+          <a:xfrm>
+            <a:off x="1630846" y="1981382"/>
+            <a:ext cx="1444517" cy="246221"/>
+          </a:xfrm>
+          <a:prstGeom prst="rect">
+            <a:avLst/>
+          </a:prstGeom>
+          <a:noFill/>
+        </p:spPr>
+        <p:txBody>
+          <a:bodyPr wrap="square">
+            <a:spAutoFit/>
+          </a:bodyPr>
+          <a:lstStyle/>
+          <a:p>
+            <a:pPr algn="ctr" fontAlgn="base">
+              <a:spcAft>
+                <a:spcPct val="0"/>
+              </a:spcAft>
+            </a:pPr>
+            <a:r>
+              <a:rPr lang="en-US" altLang="zh-CN" sz="1000" kern="0">
+                <a:latin typeface="Tahoma"/>
+                <a:cs typeface="Tahoma" pitchFamily="34" charset="0"/>
+              </a:rPr>
+              <a:t>1× sum </a:t>
+            </a:r>
+            <a:r>
+              <a:rPr lang="en-US" altLang="zh-CN" sz="1000" kern="0" err="1">
+                <a:latin typeface="Tahoma"/>
+                <a:cs typeface="Tahoma" pitchFamily="34" charset="0"/>
+              </a:rPr>
+              <a:t>decel</a:t>
+            </a:r>
+            <a:r>
+              <a:rPr lang="en-US" altLang="zh-CN" sz="1000" kern="0">
+                <a:latin typeface="Tahoma"/>
+                <a:cs typeface="Tahoma" pitchFamily="34" charset="0"/>
+              </a:rPr>
+              <a:t> torque</a:t>
+            </a:r>
+            <a:endParaRPr lang="zh-CN" altLang="en-US" sz="1000" kern="0" err="1">
+              <a:latin typeface="Tahoma"/>
+              <a:cs typeface="Tahoma" pitchFamily="34" charset="0"/>
+            </a:endParaRPr>
+          </a:p>
+        </p:txBody>
+      </p:sp>
+      <p:cxnSp>
+        <p:nvCxnSpPr>
+          <p:cNvPr id="12" name="Straight Arrow Connector 11">
+            <a:extLst>
+              <a:ext uri="{FF2B5EF4-FFF2-40B4-BE49-F238E27FC236}">
+                <a16:creationId xmlns:a16="http://schemas.microsoft.com/office/drawing/2014/main" id="{ADD9E565-5E40-117F-AE3E-B03E602F2261}"/>
+              </a:ext>
+            </a:extLst>
+          </p:cNvPr>
+          <p:cNvCxnSpPr/>
+          <p:nvPr/>
+        </p:nvCxnSpPr>
+        <p:spPr>
+          <a:xfrm flipV="1">
+            <a:off x="689703" y="2481891"/>
+            <a:ext cx="0" cy="471268"/>
+          </a:xfrm>
+          <a:prstGeom prst="straightConnector1">
+            <a:avLst/>
+          </a:prstGeom>
+          <a:ln>
+            <a:tailEnd type="triangle"/>
+          </a:ln>
+        </p:spPr>
+        <p:style>
+          <a:lnRef idx="1">
+            <a:schemeClr val="dk1"/>
+          </a:lnRef>
+          <a:fillRef idx="0">
+            <a:schemeClr val="dk1"/>
+          </a:fillRef>
+          <a:effectRef idx="0">
+            <a:schemeClr val="dk1"/>
+          </a:effectRef>
+          <a:fontRef idx="minor">
+            <a:schemeClr val="tx1"/>
+          </a:fontRef>
+        </p:style>
+      </p:cxnSp>
+      <p:cxnSp>
+        <p:nvCxnSpPr>
+          <p:cNvPr id="13" name="Straight Arrow Connector 12">
+            <a:extLst>
+              <a:ext uri="{FF2B5EF4-FFF2-40B4-BE49-F238E27FC236}">
+                <a16:creationId xmlns:a16="http://schemas.microsoft.com/office/drawing/2014/main" id="{85617856-0CF3-51D6-5FD3-B68FD22E7057}"/>
+              </a:ext>
+            </a:extLst>
+          </p:cNvPr>
+          <p:cNvCxnSpPr/>
+          <p:nvPr/>
+        </p:nvCxnSpPr>
+        <p:spPr>
+          <a:xfrm flipV="1">
+            <a:off x="1525718" y="2481891"/>
+            <a:ext cx="0" cy="471268"/>
+          </a:xfrm>
+          <a:prstGeom prst="straightConnector1">
+            <a:avLst/>
+          </a:prstGeom>
+          <a:ln>
+            <a:tailEnd type="triangle"/>
+          </a:ln>
+        </p:spPr>
+        <p:style>
+          <a:lnRef idx="1">
+            <a:schemeClr val="dk1"/>
+          </a:lnRef>
+          <a:fillRef idx="0">
+            <a:schemeClr val="dk1"/>
+          </a:fillRef>
+          <a:effectRef idx="0">
+            <a:schemeClr val="dk1"/>
+          </a:effectRef>
+          <a:fontRef idx="minor">
+            <a:schemeClr val="tx1"/>
+          </a:fontRef>
+        </p:style>
+      </p:cxnSp>
+      <p:sp>
+        <p:nvSpPr>
+          <p:cNvPr id="15" name="TextBox 14">
+            <a:extLst>
+              <a:ext uri="{FF2B5EF4-FFF2-40B4-BE49-F238E27FC236}">
+                <a16:creationId xmlns:a16="http://schemas.microsoft.com/office/drawing/2014/main" id="{0E163FFF-6A50-15A0-7C77-189DA83D2F26}"/>
+              </a:ext>
+            </a:extLst>
+          </p:cNvPr>
+          <p:cNvSpPr txBox="1"/>
+          <p:nvPr/>
+        </p:nvSpPr>
+        <p:spPr>
+          <a:xfrm>
+            <a:off x="359247" y="2799248"/>
+            <a:ext cx="676467" cy="123111"/>
+          </a:xfrm>
+          <a:prstGeom prst="rect">
+            <a:avLst/>
+          </a:prstGeom>
+          <a:noFill/>
+        </p:spPr>
+        <p:txBody>
+          <a:bodyPr wrap="none" lIns="0" tIns="0" rIns="0" bIns="0" rtlCol="0">
+            <a:spAutoFit/>
+          </a:bodyPr>
+          <a:lstStyle/>
+          <a:p>
+            <a:pPr marL="0" marR="0" indent="0" defTabSz="914400" eaLnBrk="1" fontAlgn="base" latinLnBrk="0" hangingPunct="1">
+              <a:lnSpc>
+                <a:spcPct val="100000"/>
+              </a:lnSpc>
+              <a:spcBef>
+                <a:spcPts val="0"/>
+              </a:spcBef>
+              <a:spcAft>
+                <a:spcPct val="0"/>
+              </a:spcAft>
+              <a:buClrTx/>
+              <a:buSzTx/>
+              <a:buFontTx/>
+              <a:buNone/>
+              <a:tabLst/>
+            </a:pPr>
+            <a:r>
+              <a:rPr kumimoji="0" lang="en-US" altLang="zh-CN" sz="800" b="0" i="0" u="none" strike="noStrike" kern="0" cap="none" spc="0" normalizeH="0" baseline="0" noProof="0">
+                <a:ln>
+                  <a:noFill/>
+                </a:ln>
+                <a:solidFill>
+                  <a:srgbClr val="000000"/>
+                </a:solidFill>
+                <a:effectLst/>
+                <a:uLnTx/>
+                <a:uFillTx/>
+              </a:rPr>
+              <a:t>Motor Capacity</a:t>
+            </a:r>
+            <a:endParaRPr kumimoji="0" lang="zh-CN" altLang="en-US" sz="800" b="0" i="0" u="none" strike="noStrike" kern="0" cap="none" spc="0" normalizeH="0" baseline="0" noProof="0">
+              <a:ln>
+                <a:noFill/>
+              </a:ln>
+              <a:solidFill>
+                <a:srgbClr val="000000"/>
+              </a:solidFill>
+              <a:effectLst/>
+              <a:uLnTx/>
+              <a:uFillTx/>
+            </a:endParaRPr>
+          </a:p>
+        </p:txBody>
+      </p:sp>
+      <p:sp>
+        <p:nvSpPr>
+          <p:cNvPr id="16" name="TextBox 15">
+            <a:extLst>
+              <a:ext uri="{FF2B5EF4-FFF2-40B4-BE49-F238E27FC236}">
+                <a16:creationId xmlns:a16="http://schemas.microsoft.com/office/drawing/2014/main" id="{38736F32-F1B3-E545-2334-3CA1A714B869}"/>
+              </a:ext>
+            </a:extLst>
+          </p:cNvPr>
+          <p:cNvSpPr txBox="1"/>
+          <p:nvPr/>
+        </p:nvSpPr>
+        <p:spPr>
+          <a:xfrm>
+            <a:off x="1278555" y="2655969"/>
+            <a:ext cx="512961" cy="123111"/>
+          </a:xfrm>
+          <a:prstGeom prst="rect">
+            <a:avLst/>
+          </a:prstGeom>
+          <a:noFill/>
+        </p:spPr>
+        <p:txBody>
+          <a:bodyPr wrap="none" lIns="0" tIns="0" rIns="0" bIns="0" rtlCol="0">
+            <a:spAutoFit/>
+          </a:bodyPr>
+          <a:lstStyle/>
+          <a:p>
+            <a:pPr marL="0" marR="0" indent="0" defTabSz="914400" eaLnBrk="1" fontAlgn="base" latinLnBrk="0" hangingPunct="1">
+              <a:lnSpc>
+                <a:spcPct val="100000"/>
+              </a:lnSpc>
+              <a:spcBef>
+                <a:spcPts val="0"/>
+              </a:spcBef>
+              <a:spcAft>
+                <a:spcPct val="0"/>
+              </a:spcAft>
+              <a:buClrTx/>
+              <a:buSzTx/>
+              <a:buFontTx/>
+              <a:buNone/>
+              <a:tabLst/>
+            </a:pPr>
+            <a:r>
+              <a:rPr lang="en-US" altLang="zh-CN" sz="800" kern="0">
+                <a:solidFill>
+                  <a:srgbClr val="000000"/>
+                </a:solidFill>
+              </a:rPr>
+              <a:t>Brake state</a:t>
+            </a:r>
+            <a:endParaRPr kumimoji="0" lang="zh-CN" altLang="en-US" sz="800" b="0" i="0" u="none" strike="noStrike" kern="0" cap="none" spc="0" normalizeH="0" baseline="0" noProof="0">
+              <a:ln>
+                <a:noFill/>
+              </a:ln>
+              <a:solidFill>
+                <a:srgbClr val="000000"/>
+              </a:solidFill>
+              <a:effectLst/>
+              <a:uLnTx/>
+              <a:uFillTx/>
+            </a:endParaRPr>
+          </a:p>
+        </p:txBody>
+      </p:sp>
+      <p:sp>
+        <p:nvSpPr>
+          <p:cNvPr id="17" name="Rectangle 16">
+            <a:extLst>
+              <a:ext uri="{FF2B5EF4-FFF2-40B4-BE49-F238E27FC236}">
+                <a16:creationId xmlns:a16="http://schemas.microsoft.com/office/drawing/2014/main" id="{2F3C7507-6C46-88CC-D380-3CE999A125CF}"/>
+              </a:ext>
+            </a:extLst>
+          </p:cNvPr>
+          <p:cNvSpPr/>
+          <p:nvPr/>
+        </p:nvSpPr>
+        <p:spPr>
+          <a:xfrm>
+            <a:off x="5225484" y="1790367"/>
+            <a:ext cx="1073199" cy="815421"/>
+          </a:xfrm>
+          <a:prstGeom prst="rect">
+            <a:avLst/>
+          </a:prstGeom>
+          <a:noFill/>
+          <a:ln w="12700" cap="flat" cmpd="sng" algn="ctr">
+            <a:solidFill>
+              <a:schemeClr val="tx1"/>
+            </a:solidFill>
+            <a:prstDash val="solid"/>
+          </a:ln>
+          <a:effectLst/>
+        </p:spPr>
+        <p:txBody>
+          <a:bodyPr rot="0" spcFirstLastPara="0" vertOverflow="overflow" horzOverflow="overflow" vert="horz" wrap="square" lIns="90000" tIns="90000" rIns="90000" bIns="90000" numCol="1" spcCol="0" rtlCol="0" fromWordArt="0" anchor="ctr" anchorCtr="0" forceAA="0" compatLnSpc="1">
+            <a:prstTxWarp prst="textNoShape">
+              <a:avLst/>
+            </a:prstTxWarp>
+            <a:noAutofit/>
+          </a:bodyPr>
+          <a:lstStyle/>
+          <a:p>
+            <a:pPr algn="ctr" fontAlgn="base">
+              <a:spcAft>
+                <a:spcPct val="0"/>
+              </a:spcAft>
+            </a:pPr>
+            <a:r>
+              <a:rPr lang="en-US" altLang="zh-CN" sz="800" kern="0">
+                <a:latin typeface="Tahoma"/>
+                <a:cs typeface="Tahoma" pitchFamily="34" charset="0"/>
+              </a:rPr>
+              <a:t>Target Calculation</a:t>
+            </a:r>
+          </a:p>
+        </p:txBody>
+      </p:sp>
+      <p:cxnSp>
+        <p:nvCxnSpPr>
+          <p:cNvPr id="18" name="Straight Arrow Connector 17">
+            <a:extLst>
+              <a:ext uri="{FF2B5EF4-FFF2-40B4-BE49-F238E27FC236}">
+                <a16:creationId xmlns:a16="http://schemas.microsoft.com/office/drawing/2014/main" id="{B64BF7AC-7DB9-7FCD-D56F-880E22A0820C}"/>
+              </a:ext>
+            </a:extLst>
+          </p:cNvPr>
+          <p:cNvCxnSpPr/>
+          <p:nvPr/>
+        </p:nvCxnSpPr>
+        <p:spPr>
+          <a:xfrm>
+            <a:off x="4132259" y="2104492"/>
+            <a:ext cx="1093225" cy="0"/>
+          </a:xfrm>
+          <a:prstGeom prst="straightConnector1">
+            <a:avLst/>
+          </a:prstGeom>
+          <a:ln>
+            <a:tailEnd type="triangle"/>
+          </a:ln>
+        </p:spPr>
+        <p:style>
+          <a:lnRef idx="1">
+            <a:schemeClr val="dk1"/>
+          </a:lnRef>
+          <a:fillRef idx="0">
+            <a:schemeClr val="dk1"/>
+          </a:fillRef>
+          <a:effectRef idx="0">
+            <a:schemeClr val="dk1"/>
+          </a:effectRef>
+          <a:fontRef idx="minor">
+            <a:schemeClr val="tx1"/>
+          </a:fontRef>
+        </p:style>
+      </p:cxnSp>
+      <p:cxnSp>
+        <p:nvCxnSpPr>
+          <p:cNvPr id="19" name="Straight Arrow Connector 18">
+            <a:extLst>
+              <a:ext uri="{FF2B5EF4-FFF2-40B4-BE49-F238E27FC236}">
+                <a16:creationId xmlns:a16="http://schemas.microsoft.com/office/drawing/2014/main" id="{A187B2E0-6B62-B35D-7062-07844DFB96A1}"/>
+              </a:ext>
+            </a:extLst>
+          </p:cNvPr>
+          <p:cNvCxnSpPr/>
+          <p:nvPr/>
+        </p:nvCxnSpPr>
+        <p:spPr>
+          <a:xfrm>
+            <a:off x="4132259" y="2456184"/>
+            <a:ext cx="1093225" cy="0"/>
+          </a:xfrm>
+          <a:prstGeom prst="straightConnector1">
+            <a:avLst/>
+          </a:prstGeom>
+          <a:ln>
+            <a:tailEnd type="triangle"/>
+          </a:ln>
+        </p:spPr>
+        <p:style>
+          <a:lnRef idx="1">
+            <a:schemeClr val="dk1"/>
+          </a:lnRef>
+          <a:fillRef idx="0">
+            <a:schemeClr val="dk1"/>
+          </a:fillRef>
+          <a:effectRef idx="0">
+            <a:schemeClr val="dk1"/>
+          </a:effectRef>
+          <a:fontRef idx="minor">
+            <a:schemeClr val="tx1"/>
+          </a:fontRef>
+        </p:style>
+      </p:cxnSp>
+      <p:sp>
+        <p:nvSpPr>
+          <p:cNvPr id="20" name="TextBox 19">
+            <a:extLst>
+              <a:ext uri="{FF2B5EF4-FFF2-40B4-BE49-F238E27FC236}">
+                <a16:creationId xmlns:a16="http://schemas.microsoft.com/office/drawing/2014/main" id="{0EF8FBE3-1695-C104-957E-D2743E8C75EF}"/>
+              </a:ext>
+            </a:extLst>
+          </p:cNvPr>
+          <p:cNvSpPr txBox="1"/>
+          <p:nvPr/>
+        </p:nvSpPr>
+        <p:spPr>
+          <a:xfrm>
+            <a:off x="4029767" y="1897396"/>
+            <a:ext cx="1444517" cy="246221"/>
+          </a:xfrm>
+          <a:prstGeom prst="rect">
+            <a:avLst/>
+          </a:prstGeom>
+          <a:noFill/>
+        </p:spPr>
+        <p:txBody>
+          <a:bodyPr wrap="square">
+            <a:spAutoFit/>
+          </a:bodyPr>
+          <a:lstStyle/>
+          <a:p>
+            <a:pPr algn="ctr" fontAlgn="base">
+              <a:spcAft>
+                <a:spcPct val="0"/>
+              </a:spcAft>
+            </a:pPr>
+            <a:r>
+              <a:rPr lang="en-US" altLang="zh-CN" sz="1000" kern="0">
+                <a:latin typeface="Tahoma"/>
+                <a:cs typeface="Tahoma" pitchFamily="34" charset="0"/>
+              </a:rPr>
+              <a:t>1× brake torque</a:t>
+            </a:r>
+            <a:endParaRPr lang="zh-CN" altLang="en-US" sz="1000" kern="0" err="1">
+              <a:latin typeface="Tahoma"/>
+              <a:cs typeface="Tahoma" pitchFamily="34" charset="0"/>
+            </a:endParaRPr>
+          </a:p>
+        </p:txBody>
+      </p:sp>
+      <p:sp>
+        <p:nvSpPr>
+          <p:cNvPr id="21" name="TextBox 20">
+            <a:extLst>
+              <a:ext uri="{FF2B5EF4-FFF2-40B4-BE49-F238E27FC236}">
+                <a16:creationId xmlns:a16="http://schemas.microsoft.com/office/drawing/2014/main" id="{C5EDCD47-49ED-BDAD-3AE9-32540372818B}"/>
+              </a:ext>
+            </a:extLst>
+          </p:cNvPr>
+          <p:cNvSpPr txBox="1"/>
+          <p:nvPr/>
+        </p:nvSpPr>
+        <p:spPr>
+          <a:xfrm>
+            <a:off x="4029767" y="2234142"/>
+            <a:ext cx="1444517" cy="246221"/>
+          </a:xfrm>
+          <a:prstGeom prst="rect">
+            <a:avLst/>
+          </a:prstGeom>
+          <a:noFill/>
+        </p:spPr>
+        <p:txBody>
+          <a:bodyPr wrap="square">
+            <a:spAutoFit/>
+          </a:bodyPr>
+          <a:lstStyle/>
+          <a:p>
+            <a:pPr algn="ctr" fontAlgn="base">
+              <a:spcAft>
+                <a:spcPct val="0"/>
+              </a:spcAft>
+            </a:pPr>
+            <a:r>
+              <a:rPr lang="en-US" altLang="zh-CN" sz="1000" kern="0">
+                <a:latin typeface="Tahoma"/>
+                <a:cs typeface="Tahoma" pitchFamily="34" charset="0"/>
+              </a:rPr>
+              <a:t>1× regen torque</a:t>
+            </a:r>
+            <a:endParaRPr lang="zh-CN" altLang="en-US" sz="1000" kern="0" err="1">
+              <a:latin typeface="Tahoma"/>
+              <a:cs typeface="Tahoma" pitchFamily="34" charset="0"/>
+            </a:endParaRPr>
+          </a:p>
+        </p:txBody>
+      </p:sp>
+      <p:cxnSp>
+        <p:nvCxnSpPr>
+          <p:cNvPr id="22" name="Straight Arrow Connector 21">
+            <a:extLst>
+              <a:ext uri="{FF2B5EF4-FFF2-40B4-BE49-F238E27FC236}">
+                <a16:creationId xmlns:a16="http://schemas.microsoft.com/office/drawing/2014/main" id="{CAB7BE44-AD12-0E94-5170-596E59F4326F}"/>
+              </a:ext>
+            </a:extLst>
+          </p:cNvPr>
+          <p:cNvCxnSpPr/>
+          <p:nvPr/>
+        </p:nvCxnSpPr>
+        <p:spPr>
+          <a:xfrm>
+            <a:off x="6319785" y="2083721"/>
+            <a:ext cx="1093225" cy="0"/>
+          </a:xfrm>
+          <a:prstGeom prst="straightConnector1">
+            <a:avLst/>
+          </a:prstGeom>
+          <a:ln>
+            <a:tailEnd type="triangle"/>
+          </a:ln>
+        </p:spPr>
+        <p:style>
+          <a:lnRef idx="1">
+            <a:schemeClr val="dk1"/>
+          </a:lnRef>
+          <a:fillRef idx="0">
+            <a:schemeClr val="dk1"/>
+          </a:fillRef>
+          <a:effectRef idx="0">
+            <a:schemeClr val="dk1"/>
+          </a:effectRef>
+          <a:fontRef idx="minor">
+            <a:schemeClr val="tx1"/>
+          </a:fontRef>
+        </p:style>
+      </p:cxnSp>
+      <p:cxnSp>
+        <p:nvCxnSpPr>
+          <p:cNvPr id="23" name="Straight Arrow Connector 22">
+            <a:extLst>
+              <a:ext uri="{FF2B5EF4-FFF2-40B4-BE49-F238E27FC236}">
+                <a16:creationId xmlns:a16="http://schemas.microsoft.com/office/drawing/2014/main" id="{57CA9241-38B4-33EC-64BB-C1C9EE49A22F}"/>
+              </a:ext>
+            </a:extLst>
+          </p:cNvPr>
+          <p:cNvCxnSpPr/>
+          <p:nvPr/>
+        </p:nvCxnSpPr>
+        <p:spPr>
+          <a:xfrm>
+            <a:off x="6319785" y="2435413"/>
+            <a:ext cx="1093225" cy="0"/>
+          </a:xfrm>
+          <a:prstGeom prst="straightConnector1">
+            <a:avLst/>
+          </a:prstGeom>
+          <a:ln>
+            <a:tailEnd type="triangle"/>
+          </a:ln>
+        </p:spPr>
+        <p:style>
+          <a:lnRef idx="1">
+            <a:schemeClr val="dk1"/>
+          </a:lnRef>
+          <a:fillRef idx="0">
+            <a:schemeClr val="dk1"/>
+          </a:fillRef>
+          <a:effectRef idx="0">
+            <a:schemeClr val="dk1"/>
+          </a:effectRef>
+          <a:fontRef idx="minor">
+            <a:schemeClr val="tx1"/>
+          </a:fontRef>
+        </p:style>
+      </p:cxnSp>
+      <p:sp>
+        <p:nvSpPr>
+          <p:cNvPr id="24" name="TextBox 23">
+            <a:extLst>
+              <a:ext uri="{FF2B5EF4-FFF2-40B4-BE49-F238E27FC236}">
+                <a16:creationId xmlns:a16="http://schemas.microsoft.com/office/drawing/2014/main" id="{37F1B980-636B-8C07-CBC3-569FC310C84E}"/>
+              </a:ext>
+            </a:extLst>
+          </p:cNvPr>
+          <p:cNvSpPr txBox="1"/>
+          <p:nvPr/>
+        </p:nvSpPr>
+        <p:spPr>
+          <a:xfrm>
+            <a:off x="6314604" y="2434384"/>
+            <a:ext cx="2097661" cy="553998"/>
+          </a:xfrm>
+          <a:prstGeom prst="rect">
+            <a:avLst/>
+          </a:prstGeom>
+          <a:noFill/>
+        </p:spPr>
+        <p:txBody>
+          <a:bodyPr wrap="square" lIns="91440" tIns="45720" rIns="91440" bIns="45720" anchor="t">
+            <a:spAutoFit/>
+          </a:bodyPr>
+          <a:lstStyle/>
+          <a:p>
+            <a:pPr algn="ctr"/>
+            <a:r>
+              <a:rPr lang="en-US" sz="1000" kern="0">
+                <a:ea typeface="+mn-lt"/>
+                <a:cs typeface="+mn-lt"/>
+              </a:rPr>
+              <a:t>front regen torque</a:t>
+            </a:r>
+            <a:endParaRPr lang="en-US">
+              <a:ea typeface="+mn-lt"/>
+              <a:cs typeface="+mn-lt"/>
+            </a:endParaRPr>
+          </a:p>
+          <a:p>
+            <a:pPr algn="ctr"/>
+            <a:r>
+              <a:rPr lang="en-US" sz="1000" kern="0">
+                <a:ea typeface="+mn-lt"/>
+                <a:cs typeface="+mn-lt"/>
+              </a:rPr>
+              <a:t>rear regen torque</a:t>
+            </a:r>
+            <a:endParaRPr lang="en-US">
+              <a:ea typeface="+mn-lt"/>
+              <a:cs typeface="+mn-lt"/>
+            </a:endParaRPr>
+          </a:p>
+          <a:p>
+            <a:pPr algn="ctr"/>
+            <a:r>
+              <a:rPr lang="en-US" sz="1000" kern="0">
+                <a:latin typeface="Tahoma"/>
+                <a:ea typeface="Tahoma"/>
+                <a:cs typeface="Tahoma"/>
+              </a:rPr>
+              <a:t>Regen torque state(HDC state)</a:t>
+            </a:r>
+            <a:endParaRPr lang="en-US" sz="1000" kern="0">
+              <a:latin typeface="Tahoma"/>
+              <a:ea typeface="Tahoma"/>
+              <a:cs typeface="Tahoma" pitchFamily="34" charset="0"/>
+            </a:endParaRPr>
+          </a:p>
+        </p:txBody>
+      </p:sp>
+      <p:sp>
+        <p:nvSpPr>
+          <p:cNvPr id="26" name="TextBox 25">
+            <a:extLst>
+              <a:ext uri="{FF2B5EF4-FFF2-40B4-BE49-F238E27FC236}">
+                <a16:creationId xmlns:a16="http://schemas.microsoft.com/office/drawing/2014/main" id="{EADCE7BC-9853-38D7-A759-5067B2710DE6}"/>
+              </a:ext>
+            </a:extLst>
+          </p:cNvPr>
+          <p:cNvSpPr txBox="1"/>
+          <p:nvPr/>
+        </p:nvSpPr>
+        <p:spPr>
+          <a:xfrm>
+            <a:off x="179845" y="543381"/>
+            <a:ext cx="1824217" cy="184666"/>
+          </a:xfrm>
+          <a:prstGeom prst="rect">
+            <a:avLst/>
+          </a:prstGeom>
+          <a:noFill/>
+        </p:spPr>
+        <p:txBody>
+          <a:bodyPr wrap="none" lIns="0" tIns="0" rIns="0" bIns="0" rtlCol="0">
+            <a:spAutoFit/>
+          </a:bodyPr>
+          <a:lstStyle/>
+          <a:p>
+            <a:pPr marL="0" marR="0" indent="0" defTabSz="914400" eaLnBrk="1" fontAlgn="base" latinLnBrk="0" hangingPunct="1">
+              <a:lnSpc>
+                <a:spcPct val="100000"/>
+              </a:lnSpc>
+              <a:spcBef>
+                <a:spcPts val="0"/>
+              </a:spcBef>
+              <a:spcAft>
+                <a:spcPct val="0"/>
+              </a:spcAft>
+              <a:buClrTx/>
+              <a:buSzTx/>
+              <a:buFontTx/>
+              <a:buNone/>
+              <a:tabLst/>
+            </a:pPr>
+            <a:r>
+              <a:rPr kumimoji="0" lang="en-US" altLang="zh-CN" sz="1200" b="0" i="0" u="none" strike="noStrike" kern="0" cap="none" spc="0" normalizeH="0" baseline="0" noProof="0">
+                <a:ln>
+                  <a:noFill/>
+                </a:ln>
+                <a:solidFill>
+                  <a:schemeClr val="accent4">
+                    <a:lumMod val="60000"/>
+                    <a:lumOff val="40000"/>
+                  </a:schemeClr>
+                </a:solidFill>
+                <a:effectLst/>
+                <a:uLnTx/>
+                <a:uFillTx/>
+              </a:rPr>
+              <a:t>A proposal of HDC in VMC:</a:t>
+            </a:r>
+            <a:endParaRPr kumimoji="0" lang="zh-CN" altLang="en-US" sz="1200" b="0" i="0" u="none" strike="noStrike" kern="0" cap="none" spc="0" normalizeH="0" baseline="0" noProof="0">
+              <a:ln>
+                <a:noFill/>
+              </a:ln>
+              <a:solidFill>
+                <a:schemeClr val="accent4">
+                  <a:lumMod val="60000"/>
+                  <a:lumOff val="40000"/>
+                </a:schemeClr>
+              </a:solidFill>
+              <a:effectLst/>
+              <a:uLnTx/>
+              <a:uFillTx/>
+            </a:endParaRPr>
+          </a:p>
+        </p:txBody>
+      </p:sp>
+      <p:sp>
+        <p:nvSpPr>
+          <p:cNvPr id="11" name="Rectangle 10">
+            <a:extLst>
+              <a:ext uri="{FF2B5EF4-FFF2-40B4-BE49-F238E27FC236}">
+                <a16:creationId xmlns:a16="http://schemas.microsoft.com/office/drawing/2014/main" id="{EAC94B11-536E-98B9-1A6E-47A021A635C3}"/>
+              </a:ext>
+            </a:extLst>
+          </p:cNvPr>
+          <p:cNvSpPr/>
+          <p:nvPr/>
+        </p:nvSpPr>
+        <p:spPr>
+          <a:xfrm>
+            <a:off x="555354" y="1031084"/>
+            <a:ext cx="1073200" cy="582967"/>
+          </a:xfrm>
+          <a:prstGeom prst="rect">
+            <a:avLst/>
+          </a:prstGeom>
+          <a:noFill/>
+          <a:ln w="12700" cap="flat" cmpd="sng" algn="ctr">
+            <a:solidFill>
+              <a:srgbClr val="7F7F7F"/>
+            </a:solidFill>
+            <a:prstDash val="dash"/>
+          </a:ln>
+          <a:effectLst/>
+        </p:spPr>
+        <p:txBody>
+          <a:bodyPr rot="0" spcFirstLastPara="0" vertOverflow="overflow" horzOverflow="overflow" vert="horz" wrap="square" lIns="90000" tIns="90000" rIns="90000" bIns="90000" numCol="1" spcCol="0" rtlCol="0" fromWordArt="0" anchor="ctr" anchorCtr="0" forceAA="0" compatLnSpc="1">
+            <a:prstTxWarp prst="textNoShape">
+              <a:avLst/>
+            </a:prstTxWarp>
+            <a:noAutofit/>
+          </a:bodyPr>
+          <a:lstStyle/>
+          <a:p>
+            <a:pPr algn="ctr" fontAlgn="base">
+              <a:spcAft>
+                <a:spcPct val="0"/>
+              </a:spcAft>
+            </a:pPr>
+            <a:r>
+              <a:rPr lang="en-US" altLang="zh-CN" sz="800" kern="0">
+                <a:latin typeface="Tahoma"/>
+                <a:cs typeface="Tahoma" pitchFamily="34" charset="0"/>
+              </a:rPr>
+              <a:t>Infobase potential calculation longitudinal</a:t>
+            </a:r>
+            <a:endParaRPr lang="zh-CN" altLang="en-US" sz="800" kern="0" err="1">
+              <a:latin typeface="Tahoma"/>
+              <a:cs typeface="Tahoma" pitchFamily="34" charset="0"/>
+            </a:endParaRPr>
+          </a:p>
+        </p:txBody>
+      </p:sp>
+      <p:sp>
+        <p:nvSpPr>
+          <p:cNvPr id="14" name="TextBox 13">
+            <a:extLst>
+              <a:ext uri="{FF2B5EF4-FFF2-40B4-BE49-F238E27FC236}">
+                <a16:creationId xmlns:a16="http://schemas.microsoft.com/office/drawing/2014/main" id="{03835ECA-0D3E-079F-FFF8-AD57FEA290D8}"/>
+              </a:ext>
+            </a:extLst>
+          </p:cNvPr>
+          <p:cNvSpPr txBox="1"/>
+          <p:nvPr/>
+        </p:nvSpPr>
+        <p:spPr>
+          <a:xfrm>
+            <a:off x="1630847" y="1117949"/>
+            <a:ext cx="298754" cy="246221"/>
+          </a:xfrm>
+          <a:prstGeom prst="rect">
+            <a:avLst/>
+          </a:prstGeom>
+          <a:noFill/>
+        </p:spPr>
+        <p:txBody>
+          <a:bodyPr wrap="square">
+            <a:spAutoFit/>
+          </a:bodyPr>
+          <a:lstStyle/>
+          <a:p>
+            <a:pPr algn="ctr" fontAlgn="base">
+              <a:spcAft>
+                <a:spcPct val="0"/>
+              </a:spcAft>
+            </a:pPr>
+            <a:r>
+              <a:rPr lang="en-US" altLang="zh-CN" sz="1000" kern="0">
+                <a:latin typeface="Tahoma"/>
+                <a:cs typeface="Tahoma" pitchFamily="34" charset="0"/>
+              </a:rPr>
+              <a:t>?</a:t>
+            </a:r>
+            <a:endParaRPr lang="zh-CN" altLang="en-US" sz="1000" kern="0" err="1">
+              <a:latin typeface="Tahoma"/>
+              <a:cs typeface="Tahoma" pitchFamily="34" charset="0"/>
+            </a:endParaRPr>
+          </a:p>
+        </p:txBody>
+      </p:sp>
+      <p:cxnSp>
+        <p:nvCxnSpPr>
+          <p:cNvPr id="28" name="Straight Arrow Connector 27">
+            <a:extLst>
+              <a:ext uri="{FF2B5EF4-FFF2-40B4-BE49-F238E27FC236}">
+                <a16:creationId xmlns:a16="http://schemas.microsoft.com/office/drawing/2014/main" id="{F04C1994-47BF-59AE-D012-C8A9CEC1981F}"/>
+              </a:ext>
+            </a:extLst>
+          </p:cNvPr>
+          <p:cNvCxnSpPr>
+            <a:stCxn id="11" idx="2"/>
+            <a:endCxn id="7" idx="0"/>
+          </p:cNvCxnSpPr>
+          <p:nvPr/>
+        </p:nvCxnSpPr>
+        <p:spPr>
+          <a:xfrm>
+            <a:off x="1091954" y="1614051"/>
+            <a:ext cx="0" cy="283345"/>
+          </a:xfrm>
+          <a:prstGeom prst="straightConnector1">
+            <a:avLst/>
+          </a:prstGeom>
+          <a:noFill/>
+          <a:ln w="28575" cap="rnd" cmpd="sng" algn="ctr">
+            <a:solidFill>
+              <a:srgbClr val="7F7F7F"/>
+            </a:solidFill>
+            <a:prstDash val="sysDot"/>
+            <a:round/>
+            <a:tailEnd type="triangle"/>
+          </a:ln>
+          <a:effectLst/>
+        </p:spPr>
+      </p:cxnSp>
+      <p:sp>
+        <p:nvSpPr>
+          <p:cNvPr id="30" name="Rectangle 29">
+            <a:extLst>
+              <a:ext uri="{FF2B5EF4-FFF2-40B4-BE49-F238E27FC236}">
+                <a16:creationId xmlns:a16="http://schemas.microsoft.com/office/drawing/2014/main" id="{6909DE9B-0EEF-F7C4-EAF0-98BE1224A804}"/>
+              </a:ext>
+            </a:extLst>
+          </p:cNvPr>
+          <p:cNvSpPr/>
+          <p:nvPr/>
+        </p:nvSpPr>
+        <p:spPr>
+          <a:xfrm>
+            <a:off x="5225483" y="905659"/>
+            <a:ext cx="1073200" cy="582967"/>
+          </a:xfrm>
+          <a:prstGeom prst="rect">
+            <a:avLst/>
+          </a:prstGeom>
+          <a:noFill/>
+          <a:ln w="12700" cap="flat" cmpd="sng" algn="ctr">
+            <a:solidFill>
+              <a:srgbClr val="7F7F7F"/>
+            </a:solidFill>
+            <a:prstDash val="dash"/>
+          </a:ln>
+          <a:effectLst/>
+        </p:spPr>
+        <p:txBody>
+          <a:bodyPr rot="0" spcFirstLastPara="0" vertOverflow="overflow" horzOverflow="overflow" vert="horz" wrap="square" lIns="90000" tIns="90000" rIns="90000" bIns="90000" numCol="1" spcCol="0" rtlCol="0" fromWordArt="0" anchor="ctr" anchorCtr="0" forceAA="0" compatLnSpc="1">
+            <a:prstTxWarp prst="textNoShape">
+              <a:avLst/>
+            </a:prstTxWarp>
+            <a:noAutofit/>
+          </a:bodyPr>
+          <a:lstStyle/>
+          <a:p>
+            <a:pPr algn="ctr" fontAlgn="base">
+              <a:spcAft>
+                <a:spcPct val="0"/>
+              </a:spcAft>
+            </a:pPr>
+            <a:r>
+              <a:rPr lang="en-US" altLang="zh-CN" sz="800" kern="0">
+                <a:latin typeface="Tahoma"/>
+                <a:cs typeface="Tahoma" pitchFamily="34" charset="0"/>
+              </a:rPr>
+              <a:t>AWDBD in negative area torque</a:t>
+            </a:r>
+            <a:endParaRPr lang="zh-CN" altLang="en-US" sz="800" kern="0" err="1">
+              <a:latin typeface="Tahoma"/>
+              <a:cs typeface="Tahoma" pitchFamily="34" charset="0"/>
+            </a:endParaRPr>
+          </a:p>
+        </p:txBody>
+      </p:sp>
+      <p:cxnSp>
+        <p:nvCxnSpPr>
+          <p:cNvPr id="31" name="Straight Arrow Connector 30">
+            <a:extLst>
+              <a:ext uri="{FF2B5EF4-FFF2-40B4-BE49-F238E27FC236}">
+                <a16:creationId xmlns:a16="http://schemas.microsoft.com/office/drawing/2014/main" id="{6F49EC83-881F-0301-5AAA-99AEDE128376}"/>
+              </a:ext>
+            </a:extLst>
+          </p:cNvPr>
+          <p:cNvCxnSpPr/>
+          <p:nvPr/>
+        </p:nvCxnSpPr>
+        <p:spPr>
+          <a:xfrm>
+            <a:off x="5762083" y="1511844"/>
+            <a:ext cx="0" cy="283345"/>
+          </a:xfrm>
+          <a:prstGeom prst="straightConnector1">
+            <a:avLst/>
+          </a:prstGeom>
+          <a:noFill/>
+          <a:ln w="28575" cap="rnd" cmpd="sng" algn="ctr">
+            <a:solidFill>
+              <a:srgbClr val="7F7F7F"/>
+            </a:solidFill>
+            <a:prstDash val="sysDot"/>
+            <a:round/>
+            <a:tailEnd type="triangle"/>
+          </a:ln>
+          <a:effectLst/>
+        </p:spPr>
+      </p:cxnSp>
+      <p:sp>
+        <p:nvSpPr>
+          <p:cNvPr id="32" name="TextBox 31">
+            <a:extLst>
+              <a:ext uri="{FF2B5EF4-FFF2-40B4-BE49-F238E27FC236}">
+                <a16:creationId xmlns:a16="http://schemas.microsoft.com/office/drawing/2014/main" id="{797E60F3-F839-05A0-C765-4E142EDF89C7}"/>
+              </a:ext>
+            </a:extLst>
+          </p:cNvPr>
+          <p:cNvSpPr txBox="1"/>
+          <p:nvPr/>
+        </p:nvSpPr>
+        <p:spPr>
+          <a:xfrm>
+            <a:off x="1627084" y="2143617"/>
+            <a:ext cx="1444517" cy="553998"/>
+          </a:xfrm>
+          <a:prstGeom prst="rect">
+            <a:avLst/>
+          </a:prstGeom>
+          <a:noFill/>
+        </p:spPr>
+        <p:txBody>
+          <a:bodyPr wrap="square">
+            <a:spAutoFit/>
+          </a:bodyPr>
+          <a:lstStyle/>
+          <a:p>
+            <a:pPr algn="ctr" fontAlgn="base">
+              <a:spcAft>
+                <a:spcPct val="0"/>
+              </a:spcAft>
+            </a:pPr>
+            <a:r>
+              <a:rPr lang="en-US" altLang="zh-CN" sz="1000" kern="0">
+                <a:solidFill>
+                  <a:schemeClr val="accent2"/>
+                </a:solidFill>
+                <a:latin typeface="Tahoma"/>
+                <a:cs typeface="Tahoma" pitchFamily="34" charset="0"/>
+              </a:rPr>
+              <a:t>or</a:t>
+            </a:r>
+          </a:p>
+          <a:p>
+            <a:pPr algn="ctr" fontAlgn="base">
+              <a:spcAft>
+                <a:spcPct val="0"/>
+              </a:spcAft>
+            </a:pPr>
+            <a:r>
+              <a:rPr lang="en-US" altLang="zh-CN" sz="1000" kern="0">
+                <a:solidFill>
+                  <a:schemeClr val="accent2"/>
+                </a:solidFill>
+                <a:latin typeface="Tahoma"/>
+                <a:cs typeface="Tahoma" pitchFamily="34" charset="0"/>
+              </a:rPr>
+              <a:t>1× brake torque</a:t>
+            </a:r>
+          </a:p>
+          <a:p>
+            <a:pPr algn="ctr" fontAlgn="base">
+              <a:spcAft>
+                <a:spcPct val="0"/>
+              </a:spcAft>
+            </a:pPr>
+            <a:r>
+              <a:rPr lang="en-US" altLang="zh-CN" sz="1000" kern="0">
+                <a:solidFill>
+                  <a:schemeClr val="accent2"/>
+                </a:solidFill>
+                <a:cs typeface="Tahoma" pitchFamily="34" charset="0"/>
+              </a:rPr>
+              <a:t>1× regen torque</a:t>
+            </a:r>
+            <a:endParaRPr lang="zh-CN" altLang="en-US" sz="1000" kern="0">
+              <a:solidFill>
+                <a:schemeClr val="accent2"/>
+              </a:solidFill>
+              <a:cs typeface="Tahoma" pitchFamily="34" charset="0"/>
+            </a:endParaRPr>
+          </a:p>
+        </p:txBody>
+      </p:sp>
+      <p:sp>
+        <p:nvSpPr>
+          <p:cNvPr id="3" name="TextBox 2">
+            <a:extLst>
+              <a:ext uri="{FF2B5EF4-FFF2-40B4-BE49-F238E27FC236}">
+                <a16:creationId xmlns:a16="http://schemas.microsoft.com/office/drawing/2014/main" id="{5B545839-4A33-A09A-8661-4561AECEF3A6}"/>
+              </a:ext>
+            </a:extLst>
+          </p:cNvPr>
+          <p:cNvSpPr txBox="1"/>
+          <p:nvPr/>
+        </p:nvSpPr>
+        <p:spPr>
+          <a:xfrm>
+            <a:off x="6434942" y="1866654"/>
+            <a:ext cx="2449285" cy="161583"/>
+          </a:xfrm>
+          <a:prstGeom prst="rect">
+            <a:avLst/>
+          </a:prstGeom>
+          <a:noFill/>
+        </p:spPr>
+        <p:txBody>
+          <a:bodyPr rot="0" spcFirstLastPara="0" vertOverflow="overflow" horzOverflow="overflow" vert="horz" wrap="square" lIns="0" tIns="0" rIns="0" bIns="0" numCol="1" spcCol="0" rtlCol="0" fromWordArt="0" anchor="t" anchorCtr="0" forceAA="0" compatLnSpc="1">
+            <a:prstTxWarp prst="textNoShape">
+              <a:avLst/>
+            </a:prstTxWarp>
+            <a:spAutoFit/>
+          </a:bodyPr>
+          <a:lstStyle/>
+          <a:p>
+            <a:r>
+              <a:rPr lang="en-US" sz="1050"/>
+              <a:t>4×wheel brake </a:t>
+            </a:r>
+            <a:r>
+              <a:rPr lang="en-US" sz="1050" err="1"/>
+              <a:t>torque+sliplimit</a:t>
+            </a:r>
+            <a:endParaRPr lang="en-US" sz="1050" err="1">
+              <a:ea typeface="Tahoma"/>
+              <a:cs typeface="Tahoma"/>
+            </a:endParaRPr>
+          </a:p>
+        </p:txBody>
+      </p:sp>
+      <p:sp>
+        <p:nvSpPr>
+          <p:cNvPr id="6" name="TextBox 5">
+            <a:extLst>
+              <a:ext uri="{FF2B5EF4-FFF2-40B4-BE49-F238E27FC236}">
+                <a16:creationId xmlns:a16="http://schemas.microsoft.com/office/drawing/2014/main" id="{5CDE5CF9-A263-9C28-E44D-F4EE37069770}"/>
+              </a:ext>
+            </a:extLst>
+          </p:cNvPr>
+          <p:cNvSpPr txBox="1"/>
+          <p:nvPr/>
+        </p:nvSpPr>
+        <p:spPr>
+          <a:xfrm>
+            <a:off x="6507152" y="1073416"/>
+            <a:ext cx="298754" cy="246221"/>
+          </a:xfrm>
+          <a:prstGeom prst="rect">
+            <a:avLst/>
+          </a:prstGeom>
+          <a:noFill/>
+        </p:spPr>
+        <p:txBody>
+          <a:bodyPr wrap="square">
+            <a:spAutoFit/>
+          </a:bodyPr>
+          <a:lstStyle/>
+          <a:p>
+            <a:pPr algn="ctr" fontAlgn="base">
+              <a:spcAft>
+                <a:spcPct val="0"/>
+              </a:spcAft>
+            </a:pPr>
+            <a:r>
+              <a:rPr lang="en-US" altLang="zh-CN" sz="1000" kern="0">
+                <a:latin typeface="Tahoma"/>
+                <a:cs typeface="Tahoma" pitchFamily="34" charset="0"/>
+              </a:rPr>
+              <a:t>?</a:t>
+            </a:r>
+            <a:endParaRPr lang="zh-CN" altLang="en-US" sz="1000" kern="0" err="1">
+              <a:latin typeface="Tahoma"/>
+              <a:cs typeface="Tahoma" pitchFamily="34" charset="0"/>
+            </a:endParaRPr>
+          </a:p>
+        </p:txBody>
+      </p:sp>
+    </p:spTree>
+    <p:extLst>
+      <p:ext uri="{BB962C8B-B14F-4D97-AF65-F5344CB8AC3E}">
+        <p14:creationId xmlns:p14="http://schemas.microsoft.com/office/powerpoint/2010/main" val="315028215"/>
+      </p:ext>
+    </p:extLst>
+  </p:cSld>
+  <p:clrMapOvr>
+    <a:masterClrMapping/>
+  </p:clrMapOvr>
+</p:sld>
+</file>
+
+<file path=ppt/slides/slide11.xml><?xml version="1.0" encoding="utf-8"?>
+<p:sld xmlns:a="http://schemas.openxmlformats.org/drawingml/2006/main" xmlns:r="http://schemas.openxmlformats.org/officeDocument/2006/relationships" xmlns:p="http://schemas.openxmlformats.org/presentationml/2006/main">
+  <p:cSld>
+    <p:spTree>
+      <p:nvGrpSpPr>
+        <p:cNvPr id="1" name="">
+          <a:extLst>
+            <a:ext uri="{FF2B5EF4-FFF2-40B4-BE49-F238E27FC236}">
               <a16:creationId xmlns:a16="http://schemas.microsoft.com/office/drawing/2014/main" id="{BADE3A3C-244E-4429-FC28-3C904EC2C816}"/>
             </a:ext>
           </a:extLst>
@@ -17050,7 +18510,7 @@
           <a:p>
             <a:fld id="{AE839375-43AA-4A5D-B991-4343C4570BCB}" type="slidenum">
               <a:rPr lang="de-DE" smtClean="0"/>
-              <a:t>10</a:t>
+              <a:t>11</a:t>
             </a:fld>
             <a:endParaRPr lang="de-DE"/>
           </a:p>
@@ -17667,7 +19127,7 @@
 </p:sld>
 </file>
 
-<file path=ppt/slides/slide11.xml><?xml version="1.0" encoding="utf-8"?>
+<file path=ppt/slides/slide12.xml><?xml version="1.0" encoding="utf-8"?>
 <p:sld xmlns:a="http://schemas.openxmlformats.org/drawingml/2006/main" xmlns:r="http://schemas.openxmlformats.org/officeDocument/2006/relationships" xmlns:p="http://schemas.openxmlformats.org/presentationml/2006/main">
   <p:cSld>
     <p:spTree>
@@ -17779,7 +19239,7 @@
           <a:p>
             <a:fld id="{AE839375-43AA-4A5D-B991-4343C4570BCB}" type="slidenum">
               <a:rPr lang="de-DE" smtClean="0"/>
-              <a:t>11</a:t>
+              <a:t>12</a:t>
             </a:fld>
             <a:endParaRPr lang="de-DE"/>
           </a:p>
@@ -18819,7 +20279,7 @@
 </p:sld>
 </file>
 
-<file path=ppt/slides/slide12.xml><?xml version="1.0" encoding="utf-8"?>
+<file path=ppt/slides/slide13.xml><?xml version="1.0" encoding="utf-8"?>
 <p:sld xmlns:a="http://schemas.openxmlformats.org/drawingml/2006/main" xmlns:r="http://schemas.openxmlformats.org/officeDocument/2006/relationships" xmlns:p="http://schemas.openxmlformats.org/presentationml/2006/main">
   <p:cSld>
     <p:spTree>
@@ -18924,7 +20384,7 @@
           <a:p>
             <a:fld id="{AE839375-43AA-4A5D-B991-4343C4570BCB}" type="slidenum">
               <a:rPr lang="de-DE" smtClean="0"/>
-              <a:t>12</a:t>
+              <a:t>13</a:t>
             </a:fld>
             <a:endParaRPr lang="de-DE"/>
           </a:p>
@@ -31971,6 +33431,1468 @@
       </p:grpSpPr>
       <p:sp>
         <p:nvSpPr>
+          <p:cNvPr id="4" name="页脚占位符 3">
+            <a:extLst>
+              <a:ext uri="{FF2B5EF4-FFF2-40B4-BE49-F238E27FC236}">
+                <a16:creationId xmlns:a16="http://schemas.microsoft.com/office/drawing/2014/main" id="{A8589D61-ACA3-550E-EF67-5B7C8563FB9D}"/>
+              </a:ext>
+            </a:extLst>
+          </p:cNvPr>
+          <p:cNvSpPr>
+            <a:spLocks noGrp="1"/>
+          </p:cNvSpPr>
+          <p:nvPr>
+            <p:ph type="ftr" sz="quarter" idx="11"/>
+          </p:nvPr>
+        </p:nvSpPr>
+        <p:spPr/>
+        <p:txBody>
+          <a:bodyPr/>
+          <a:lstStyle/>
+          <a:p>
+            <a:endParaRPr lang="de-DE"/>
+          </a:p>
+        </p:txBody>
+      </p:sp>
+      <p:sp>
+        <p:nvSpPr>
+          <p:cNvPr id="5" name="灯片编号占位符 4">
+            <a:extLst>
+              <a:ext uri="{FF2B5EF4-FFF2-40B4-BE49-F238E27FC236}">
+                <a16:creationId xmlns:a16="http://schemas.microsoft.com/office/drawing/2014/main" id="{21002386-A3FA-6A46-CB5B-88A07287EC29}"/>
+              </a:ext>
+            </a:extLst>
+          </p:cNvPr>
+          <p:cNvSpPr>
+            <a:spLocks noGrp="1"/>
+          </p:cNvSpPr>
+          <p:nvPr>
+            <p:ph type="sldNum" sz="quarter" idx="12"/>
+          </p:nvPr>
+        </p:nvSpPr>
+        <p:spPr/>
+        <p:txBody>
+          <a:bodyPr/>
+          <a:lstStyle/>
+          <a:p>
+            <a:fld id="{AE839375-43AA-4A5D-B991-4343C4570BCB}" type="slidenum">
+              <a:rPr lang="de-DE" smtClean="0"/>
+              <a:t>7</a:t>
+            </a:fld>
+            <a:endParaRPr lang="de-DE"/>
+          </a:p>
+        </p:txBody>
+      </p:sp>
+      <p:graphicFrame>
+        <p:nvGraphicFramePr>
+          <p:cNvPr id="6" name="表格 5">
+            <a:extLst>
+              <a:ext uri="{FF2B5EF4-FFF2-40B4-BE49-F238E27FC236}">
+                <a16:creationId xmlns:a16="http://schemas.microsoft.com/office/drawing/2014/main" id="{347EDB2B-9F47-0A04-991E-12A2648E53AC}"/>
+              </a:ext>
+            </a:extLst>
+          </p:cNvPr>
+          <p:cNvGraphicFramePr>
+            <a:graphicFrameLocks noGrp="1"/>
+          </p:cNvGraphicFramePr>
+          <p:nvPr>
+            <p:extLst>
+              <p:ext uri="{D42A27DB-BD31-4B8C-83A1-F6EECF244321}">
+                <p14:modId xmlns:p14="http://schemas.microsoft.com/office/powerpoint/2010/main" val="1490299910"/>
+              </p:ext>
+            </p:extLst>
+          </p:nvPr>
+        </p:nvGraphicFramePr>
+        <p:xfrm>
+          <a:off x="270726" y="359994"/>
+          <a:ext cx="8423275" cy="596094"/>
+        </p:xfrm>
+        <a:graphic>
+          <a:graphicData uri="http://schemas.openxmlformats.org/drawingml/2006/table">
+            <a:tbl>
+              <a:tblPr>
+                <a:tableStyleId>{5C22544A-7EE6-4342-B048-85BDC9FD1C3A}</a:tableStyleId>
+              </a:tblPr>
+              <a:tblGrid>
+                <a:gridCol w="3346493">
+                  <a:extLst>
+                    <a:ext uri="{9D8B030D-6E8A-4147-A177-3AD203B41FA5}">
+                      <a16:colId xmlns:a16="http://schemas.microsoft.com/office/drawing/2014/main" val="1070298058"/>
+                    </a:ext>
+                  </a:extLst>
+                </a:gridCol>
+                <a:gridCol w="2890153">
+                  <a:extLst>
+                    <a:ext uri="{9D8B030D-6E8A-4147-A177-3AD203B41FA5}">
+                      <a16:colId xmlns:a16="http://schemas.microsoft.com/office/drawing/2014/main" val="4222700373"/>
+                    </a:ext>
+                  </a:extLst>
+                </a:gridCol>
+                <a:gridCol w="2186629">
+                  <a:extLst>
+                    <a:ext uri="{9D8B030D-6E8A-4147-A177-3AD203B41FA5}">
+                      <a16:colId xmlns:a16="http://schemas.microsoft.com/office/drawing/2014/main" val="4079676812"/>
+                    </a:ext>
+                  </a:extLst>
+                </a:gridCol>
+              </a:tblGrid>
+              <a:tr h="298047">
+                <a:tc>
+                  <a:txBody>
+                    <a:bodyPr/>
+                    <a:lstStyle/>
+                    <a:p>
+                      <a:pPr algn="ctr" fontAlgn="ctr">
+                        <a:buNone/>
+                      </a:pPr>
+                      <a:r>
+                        <a:rPr lang="zh-CN" sz="800" u="none" strike="noStrike">
+                          <a:effectLst/>
+                        </a:rPr>
+                        <a:t>PrDrvShftIncTorqRqst_FD</a:t>
+                      </a:r>
+                      <a:endParaRPr lang="zh-CN" sz="800" b="0" i="0" u="none" strike="noStrike">
+                        <a:solidFill>
+                          <a:srgbClr val="000000"/>
+                        </a:solidFill>
+                        <a:effectLst/>
+                        <a:latin typeface="微软雅黑" panose="020B0503020204020204" pitchFamily="34" charset="-122"/>
+                        <a:ea typeface="微软雅黑" panose="020B0503020204020204" pitchFamily="34" charset="-122"/>
+                      </a:endParaRPr>
+                    </a:p>
+                  </a:txBody>
+                  <a:tcPr marL="0" marR="0" marT="0" marB="0" anchor="ctr"/>
+                </a:tc>
+                <a:tc>
+                  <a:txBody>
+                    <a:bodyPr/>
+                    <a:lstStyle/>
+                    <a:p>
+                      <a:pPr algn="ctr" fontAlgn="ctr">
+                        <a:buNone/>
+                      </a:pPr>
+                      <a:r>
+                        <a:rPr lang="zh-CN" sz="800" u="none" strike="noStrike">
+                          <a:effectLst/>
+                        </a:rPr>
+                        <a:t>Primary Drive Shaft Increase Torque Request</a:t>
+                      </a:r>
+                      <a:endParaRPr lang="zh-CN" sz="800" b="0" i="0" u="none" strike="noStrike">
+                        <a:solidFill>
+                          <a:srgbClr val="000000"/>
+                        </a:solidFill>
+                        <a:effectLst/>
+                        <a:latin typeface="微软雅黑" panose="020B0503020204020204" pitchFamily="34" charset="-122"/>
+                        <a:ea typeface="微软雅黑" panose="020B0503020204020204" pitchFamily="34" charset="-122"/>
+                      </a:endParaRPr>
+                    </a:p>
+                  </a:txBody>
+                  <a:tcPr marL="0" marR="0" marT="0" marB="0" anchor="ctr"/>
+                </a:tc>
+                <a:tc>
+                  <a:txBody>
+                    <a:bodyPr/>
+                    <a:lstStyle/>
+                    <a:p>
+                      <a:pPr algn="l" fontAlgn="ctr">
+                        <a:buNone/>
+                      </a:pPr>
+                      <a:r>
+                        <a:rPr lang="en-US" altLang="zh-CN" sz="800" u="none" strike="noStrike" err="1">
+                          <a:effectLst/>
+                        </a:rPr>
+                        <a:t>BrkDriveControl.IncreaseTqRqstFrontAxle</a:t>
+                      </a:r>
+                      <a:endParaRPr lang="en-US" altLang="zh-CN" sz="800" u="none" strike="noStrike">
+                        <a:effectLst/>
+                      </a:endParaRPr>
+                    </a:p>
+                  </a:txBody>
+                  <a:tcPr marL="0" marR="0" marT="0" marB="0" anchor="ctr"/>
+                </a:tc>
+                <a:extLst>
+                  <a:ext uri="{0D108BD9-81ED-4DB2-BD59-A6C34878D82A}">
+                    <a16:rowId xmlns:a16="http://schemas.microsoft.com/office/drawing/2014/main" val="892934857"/>
+                  </a:ext>
+                </a:extLst>
+              </a:tr>
+              <a:tr h="298047">
+                <a:tc>
+                  <a:txBody>
+                    <a:bodyPr/>
+                    <a:lstStyle/>
+                    <a:p>
+                      <a:pPr algn="ctr" fontAlgn="ctr">
+                        <a:buNone/>
+                      </a:pPr>
+                      <a:r>
+                        <a:rPr lang="zh-CN" sz="800" u="none" strike="noStrike">
+                          <a:effectLst/>
+                        </a:rPr>
+                        <a:t>PrDrvShftIncTorqRqstVal_FD</a:t>
+                      </a:r>
+                      <a:endParaRPr lang="zh-CN" sz="800" b="0" i="0" u="none" strike="noStrike">
+                        <a:solidFill>
+                          <a:srgbClr val="000000"/>
+                        </a:solidFill>
+                        <a:effectLst/>
+                        <a:latin typeface="微软雅黑" panose="020B0503020204020204" pitchFamily="34" charset="-122"/>
+                        <a:ea typeface="微软雅黑" panose="020B0503020204020204" pitchFamily="34" charset="-122"/>
+                      </a:endParaRPr>
+                    </a:p>
+                  </a:txBody>
+                  <a:tcPr marL="0" marR="0" marT="0" marB="0" anchor="ctr"/>
+                </a:tc>
+                <a:tc>
+                  <a:txBody>
+                    <a:bodyPr/>
+                    <a:lstStyle/>
+                    <a:p>
+                      <a:pPr algn="ctr" fontAlgn="ctr">
+                        <a:buNone/>
+                      </a:pPr>
+                      <a:r>
+                        <a:rPr lang="zh-CN" sz="800" u="none" strike="noStrike">
+                          <a:effectLst/>
+                        </a:rPr>
+                        <a:t>Primary Drive Shaft  Increase Torque Request Value</a:t>
+                      </a:r>
+                      <a:endParaRPr lang="zh-CN" sz="800" b="0" i="0" u="none" strike="noStrike">
+                        <a:solidFill>
+                          <a:srgbClr val="000000"/>
+                        </a:solidFill>
+                        <a:effectLst/>
+                        <a:latin typeface="微软雅黑" panose="020B0503020204020204" pitchFamily="34" charset="-122"/>
+                        <a:ea typeface="微软雅黑" panose="020B0503020204020204" pitchFamily="34" charset="-122"/>
+                      </a:endParaRPr>
+                    </a:p>
+                  </a:txBody>
+                  <a:tcPr marL="0" marR="0" marT="0" marB="0" anchor="ctr"/>
+                </a:tc>
+                <a:tc>
+                  <a:txBody>
+                    <a:bodyPr/>
+                    <a:lstStyle/>
+                    <a:p>
+                      <a:pPr algn="l" fontAlgn="ctr">
+                        <a:buNone/>
+                      </a:pPr>
+                      <a:r>
+                        <a:rPr lang="en-US" altLang="zh-CN" sz="800" u="none" strike="noStrike" err="1">
+                          <a:effectLst/>
+                        </a:rPr>
+                        <a:t>BrkDriveControl.IncreaseTqRqstValFrontAxle</a:t>
+                      </a:r>
+                      <a:endParaRPr lang="en-US" altLang="zh-CN" sz="800" u="none" strike="noStrike">
+                        <a:effectLst/>
+                      </a:endParaRPr>
+                    </a:p>
+                  </a:txBody>
+                  <a:tcPr marL="0" marR="0" marT="0" marB="0" anchor="ctr"/>
+                </a:tc>
+                <a:extLst>
+                  <a:ext uri="{0D108BD9-81ED-4DB2-BD59-A6C34878D82A}">
+                    <a16:rowId xmlns:a16="http://schemas.microsoft.com/office/drawing/2014/main" val="1961954098"/>
+                  </a:ext>
+                </a:extLst>
+              </a:tr>
+            </a:tbl>
+          </a:graphicData>
+        </a:graphic>
+      </p:graphicFrame>
+      <p:graphicFrame>
+        <p:nvGraphicFramePr>
+          <p:cNvPr id="7" name="表格 6">
+            <a:extLst>
+              <a:ext uri="{FF2B5EF4-FFF2-40B4-BE49-F238E27FC236}">
+                <a16:creationId xmlns:a16="http://schemas.microsoft.com/office/drawing/2014/main" id="{4A6B301A-F7B4-5AC6-8145-1D047576D413}"/>
+              </a:ext>
+            </a:extLst>
+          </p:cNvPr>
+          <p:cNvGraphicFramePr>
+            <a:graphicFrameLocks noGrp="1"/>
+          </p:cNvGraphicFramePr>
+          <p:nvPr>
+            <p:extLst>
+              <p:ext uri="{D42A27DB-BD31-4B8C-83A1-F6EECF244321}">
+                <p14:modId xmlns:p14="http://schemas.microsoft.com/office/powerpoint/2010/main" val="269580966"/>
+              </p:ext>
+            </p:extLst>
+          </p:nvPr>
+        </p:nvGraphicFramePr>
+        <p:xfrm>
+          <a:off x="270725" y="1044806"/>
+          <a:ext cx="8423275" cy="596094"/>
+        </p:xfrm>
+        <a:graphic>
+          <a:graphicData uri="http://schemas.openxmlformats.org/drawingml/2006/table">
+            <a:tbl>
+              <a:tblPr>
+                <a:tableStyleId>{5C22544A-7EE6-4342-B048-85BDC9FD1C3A}</a:tableStyleId>
+              </a:tblPr>
+              <a:tblGrid>
+                <a:gridCol w="3346493">
+                  <a:extLst>
+                    <a:ext uri="{9D8B030D-6E8A-4147-A177-3AD203B41FA5}">
+                      <a16:colId xmlns:a16="http://schemas.microsoft.com/office/drawing/2014/main" val="3062961229"/>
+                    </a:ext>
+                  </a:extLst>
+                </a:gridCol>
+                <a:gridCol w="2890153">
+                  <a:extLst>
+                    <a:ext uri="{9D8B030D-6E8A-4147-A177-3AD203B41FA5}">
+                      <a16:colId xmlns:a16="http://schemas.microsoft.com/office/drawing/2014/main" val="2793258461"/>
+                    </a:ext>
+                  </a:extLst>
+                </a:gridCol>
+                <a:gridCol w="2186629">
+                  <a:extLst>
+                    <a:ext uri="{9D8B030D-6E8A-4147-A177-3AD203B41FA5}">
+                      <a16:colId xmlns:a16="http://schemas.microsoft.com/office/drawing/2014/main" val="1438468993"/>
+                    </a:ext>
+                  </a:extLst>
+                </a:gridCol>
+              </a:tblGrid>
+              <a:tr h="298047">
+                <a:tc>
+                  <a:txBody>
+                    <a:bodyPr/>
+                    <a:lstStyle/>
+                    <a:p>
+                      <a:pPr algn="ctr" fontAlgn="ctr">
+                        <a:buNone/>
+                      </a:pPr>
+                      <a:r>
+                        <a:rPr lang="zh-CN" sz="800" u="none" strike="noStrike">
+                          <a:effectLst/>
+                        </a:rPr>
+                        <a:t>ThScdDrvShftIncTorqRqst_FD</a:t>
+                      </a:r>
+                      <a:endParaRPr lang="zh-CN" sz="800" b="0" i="0" u="none" strike="noStrike">
+                        <a:solidFill>
+                          <a:srgbClr val="000000"/>
+                        </a:solidFill>
+                        <a:effectLst/>
+                        <a:latin typeface="微软雅黑" panose="020B0503020204020204" pitchFamily="34" charset="-122"/>
+                        <a:ea typeface="微软雅黑" panose="020B0503020204020204" pitchFamily="34" charset="-122"/>
+                      </a:endParaRPr>
+                    </a:p>
+                  </a:txBody>
+                  <a:tcPr marL="0" marR="0" marT="0" marB="0" anchor="ctr"/>
+                </a:tc>
+                <a:tc>
+                  <a:txBody>
+                    <a:bodyPr/>
+                    <a:lstStyle/>
+                    <a:p>
+                      <a:pPr algn="ctr" fontAlgn="ctr">
+                        <a:buNone/>
+                      </a:pPr>
+                      <a:r>
+                        <a:rPr lang="zh-CN" sz="800" u="none" strike="noStrike">
+                          <a:effectLst/>
+                        </a:rPr>
+                        <a:t>The Second Drive Shaft Increase Torque Request</a:t>
+                      </a:r>
+                      <a:endParaRPr lang="zh-CN" sz="800" b="0" i="0" u="none" strike="noStrike">
+                        <a:solidFill>
+                          <a:srgbClr val="000000"/>
+                        </a:solidFill>
+                        <a:effectLst/>
+                        <a:latin typeface="微软雅黑" panose="020B0503020204020204" pitchFamily="34" charset="-122"/>
+                        <a:ea typeface="微软雅黑" panose="020B0503020204020204" pitchFamily="34" charset="-122"/>
+                      </a:endParaRPr>
+                    </a:p>
+                  </a:txBody>
+                  <a:tcPr marL="0" marR="0" marT="0" marB="0" anchor="ctr"/>
+                </a:tc>
+                <a:tc>
+                  <a:txBody>
+                    <a:bodyPr/>
+                    <a:lstStyle/>
+                    <a:p>
+                      <a:pPr algn="l" fontAlgn="ctr">
+                        <a:buNone/>
+                      </a:pPr>
+                      <a:r>
+                        <a:rPr lang="en-US" altLang="zh-CN" sz="800" u="none" strike="noStrike" err="1">
+                          <a:effectLst/>
+                        </a:rPr>
+                        <a:t>BrkDriveControl.IncreaseTqRqstRearAxle</a:t>
+                      </a:r>
+                      <a:endParaRPr lang="en-US" altLang="zh-CN" sz="800" u="none" strike="noStrike">
+                        <a:effectLst/>
+                      </a:endParaRPr>
+                    </a:p>
+                  </a:txBody>
+                  <a:tcPr marL="0" marR="0" marT="0" marB="0" anchor="ctr"/>
+                </a:tc>
+                <a:extLst>
+                  <a:ext uri="{0D108BD9-81ED-4DB2-BD59-A6C34878D82A}">
+                    <a16:rowId xmlns:a16="http://schemas.microsoft.com/office/drawing/2014/main" val="3090875692"/>
+                  </a:ext>
+                </a:extLst>
+              </a:tr>
+              <a:tr h="298047">
+                <a:tc>
+                  <a:txBody>
+                    <a:bodyPr/>
+                    <a:lstStyle/>
+                    <a:p>
+                      <a:pPr algn="ctr" fontAlgn="ctr">
+                        <a:buNone/>
+                      </a:pPr>
+                      <a:r>
+                        <a:rPr lang="zh-CN" sz="800" u="none" strike="noStrike">
+                          <a:effectLst/>
+                        </a:rPr>
+                        <a:t>ThScdDrvShftIncTorqRqstVal_FD</a:t>
+                      </a:r>
+                      <a:endParaRPr lang="zh-CN" sz="800" b="0" i="0" u="none" strike="noStrike">
+                        <a:solidFill>
+                          <a:srgbClr val="000000"/>
+                        </a:solidFill>
+                        <a:effectLst/>
+                        <a:latin typeface="微软雅黑" panose="020B0503020204020204" pitchFamily="34" charset="-122"/>
+                        <a:ea typeface="微软雅黑" panose="020B0503020204020204" pitchFamily="34" charset="-122"/>
+                      </a:endParaRPr>
+                    </a:p>
+                  </a:txBody>
+                  <a:tcPr marL="0" marR="0" marT="0" marB="0" anchor="ctr"/>
+                </a:tc>
+                <a:tc>
+                  <a:txBody>
+                    <a:bodyPr/>
+                    <a:lstStyle/>
+                    <a:p>
+                      <a:pPr algn="ctr" fontAlgn="ctr">
+                        <a:buNone/>
+                      </a:pPr>
+                      <a:r>
+                        <a:rPr lang="zh-CN" sz="800" u="none" strike="noStrike">
+                          <a:effectLst/>
+                        </a:rPr>
+                        <a:t>The Second Drive Shaft  Increase Torque Request Value</a:t>
+                      </a:r>
+                      <a:endParaRPr lang="zh-CN" sz="800" b="0" i="0" u="none" strike="noStrike">
+                        <a:solidFill>
+                          <a:srgbClr val="000000"/>
+                        </a:solidFill>
+                        <a:effectLst/>
+                        <a:latin typeface="微软雅黑" panose="020B0503020204020204" pitchFamily="34" charset="-122"/>
+                        <a:ea typeface="微软雅黑" panose="020B0503020204020204" pitchFamily="34" charset="-122"/>
+                      </a:endParaRPr>
+                    </a:p>
+                  </a:txBody>
+                  <a:tcPr marL="0" marR="0" marT="0" marB="0" anchor="ctr"/>
+                </a:tc>
+                <a:tc>
+                  <a:txBody>
+                    <a:bodyPr/>
+                    <a:lstStyle/>
+                    <a:p>
+                      <a:pPr algn="l" fontAlgn="ctr">
+                        <a:buNone/>
+                      </a:pPr>
+                      <a:r>
+                        <a:rPr lang="en-US" altLang="zh-CN" sz="800" u="none" strike="noStrike" err="1">
+                          <a:effectLst/>
+                        </a:rPr>
+                        <a:t>BrkDriveControl.IncreaseTqRqstValRearAxle</a:t>
+                      </a:r>
+                      <a:endParaRPr lang="en-US" altLang="zh-CN" sz="800" u="none" strike="noStrike">
+                        <a:effectLst/>
+                      </a:endParaRPr>
+                    </a:p>
+                  </a:txBody>
+                  <a:tcPr marL="0" marR="0" marT="0" marB="0" anchor="ctr"/>
+                </a:tc>
+                <a:extLst>
+                  <a:ext uri="{0D108BD9-81ED-4DB2-BD59-A6C34878D82A}">
+                    <a16:rowId xmlns:a16="http://schemas.microsoft.com/office/drawing/2014/main" val="1033007466"/>
+                  </a:ext>
+                </a:extLst>
+              </a:tr>
+            </a:tbl>
+          </a:graphicData>
+        </a:graphic>
+      </p:graphicFrame>
+      <p:sp>
+        <p:nvSpPr>
+          <p:cNvPr id="8" name="文本框 7">
+            <a:extLst>
+              <a:ext uri="{FF2B5EF4-FFF2-40B4-BE49-F238E27FC236}">
+                <a16:creationId xmlns:a16="http://schemas.microsoft.com/office/drawing/2014/main" id="{187699B7-1D90-4F1A-FFD6-998076C474B1}"/>
+              </a:ext>
+            </a:extLst>
+          </p:cNvPr>
+          <p:cNvSpPr txBox="1"/>
+          <p:nvPr/>
+        </p:nvSpPr>
+        <p:spPr>
+          <a:xfrm>
+            <a:off x="270725" y="175328"/>
+            <a:ext cx="2191657" cy="184666"/>
+          </a:xfrm>
+          <a:prstGeom prst="rect">
+            <a:avLst/>
+          </a:prstGeom>
+          <a:noFill/>
+        </p:spPr>
+        <p:txBody>
+          <a:bodyPr wrap="square" lIns="0" tIns="0" rIns="0" bIns="0" rtlCol="0">
+            <a:spAutoFit/>
+          </a:bodyPr>
+          <a:lstStyle/>
+          <a:p>
+            <a:pPr marL="0" marR="0" indent="0" defTabSz="914400" eaLnBrk="1" fontAlgn="base" latinLnBrk="0" hangingPunct="1">
+              <a:lnSpc>
+                <a:spcPct val="100000"/>
+              </a:lnSpc>
+              <a:spcBef>
+                <a:spcPts val="0"/>
+              </a:spcBef>
+              <a:spcAft>
+                <a:spcPct val="0"/>
+              </a:spcAft>
+              <a:buClrTx/>
+              <a:buSzTx/>
+              <a:buFontTx/>
+              <a:buNone/>
+              <a:tabLst/>
+            </a:pPr>
+            <a:r>
+              <a:rPr kumimoji="0" lang="en-US" altLang="zh-CN" sz="1200" b="0" i="0" u="none" strike="noStrike" kern="0" cap="none" spc="0" normalizeH="0" baseline="0" noProof="0" err="1">
+                <a:ln>
+                  <a:noFill/>
+                </a:ln>
+                <a:solidFill>
+                  <a:srgbClr val="000000"/>
+                </a:solidFill>
+                <a:effectLst/>
+                <a:uLnTx/>
+                <a:uFillTx/>
+              </a:rPr>
+              <a:t>EHBi</a:t>
+            </a:r>
+            <a:r>
+              <a:rPr kumimoji="0" lang="en-US" altLang="zh-CN" sz="1200" b="0" i="0" u="none" strike="noStrike" kern="0" cap="none" spc="0" normalizeH="0" baseline="0" noProof="0">
+                <a:ln>
+                  <a:noFill/>
+                </a:ln>
+                <a:solidFill>
+                  <a:srgbClr val="000000"/>
+                </a:solidFill>
+                <a:effectLst/>
+                <a:uLnTx/>
+                <a:uFillTx/>
+              </a:rPr>
+              <a:t> </a:t>
+            </a:r>
+            <a:r>
+              <a:rPr lang="zh-CN" altLang="en-US" sz="1200" kern="0">
+                <a:solidFill>
+                  <a:srgbClr val="000000"/>
+                </a:solidFill>
+              </a:rPr>
+              <a:t>只对应双电机车型：</a:t>
+            </a:r>
+            <a:endParaRPr kumimoji="0" lang="zh-CN" altLang="en-US" sz="1200" b="0" i="0" u="none" strike="noStrike" kern="0" cap="none" spc="0" normalizeH="0" baseline="0" noProof="0">
+              <a:ln>
+                <a:noFill/>
+              </a:ln>
+              <a:solidFill>
+                <a:srgbClr val="000000"/>
+              </a:solidFill>
+              <a:effectLst/>
+              <a:uLnTx/>
+              <a:uFillTx/>
+            </a:endParaRPr>
+          </a:p>
+        </p:txBody>
+      </p:sp>
+      <p:sp>
+        <p:nvSpPr>
+          <p:cNvPr id="10" name="文本框 9">
+            <a:extLst>
+              <a:ext uri="{FF2B5EF4-FFF2-40B4-BE49-F238E27FC236}">
+                <a16:creationId xmlns:a16="http://schemas.microsoft.com/office/drawing/2014/main" id="{DCEDEB52-AA73-F68E-3559-3CB564F2EC10}"/>
+              </a:ext>
+            </a:extLst>
+          </p:cNvPr>
+          <p:cNvSpPr txBox="1"/>
+          <p:nvPr/>
+        </p:nvSpPr>
+        <p:spPr>
+          <a:xfrm>
+            <a:off x="270725" y="1855933"/>
+            <a:ext cx="2191657" cy="184666"/>
+          </a:xfrm>
+          <a:prstGeom prst="rect">
+            <a:avLst/>
+          </a:prstGeom>
+          <a:noFill/>
+        </p:spPr>
+        <p:txBody>
+          <a:bodyPr wrap="square" lIns="0" tIns="0" rIns="0" bIns="0" rtlCol="0">
+            <a:spAutoFit/>
+          </a:bodyPr>
+          <a:lstStyle/>
+          <a:p>
+            <a:pPr marL="0" marR="0" indent="0" defTabSz="914400" eaLnBrk="1" fontAlgn="base" latinLnBrk="0" hangingPunct="1">
+              <a:lnSpc>
+                <a:spcPct val="100000"/>
+              </a:lnSpc>
+              <a:spcBef>
+                <a:spcPts val="0"/>
+              </a:spcBef>
+              <a:spcAft>
+                <a:spcPct val="0"/>
+              </a:spcAft>
+              <a:buClrTx/>
+              <a:buSzTx/>
+              <a:buFontTx/>
+              <a:buNone/>
+              <a:tabLst/>
+            </a:pPr>
+            <a:r>
+              <a:rPr kumimoji="0" lang="en-US" altLang="zh-CN" sz="1200" b="0" i="0" u="none" strike="noStrike" kern="0" cap="none" spc="0" normalizeH="0" baseline="0" noProof="0">
+                <a:ln>
+                  <a:noFill/>
+                </a:ln>
+                <a:solidFill>
+                  <a:srgbClr val="000000"/>
+                </a:solidFill>
+                <a:effectLst/>
+                <a:uLnTx/>
+                <a:uFillTx/>
+              </a:rPr>
+              <a:t>EMB </a:t>
+            </a:r>
+            <a:r>
+              <a:rPr lang="zh-CN" altLang="en-US" sz="1200" kern="0">
+                <a:solidFill>
+                  <a:srgbClr val="000000"/>
+                </a:solidFill>
+              </a:rPr>
+              <a:t>只对应</a:t>
+            </a:r>
+            <a:r>
+              <a:rPr lang="en-US" altLang="zh-CN" sz="1200" kern="0">
+                <a:solidFill>
+                  <a:srgbClr val="000000"/>
+                </a:solidFill>
+              </a:rPr>
+              <a:t>4</a:t>
+            </a:r>
+            <a:r>
+              <a:rPr lang="zh-CN" altLang="en-US" sz="1200" kern="0">
+                <a:solidFill>
+                  <a:srgbClr val="000000"/>
+                </a:solidFill>
+              </a:rPr>
+              <a:t>电机车型：</a:t>
+            </a:r>
+            <a:endParaRPr kumimoji="0" lang="zh-CN" altLang="en-US" sz="1200" b="0" i="0" u="none" strike="noStrike" kern="0" cap="none" spc="0" normalizeH="0" baseline="0" noProof="0">
+              <a:ln>
+                <a:noFill/>
+              </a:ln>
+              <a:solidFill>
+                <a:srgbClr val="000000"/>
+              </a:solidFill>
+              <a:effectLst/>
+              <a:uLnTx/>
+              <a:uFillTx/>
+            </a:endParaRPr>
+          </a:p>
+        </p:txBody>
+      </p:sp>
+      <p:graphicFrame>
+        <p:nvGraphicFramePr>
+          <p:cNvPr id="11" name="表格 10">
+            <a:extLst>
+              <a:ext uri="{FF2B5EF4-FFF2-40B4-BE49-F238E27FC236}">
+                <a16:creationId xmlns:a16="http://schemas.microsoft.com/office/drawing/2014/main" id="{B66C5573-F4DC-5228-3C78-CDB648F20CF4}"/>
+              </a:ext>
+            </a:extLst>
+          </p:cNvPr>
+          <p:cNvGraphicFramePr>
+            <a:graphicFrameLocks noGrp="1"/>
+          </p:cNvGraphicFramePr>
+          <p:nvPr>
+            <p:extLst>
+              <p:ext uri="{D42A27DB-BD31-4B8C-83A1-F6EECF244321}">
+                <p14:modId xmlns:p14="http://schemas.microsoft.com/office/powerpoint/2010/main" val="667579526"/>
+              </p:ext>
+            </p:extLst>
+          </p:nvPr>
+        </p:nvGraphicFramePr>
+        <p:xfrm>
+          <a:off x="270724" y="2084589"/>
+          <a:ext cx="8423275" cy="1220710"/>
+        </p:xfrm>
+        <a:graphic>
+          <a:graphicData uri="http://schemas.openxmlformats.org/drawingml/2006/table">
+            <a:tbl>
+              <a:tblPr>
+                <a:tableStyleId>{5C22544A-7EE6-4342-B048-85BDC9FD1C3A}</a:tableStyleId>
+              </a:tblPr>
+              <a:tblGrid>
+                <a:gridCol w="3346493">
+                  <a:extLst>
+                    <a:ext uri="{9D8B030D-6E8A-4147-A177-3AD203B41FA5}">
+                      <a16:colId xmlns:a16="http://schemas.microsoft.com/office/drawing/2014/main" val="775806113"/>
+                    </a:ext>
+                  </a:extLst>
+                </a:gridCol>
+                <a:gridCol w="2890153">
+                  <a:extLst>
+                    <a:ext uri="{9D8B030D-6E8A-4147-A177-3AD203B41FA5}">
+                      <a16:colId xmlns:a16="http://schemas.microsoft.com/office/drawing/2014/main" val="3809160155"/>
+                    </a:ext>
+                  </a:extLst>
+                </a:gridCol>
+                <a:gridCol w="2186629">
+                  <a:extLst>
+                    <a:ext uri="{9D8B030D-6E8A-4147-A177-3AD203B41FA5}">
+                      <a16:colId xmlns:a16="http://schemas.microsoft.com/office/drawing/2014/main" val="508609174"/>
+                    </a:ext>
+                  </a:extLst>
+                </a:gridCol>
+              </a:tblGrid>
+              <a:tr h="298047">
+                <a:tc>
+                  <a:txBody>
+                    <a:bodyPr/>
+                    <a:lstStyle/>
+                    <a:p>
+                      <a:pPr algn="ctr" fontAlgn="ctr">
+                        <a:buNone/>
+                      </a:pPr>
+                      <a:r>
+                        <a:rPr lang="zh-CN" sz="800" u="none" strike="noStrike">
+                          <a:effectLst/>
+                        </a:rPr>
+                        <a:t>FrntLeDrvMotorIncTorqRqst</a:t>
+                      </a:r>
+                      <a:endParaRPr lang="zh-CN" sz="800" b="0" i="0" u="none" strike="noStrike">
+                        <a:solidFill>
+                          <a:srgbClr val="000000"/>
+                        </a:solidFill>
+                        <a:effectLst/>
+                        <a:latin typeface="微软雅黑" panose="020B0503020204020204" pitchFamily="34" charset="-122"/>
+                        <a:ea typeface="微软雅黑" panose="020B0503020204020204" pitchFamily="34" charset="-122"/>
+                      </a:endParaRPr>
+                    </a:p>
+                  </a:txBody>
+                  <a:tcPr marL="0" marR="0" marT="0" marB="0" anchor="ctr"/>
+                </a:tc>
+                <a:tc>
+                  <a:txBody>
+                    <a:bodyPr/>
+                    <a:lstStyle/>
+                    <a:p>
+                      <a:pPr algn="ctr" fontAlgn="ctr">
+                        <a:buNone/>
+                      </a:pPr>
+                      <a:r>
+                        <a:rPr lang="zh-CN" sz="800" u="none" strike="noStrike">
+                          <a:effectLst/>
+                        </a:rPr>
+                        <a:t>Front left motor Increase Torque  Request</a:t>
+                      </a:r>
+                      <a:endParaRPr lang="zh-CN" sz="800" b="0" i="0" u="none" strike="noStrike">
+                        <a:solidFill>
+                          <a:srgbClr val="000000"/>
+                        </a:solidFill>
+                        <a:effectLst/>
+                        <a:latin typeface="微软雅黑" panose="020B0503020204020204" pitchFamily="34" charset="-122"/>
+                        <a:ea typeface="微软雅黑" panose="020B0503020204020204" pitchFamily="34" charset="-122"/>
+                      </a:endParaRPr>
+                    </a:p>
+                  </a:txBody>
+                  <a:tcPr marL="0" marR="0" marT="0" marB="0" anchor="ctr"/>
+                </a:tc>
+                <a:tc>
+                  <a:txBody>
+                    <a:bodyPr/>
+                    <a:lstStyle/>
+                    <a:p>
+                      <a:pPr algn="l" fontAlgn="ctr">
+                        <a:buNone/>
+                      </a:pPr>
+                      <a:r>
+                        <a:rPr lang="en-US" altLang="zh-CN" sz="800" u="none" strike="noStrike" err="1">
+                          <a:effectLst/>
+                        </a:rPr>
+                        <a:t>BrkDriveControl.IncreaseTqRqstFrontLeft</a:t>
+                      </a:r>
+                      <a:endParaRPr lang="en-US" altLang="zh-CN" sz="800" u="none" strike="noStrike">
+                        <a:effectLst/>
+                      </a:endParaRPr>
+                    </a:p>
+                  </a:txBody>
+                  <a:tcPr marL="0" marR="0" marT="0" marB="0" anchor="ctr"/>
+                </a:tc>
+                <a:extLst>
+                  <a:ext uri="{0D108BD9-81ED-4DB2-BD59-A6C34878D82A}">
+                    <a16:rowId xmlns:a16="http://schemas.microsoft.com/office/drawing/2014/main" val="2025562226"/>
+                  </a:ext>
+                </a:extLst>
+              </a:tr>
+              <a:tr h="298047">
+                <a:tc>
+                  <a:txBody>
+                    <a:bodyPr/>
+                    <a:lstStyle/>
+                    <a:p>
+                      <a:pPr algn="ctr" fontAlgn="ctr">
+                        <a:buNone/>
+                      </a:pPr>
+                      <a:r>
+                        <a:rPr lang="zh-CN" sz="800" u="none" strike="noStrike">
+                          <a:effectLst/>
+                        </a:rPr>
+                        <a:t>FrntRiDrvMotorncTorqRqst</a:t>
+                      </a:r>
+                      <a:endParaRPr lang="zh-CN" sz="800" b="0" i="0" u="none" strike="noStrike">
+                        <a:solidFill>
+                          <a:srgbClr val="000000"/>
+                        </a:solidFill>
+                        <a:effectLst/>
+                        <a:latin typeface="微软雅黑" panose="020B0503020204020204" pitchFamily="34" charset="-122"/>
+                        <a:ea typeface="微软雅黑" panose="020B0503020204020204" pitchFamily="34" charset="-122"/>
+                      </a:endParaRPr>
+                    </a:p>
+                  </a:txBody>
+                  <a:tcPr marL="0" marR="0" marT="0" marB="0" anchor="ctr"/>
+                </a:tc>
+                <a:tc>
+                  <a:txBody>
+                    <a:bodyPr/>
+                    <a:lstStyle/>
+                    <a:p>
+                      <a:pPr algn="ctr" fontAlgn="ctr">
+                        <a:buNone/>
+                      </a:pPr>
+                      <a:r>
+                        <a:rPr lang="zh-CN" sz="800" u="none" strike="noStrike">
+                          <a:effectLst/>
+                        </a:rPr>
+                        <a:t>Front Right motor Increase Torque  Request</a:t>
+                      </a:r>
+                      <a:endParaRPr lang="zh-CN" sz="800" b="0" i="0" u="none" strike="noStrike">
+                        <a:solidFill>
+                          <a:srgbClr val="000000"/>
+                        </a:solidFill>
+                        <a:effectLst/>
+                        <a:latin typeface="微软雅黑" panose="020B0503020204020204" pitchFamily="34" charset="-122"/>
+                        <a:ea typeface="微软雅黑" panose="020B0503020204020204" pitchFamily="34" charset="-122"/>
+                      </a:endParaRPr>
+                    </a:p>
+                  </a:txBody>
+                  <a:tcPr marL="0" marR="0" marT="0" marB="0" anchor="ctr"/>
+                </a:tc>
+                <a:tc>
+                  <a:txBody>
+                    <a:bodyPr/>
+                    <a:lstStyle/>
+                    <a:p>
+                      <a:pPr algn="l" fontAlgn="ctr">
+                        <a:buNone/>
+                      </a:pPr>
+                      <a:r>
+                        <a:rPr lang="en-US" altLang="zh-CN" sz="800" u="none" strike="noStrike" err="1">
+                          <a:effectLst/>
+                        </a:rPr>
+                        <a:t>BrkDriveControl.IncreaseTqRqstFrontRight</a:t>
+                      </a:r>
+                      <a:endParaRPr lang="en-US" altLang="zh-CN" sz="800" u="none" strike="noStrike">
+                        <a:effectLst/>
+                      </a:endParaRPr>
+                    </a:p>
+                  </a:txBody>
+                  <a:tcPr marL="0" marR="0" marT="0" marB="0" anchor="ctr"/>
+                </a:tc>
+                <a:extLst>
+                  <a:ext uri="{0D108BD9-81ED-4DB2-BD59-A6C34878D82A}">
+                    <a16:rowId xmlns:a16="http://schemas.microsoft.com/office/drawing/2014/main" val="2921895018"/>
+                  </a:ext>
+                </a:extLst>
+              </a:tr>
+              <a:tr h="312308">
+                <a:tc>
+                  <a:txBody>
+                    <a:bodyPr/>
+                    <a:lstStyle/>
+                    <a:p>
+                      <a:pPr algn="ctr" fontAlgn="ctr">
+                        <a:buNone/>
+                      </a:pPr>
+                      <a:r>
+                        <a:rPr lang="zh-CN" sz="800" u="none" strike="noStrike">
+                          <a:effectLst/>
+                        </a:rPr>
+                        <a:t>ReLeDrMotorIncTorqRqst</a:t>
+                      </a:r>
+                      <a:endParaRPr lang="zh-CN" sz="800" b="0" i="0" u="none" strike="noStrike">
+                        <a:solidFill>
+                          <a:srgbClr val="000000"/>
+                        </a:solidFill>
+                        <a:effectLst/>
+                        <a:latin typeface="微软雅黑" panose="020B0503020204020204" pitchFamily="34" charset="-122"/>
+                        <a:ea typeface="微软雅黑" panose="020B0503020204020204" pitchFamily="34" charset="-122"/>
+                      </a:endParaRPr>
+                    </a:p>
+                  </a:txBody>
+                  <a:tcPr marL="0" marR="0" marT="0" marB="0" anchor="ctr"/>
+                </a:tc>
+                <a:tc>
+                  <a:txBody>
+                    <a:bodyPr/>
+                    <a:lstStyle/>
+                    <a:p>
+                      <a:pPr algn="ctr" fontAlgn="ctr">
+                        <a:buNone/>
+                      </a:pPr>
+                      <a:r>
+                        <a:rPr lang="zh-CN" sz="800" u="none" strike="noStrike">
+                          <a:effectLst/>
+                        </a:rPr>
+                        <a:t>Rear left motor Increase Torque  Request</a:t>
+                      </a:r>
+                      <a:endParaRPr lang="zh-CN" sz="800" b="0" i="0" u="none" strike="noStrike">
+                        <a:solidFill>
+                          <a:srgbClr val="000000"/>
+                        </a:solidFill>
+                        <a:effectLst/>
+                        <a:latin typeface="微软雅黑" panose="020B0503020204020204" pitchFamily="34" charset="-122"/>
+                        <a:ea typeface="微软雅黑" panose="020B0503020204020204" pitchFamily="34" charset="-122"/>
+                      </a:endParaRPr>
+                    </a:p>
+                  </a:txBody>
+                  <a:tcPr marL="0" marR="0" marT="0" marB="0" anchor="ctr"/>
+                </a:tc>
+                <a:tc>
+                  <a:txBody>
+                    <a:bodyPr/>
+                    <a:lstStyle/>
+                    <a:p>
+                      <a:pPr algn="l" fontAlgn="ctr">
+                        <a:buNone/>
+                      </a:pPr>
+                      <a:r>
+                        <a:rPr lang="en-US" altLang="zh-CN" sz="800" u="none" strike="noStrike" err="1">
+                          <a:effectLst/>
+                        </a:rPr>
+                        <a:t>BrkDriveControl.IncreaseTqRqstRearLeft</a:t>
+                      </a:r>
+                      <a:endParaRPr lang="en-US" altLang="zh-CN" sz="800" u="none" strike="noStrike">
+                        <a:effectLst/>
+                      </a:endParaRPr>
+                    </a:p>
+                  </a:txBody>
+                  <a:tcPr marL="0" marR="0" marT="0" marB="0" anchor="ctr"/>
+                </a:tc>
+                <a:extLst>
+                  <a:ext uri="{0D108BD9-81ED-4DB2-BD59-A6C34878D82A}">
+                    <a16:rowId xmlns:a16="http://schemas.microsoft.com/office/drawing/2014/main" val="384109632"/>
+                  </a:ext>
+                </a:extLst>
+              </a:tr>
+              <a:tr h="312308">
+                <a:tc>
+                  <a:txBody>
+                    <a:bodyPr/>
+                    <a:lstStyle/>
+                    <a:p>
+                      <a:pPr algn="ctr" fontAlgn="ctr">
+                        <a:buNone/>
+                      </a:pPr>
+                      <a:r>
+                        <a:rPr lang="zh-CN" sz="800" u="none" strike="noStrike">
+                          <a:effectLst/>
+                        </a:rPr>
+                        <a:t>ReRiDrvMotorIncTorqRqst</a:t>
+                      </a:r>
+                      <a:endParaRPr lang="zh-CN" sz="800" b="0" i="0" u="none" strike="noStrike">
+                        <a:solidFill>
+                          <a:srgbClr val="000000"/>
+                        </a:solidFill>
+                        <a:effectLst/>
+                        <a:latin typeface="微软雅黑" panose="020B0503020204020204" pitchFamily="34" charset="-122"/>
+                        <a:ea typeface="微软雅黑" panose="020B0503020204020204" pitchFamily="34" charset="-122"/>
+                      </a:endParaRPr>
+                    </a:p>
+                  </a:txBody>
+                  <a:tcPr marL="0" marR="0" marT="0" marB="0" anchor="ctr"/>
+                </a:tc>
+                <a:tc>
+                  <a:txBody>
+                    <a:bodyPr/>
+                    <a:lstStyle/>
+                    <a:p>
+                      <a:pPr algn="ctr" fontAlgn="ctr">
+                        <a:buNone/>
+                      </a:pPr>
+                      <a:r>
+                        <a:rPr lang="zh-CN" sz="800" u="none" strike="noStrike">
+                          <a:effectLst/>
+                        </a:rPr>
+                        <a:t>Rear Right motor Increase Torque  Request</a:t>
+                      </a:r>
+                      <a:endParaRPr lang="zh-CN" sz="800" b="0" i="0" u="none" strike="noStrike">
+                        <a:solidFill>
+                          <a:srgbClr val="000000"/>
+                        </a:solidFill>
+                        <a:effectLst/>
+                        <a:latin typeface="微软雅黑" panose="020B0503020204020204" pitchFamily="34" charset="-122"/>
+                        <a:ea typeface="微软雅黑" panose="020B0503020204020204" pitchFamily="34" charset="-122"/>
+                      </a:endParaRPr>
+                    </a:p>
+                  </a:txBody>
+                  <a:tcPr marL="0" marR="0" marT="0" marB="0" anchor="ctr"/>
+                </a:tc>
+                <a:tc>
+                  <a:txBody>
+                    <a:bodyPr/>
+                    <a:lstStyle/>
+                    <a:p>
+                      <a:pPr algn="l" fontAlgn="ctr">
+                        <a:buNone/>
+                      </a:pPr>
+                      <a:r>
+                        <a:rPr lang="en-US" altLang="zh-CN" sz="800" u="none" strike="noStrike" err="1">
+                          <a:effectLst/>
+                        </a:rPr>
+                        <a:t>BrkDriveControl.IncreaseTqRqstRearRight</a:t>
+                      </a:r>
+                      <a:endParaRPr lang="en-US" altLang="zh-CN" sz="800" u="none" strike="noStrike">
+                        <a:effectLst/>
+                      </a:endParaRPr>
+                    </a:p>
+                  </a:txBody>
+                  <a:tcPr marL="0" marR="0" marT="0" marB="0" anchor="ctr"/>
+                </a:tc>
+                <a:extLst>
+                  <a:ext uri="{0D108BD9-81ED-4DB2-BD59-A6C34878D82A}">
+                    <a16:rowId xmlns:a16="http://schemas.microsoft.com/office/drawing/2014/main" val="2014556269"/>
+                  </a:ext>
+                </a:extLst>
+              </a:tr>
+            </a:tbl>
+          </a:graphicData>
+        </a:graphic>
+      </p:graphicFrame>
+      <p:graphicFrame>
+        <p:nvGraphicFramePr>
+          <p:cNvPr id="12" name="表格 11">
+            <a:extLst>
+              <a:ext uri="{FF2B5EF4-FFF2-40B4-BE49-F238E27FC236}">
+                <a16:creationId xmlns:a16="http://schemas.microsoft.com/office/drawing/2014/main" id="{8A2D3F4D-0283-EA60-7B64-F8F59D06910E}"/>
+              </a:ext>
+            </a:extLst>
+          </p:cNvPr>
+          <p:cNvGraphicFramePr>
+            <a:graphicFrameLocks noGrp="1"/>
+          </p:cNvGraphicFramePr>
+          <p:nvPr>
+            <p:extLst>
+              <p:ext uri="{D42A27DB-BD31-4B8C-83A1-F6EECF244321}">
+                <p14:modId xmlns:p14="http://schemas.microsoft.com/office/powerpoint/2010/main" val="1965529177"/>
+              </p:ext>
+            </p:extLst>
+          </p:nvPr>
+        </p:nvGraphicFramePr>
+        <p:xfrm>
+          <a:off x="270723" y="3349289"/>
+          <a:ext cx="8423275" cy="1306272"/>
+        </p:xfrm>
+        <a:graphic>
+          <a:graphicData uri="http://schemas.openxmlformats.org/drawingml/2006/table">
+            <a:tbl>
+              <a:tblPr>
+                <a:tableStyleId>{5C22544A-7EE6-4342-B048-85BDC9FD1C3A}</a:tableStyleId>
+              </a:tblPr>
+              <a:tblGrid>
+                <a:gridCol w="3346493">
+                  <a:extLst>
+                    <a:ext uri="{9D8B030D-6E8A-4147-A177-3AD203B41FA5}">
+                      <a16:colId xmlns:a16="http://schemas.microsoft.com/office/drawing/2014/main" val="3700934154"/>
+                    </a:ext>
+                  </a:extLst>
+                </a:gridCol>
+                <a:gridCol w="2890153">
+                  <a:extLst>
+                    <a:ext uri="{9D8B030D-6E8A-4147-A177-3AD203B41FA5}">
+                      <a16:colId xmlns:a16="http://schemas.microsoft.com/office/drawing/2014/main" val="60275604"/>
+                    </a:ext>
+                  </a:extLst>
+                </a:gridCol>
+                <a:gridCol w="2186629">
+                  <a:extLst>
+                    <a:ext uri="{9D8B030D-6E8A-4147-A177-3AD203B41FA5}">
+                      <a16:colId xmlns:a16="http://schemas.microsoft.com/office/drawing/2014/main" val="2075583034"/>
+                    </a:ext>
+                  </a:extLst>
+                </a:gridCol>
+              </a:tblGrid>
+              <a:tr h="326568">
+                <a:tc>
+                  <a:txBody>
+                    <a:bodyPr/>
+                    <a:lstStyle/>
+                    <a:p>
+                      <a:pPr algn="ctr" fontAlgn="ctr">
+                        <a:buNone/>
+                      </a:pPr>
+                      <a:r>
+                        <a:rPr lang="zh-CN" sz="800" u="none" strike="noStrike">
+                          <a:effectLst/>
+                        </a:rPr>
+                        <a:t>FrntLeDrvMotorIncTorqRqstVal</a:t>
+                      </a:r>
+                      <a:endParaRPr lang="zh-CN" sz="800" b="0" i="0" u="none" strike="noStrike">
+                        <a:solidFill>
+                          <a:srgbClr val="000000"/>
+                        </a:solidFill>
+                        <a:effectLst/>
+                        <a:latin typeface="微软雅黑" panose="020B0503020204020204" pitchFamily="34" charset="-122"/>
+                        <a:ea typeface="微软雅黑" panose="020B0503020204020204" pitchFamily="34" charset="-122"/>
+                      </a:endParaRPr>
+                    </a:p>
+                  </a:txBody>
+                  <a:tcPr marL="0" marR="0" marT="0" marB="0" anchor="ctr"/>
+                </a:tc>
+                <a:tc>
+                  <a:txBody>
+                    <a:bodyPr/>
+                    <a:lstStyle/>
+                    <a:p>
+                      <a:pPr algn="ctr" fontAlgn="ctr">
+                        <a:buNone/>
+                      </a:pPr>
+                      <a:r>
+                        <a:rPr lang="zh-CN" sz="800" u="none" strike="noStrike">
+                          <a:effectLst/>
+                        </a:rPr>
+                        <a:t>Front left motor Increase Torque  Request Value</a:t>
+                      </a:r>
+                      <a:endParaRPr lang="zh-CN" sz="800" b="0" i="0" u="none" strike="noStrike">
+                        <a:solidFill>
+                          <a:srgbClr val="000000"/>
+                        </a:solidFill>
+                        <a:effectLst/>
+                        <a:latin typeface="微软雅黑" panose="020B0503020204020204" pitchFamily="34" charset="-122"/>
+                        <a:ea typeface="微软雅黑" panose="020B0503020204020204" pitchFamily="34" charset="-122"/>
+                      </a:endParaRPr>
+                    </a:p>
+                  </a:txBody>
+                  <a:tcPr marL="0" marR="0" marT="0" marB="0" anchor="ctr"/>
+                </a:tc>
+                <a:tc>
+                  <a:txBody>
+                    <a:bodyPr/>
+                    <a:lstStyle/>
+                    <a:p>
+                      <a:pPr algn="l" fontAlgn="ctr">
+                        <a:buNone/>
+                      </a:pPr>
+                      <a:r>
+                        <a:rPr lang="en-US" altLang="zh-CN" sz="800" u="none" strike="noStrike" err="1">
+                          <a:effectLst/>
+                        </a:rPr>
+                        <a:t>BrkDriveControl.IncreaseTqRqstValFrontLeft</a:t>
+                      </a:r>
+                      <a:endParaRPr lang="en-US" altLang="zh-CN" sz="800" u="none" strike="noStrike">
+                        <a:effectLst/>
+                      </a:endParaRPr>
+                    </a:p>
+                  </a:txBody>
+                  <a:tcPr marL="0" marR="0" marT="0" marB="0" anchor="ctr"/>
+                </a:tc>
+                <a:extLst>
+                  <a:ext uri="{0D108BD9-81ED-4DB2-BD59-A6C34878D82A}">
+                    <a16:rowId xmlns:a16="http://schemas.microsoft.com/office/drawing/2014/main" val="2513137268"/>
+                  </a:ext>
+                </a:extLst>
+              </a:tr>
+              <a:tr h="326568">
+                <a:tc>
+                  <a:txBody>
+                    <a:bodyPr/>
+                    <a:lstStyle/>
+                    <a:p>
+                      <a:pPr algn="ctr" fontAlgn="ctr">
+                        <a:buNone/>
+                      </a:pPr>
+                      <a:r>
+                        <a:rPr lang="zh-CN" sz="800" u="none" strike="noStrike">
+                          <a:effectLst/>
+                        </a:rPr>
+                        <a:t>FrntRiDrvMotorncTorqRqstVal</a:t>
+                      </a:r>
+                      <a:endParaRPr lang="zh-CN" sz="800" b="0" i="0" u="none" strike="noStrike">
+                        <a:solidFill>
+                          <a:srgbClr val="000000"/>
+                        </a:solidFill>
+                        <a:effectLst/>
+                        <a:latin typeface="微软雅黑" panose="020B0503020204020204" pitchFamily="34" charset="-122"/>
+                        <a:ea typeface="微软雅黑" panose="020B0503020204020204" pitchFamily="34" charset="-122"/>
+                      </a:endParaRPr>
+                    </a:p>
+                  </a:txBody>
+                  <a:tcPr marL="0" marR="0" marT="0" marB="0" anchor="ctr"/>
+                </a:tc>
+                <a:tc>
+                  <a:txBody>
+                    <a:bodyPr/>
+                    <a:lstStyle/>
+                    <a:p>
+                      <a:pPr algn="ctr" fontAlgn="ctr">
+                        <a:buNone/>
+                      </a:pPr>
+                      <a:r>
+                        <a:rPr lang="zh-CN" sz="800" u="none" strike="noStrike">
+                          <a:effectLst/>
+                        </a:rPr>
+                        <a:t>Front Right motor Increase Torque  Request Value</a:t>
+                      </a:r>
+                      <a:endParaRPr lang="zh-CN" sz="800" b="0" i="0" u="none" strike="noStrike">
+                        <a:solidFill>
+                          <a:srgbClr val="000000"/>
+                        </a:solidFill>
+                        <a:effectLst/>
+                        <a:latin typeface="微软雅黑" panose="020B0503020204020204" pitchFamily="34" charset="-122"/>
+                        <a:ea typeface="微软雅黑" panose="020B0503020204020204" pitchFamily="34" charset="-122"/>
+                      </a:endParaRPr>
+                    </a:p>
+                  </a:txBody>
+                  <a:tcPr marL="0" marR="0" marT="0" marB="0" anchor="ctr"/>
+                </a:tc>
+                <a:tc>
+                  <a:txBody>
+                    <a:bodyPr/>
+                    <a:lstStyle/>
+                    <a:p>
+                      <a:pPr algn="l" fontAlgn="ctr">
+                        <a:buNone/>
+                      </a:pPr>
+                      <a:r>
+                        <a:rPr lang="en-US" altLang="zh-CN" sz="800" u="none" strike="noStrike" err="1">
+                          <a:effectLst/>
+                        </a:rPr>
+                        <a:t>BrkDriveControl.IncreaseTqRqstValFrontRight</a:t>
+                      </a:r>
+                      <a:endParaRPr lang="en-US" altLang="zh-CN" sz="800" u="none" strike="noStrike">
+                        <a:effectLst/>
+                      </a:endParaRPr>
+                    </a:p>
+                  </a:txBody>
+                  <a:tcPr marL="0" marR="0" marT="0" marB="0" anchor="ctr"/>
+                </a:tc>
+                <a:extLst>
+                  <a:ext uri="{0D108BD9-81ED-4DB2-BD59-A6C34878D82A}">
+                    <a16:rowId xmlns:a16="http://schemas.microsoft.com/office/drawing/2014/main" val="2365918721"/>
+                  </a:ext>
+                </a:extLst>
+              </a:tr>
+              <a:tr h="326568">
+                <a:tc>
+                  <a:txBody>
+                    <a:bodyPr/>
+                    <a:lstStyle/>
+                    <a:p>
+                      <a:pPr algn="ctr" fontAlgn="ctr">
+                        <a:buNone/>
+                      </a:pPr>
+                      <a:r>
+                        <a:rPr lang="zh-CN" sz="800" u="none" strike="noStrike">
+                          <a:effectLst/>
+                        </a:rPr>
+                        <a:t>ReLeDrMotorIncTorqRqstVal</a:t>
+                      </a:r>
+                      <a:endParaRPr lang="zh-CN" sz="800" b="0" i="0" u="none" strike="noStrike">
+                        <a:solidFill>
+                          <a:srgbClr val="000000"/>
+                        </a:solidFill>
+                        <a:effectLst/>
+                        <a:latin typeface="微软雅黑" panose="020B0503020204020204" pitchFamily="34" charset="-122"/>
+                        <a:ea typeface="微软雅黑" panose="020B0503020204020204" pitchFamily="34" charset="-122"/>
+                      </a:endParaRPr>
+                    </a:p>
+                  </a:txBody>
+                  <a:tcPr marL="0" marR="0" marT="0" marB="0" anchor="ctr"/>
+                </a:tc>
+                <a:tc>
+                  <a:txBody>
+                    <a:bodyPr/>
+                    <a:lstStyle/>
+                    <a:p>
+                      <a:pPr algn="ctr" fontAlgn="ctr">
+                        <a:buNone/>
+                      </a:pPr>
+                      <a:r>
+                        <a:rPr lang="zh-CN" sz="800" u="none" strike="noStrike">
+                          <a:effectLst/>
+                        </a:rPr>
+                        <a:t>Rear left motor Increase Torque  Request Value</a:t>
+                      </a:r>
+                      <a:endParaRPr lang="zh-CN" sz="800" b="0" i="0" u="none" strike="noStrike">
+                        <a:solidFill>
+                          <a:srgbClr val="000000"/>
+                        </a:solidFill>
+                        <a:effectLst/>
+                        <a:latin typeface="微软雅黑" panose="020B0503020204020204" pitchFamily="34" charset="-122"/>
+                        <a:ea typeface="微软雅黑" panose="020B0503020204020204" pitchFamily="34" charset="-122"/>
+                      </a:endParaRPr>
+                    </a:p>
+                  </a:txBody>
+                  <a:tcPr marL="0" marR="0" marT="0" marB="0" anchor="ctr"/>
+                </a:tc>
+                <a:tc>
+                  <a:txBody>
+                    <a:bodyPr/>
+                    <a:lstStyle/>
+                    <a:p>
+                      <a:pPr algn="l" fontAlgn="ctr">
+                        <a:buNone/>
+                      </a:pPr>
+                      <a:r>
+                        <a:rPr lang="en-US" altLang="zh-CN" sz="800" u="none" strike="noStrike" err="1">
+                          <a:effectLst/>
+                        </a:rPr>
+                        <a:t>BrkDriveControl.IncreaseTqRqstValRearLeft</a:t>
+                      </a:r>
+                      <a:endParaRPr lang="en-US" altLang="zh-CN" sz="800" u="none" strike="noStrike">
+                        <a:effectLst/>
+                      </a:endParaRPr>
+                    </a:p>
+                  </a:txBody>
+                  <a:tcPr marL="0" marR="0" marT="0" marB="0" anchor="ctr"/>
+                </a:tc>
+                <a:extLst>
+                  <a:ext uri="{0D108BD9-81ED-4DB2-BD59-A6C34878D82A}">
+                    <a16:rowId xmlns:a16="http://schemas.microsoft.com/office/drawing/2014/main" val="4102213299"/>
+                  </a:ext>
+                </a:extLst>
+              </a:tr>
+              <a:tr h="326568">
+                <a:tc>
+                  <a:txBody>
+                    <a:bodyPr/>
+                    <a:lstStyle/>
+                    <a:p>
+                      <a:pPr algn="ctr" fontAlgn="ctr">
+                        <a:buNone/>
+                      </a:pPr>
+                      <a:r>
+                        <a:rPr lang="zh-CN" sz="800" u="none" strike="noStrike">
+                          <a:effectLst/>
+                        </a:rPr>
+                        <a:t>ReRiDrvMotorIncTorqRqstVal</a:t>
+                      </a:r>
+                      <a:endParaRPr lang="zh-CN" sz="800" b="0" i="0" u="none" strike="noStrike">
+                        <a:solidFill>
+                          <a:srgbClr val="000000"/>
+                        </a:solidFill>
+                        <a:effectLst/>
+                        <a:latin typeface="微软雅黑" panose="020B0503020204020204" pitchFamily="34" charset="-122"/>
+                        <a:ea typeface="微软雅黑" panose="020B0503020204020204" pitchFamily="34" charset="-122"/>
+                      </a:endParaRPr>
+                    </a:p>
+                  </a:txBody>
+                  <a:tcPr marL="0" marR="0" marT="0" marB="0" anchor="ctr"/>
+                </a:tc>
+                <a:tc>
+                  <a:txBody>
+                    <a:bodyPr/>
+                    <a:lstStyle/>
+                    <a:p>
+                      <a:pPr algn="ctr" fontAlgn="ctr">
+                        <a:buNone/>
+                      </a:pPr>
+                      <a:r>
+                        <a:rPr lang="zh-CN" sz="800" u="none" strike="noStrike">
+                          <a:effectLst/>
+                        </a:rPr>
+                        <a:t>Rear Right motor Increase Torque  Request Value</a:t>
+                      </a:r>
+                      <a:endParaRPr lang="zh-CN" sz="800" b="0" i="0" u="none" strike="noStrike">
+                        <a:solidFill>
+                          <a:srgbClr val="000000"/>
+                        </a:solidFill>
+                        <a:effectLst/>
+                        <a:latin typeface="微软雅黑" panose="020B0503020204020204" pitchFamily="34" charset="-122"/>
+                        <a:ea typeface="微软雅黑" panose="020B0503020204020204" pitchFamily="34" charset="-122"/>
+                      </a:endParaRPr>
+                    </a:p>
+                  </a:txBody>
+                  <a:tcPr marL="0" marR="0" marT="0" marB="0" anchor="ctr"/>
+                </a:tc>
+                <a:tc>
+                  <a:txBody>
+                    <a:bodyPr/>
+                    <a:lstStyle/>
+                    <a:p>
+                      <a:pPr algn="l" fontAlgn="ctr">
+                        <a:buNone/>
+                      </a:pPr>
+                      <a:r>
+                        <a:rPr lang="en-US" altLang="zh-CN" sz="800" u="none" strike="noStrike" err="1">
+                          <a:effectLst/>
+                        </a:rPr>
+                        <a:t>BrkDriveControl.IncreaseTqRqstValRearRight</a:t>
+                      </a:r>
+                      <a:endParaRPr lang="en-US" altLang="zh-CN" sz="800" u="none" strike="noStrike">
+                        <a:effectLst/>
+                      </a:endParaRPr>
+                    </a:p>
+                  </a:txBody>
+                  <a:tcPr marL="0" marR="0" marT="0" marB="0" anchor="ctr"/>
+                </a:tc>
+                <a:extLst>
+                  <a:ext uri="{0D108BD9-81ED-4DB2-BD59-A6C34878D82A}">
+                    <a16:rowId xmlns:a16="http://schemas.microsoft.com/office/drawing/2014/main" val="965212690"/>
+                  </a:ext>
+                </a:extLst>
+              </a:tr>
+            </a:tbl>
+          </a:graphicData>
+        </a:graphic>
+      </p:graphicFrame>
+    </p:spTree>
+    <p:extLst>
+      <p:ext uri="{BB962C8B-B14F-4D97-AF65-F5344CB8AC3E}">
+        <p14:creationId xmlns:p14="http://schemas.microsoft.com/office/powerpoint/2010/main" val="1558857800"/>
+      </p:ext>
+    </p:extLst>
+  </p:cSld>
+  <p:clrMapOvr>
+    <a:masterClrMapping/>
+  </p:clrMapOvr>
+</p:sld>
+</file>
+
+<file path=ppt/slides/slide8.xml><?xml version="1.0" encoding="utf-8"?>
+<p:sld xmlns:a="http://schemas.openxmlformats.org/drawingml/2006/main" xmlns:r="http://schemas.openxmlformats.org/officeDocument/2006/relationships" xmlns:p="http://schemas.openxmlformats.org/presentationml/2006/main">
+  <p:cSld>
+    <p:spTree>
+      <p:nvGrpSpPr>
+        <p:cNvPr id="1" name=""/>
+        <p:cNvGrpSpPr/>
+        <p:nvPr/>
+      </p:nvGrpSpPr>
+      <p:grpSpPr>
+        <a:xfrm>
+          <a:off x="0" y="0"/>
+          <a:ext cx="0" cy="0"/>
+          <a:chOff x="0" y="0"/>
+          <a:chExt cx="0" cy="0"/>
+        </a:xfrm>
+      </p:grpSpPr>
+      <p:sp>
+        <p:nvSpPr>
           <p:cNvPr id="2" name="Title 1">
             <a:extLst>
               <a:ext uri="{FF2B5EF4-FFF2-40B4-BE49-F238E27FC236}">
@@ -32045,7 +34967,7 @@
           <a:p>
             <a:fld id="{AE839375-43AA-4A5D-B991-4343C4570BCB}" type="slidenum">
               <a:rPr lang="de-DE" smtClean="0"/>
-              <a:t>7</a:t>
+              <a:t>8</a:t>
             </a:fld>
             <a:endParaRPr lang="de-DE"/>
           </a:p>
@@ -34600,7 +37522,7 @@
 </p:sld>
 </file>
 
-<file path=ppt/slides/slide8.xml><?xml version="1.0" encoding="utf-8"?>
+<file path=ppt/slides/slide9.xml><?xml version="1.0" encoding="utf-8"?>
 <p:sld xmlns:a="http://schemas.openxmlformats.org/drawingml/2006/main" xmlns:r="http://schemas.openxmlformats.org/officeDocument/2006/relationships" xmlns:p="http://schemas.openxmlformats.org/presentationml/2006/main">
   <p:cSld>
     <p:spTree>
@@ -34699,7 +37621,7 @@
           <a:p>
             <a:fld id="{AE839375-43AA-4A5D-B991-4343C4570BCB}" type="slidenum">
               <a:rPr lang="de-DE" smtClean="0"/>
-              <a:t>8</a:t>
+              <a:t>9</a:t>
             </a:fld>
             <a:endParaRPr lang="de-DE"/>
           </a:p>
@@ -37287,1462 +40209,6 @@
       <p:bldP spid="55" grpId="0"/>
     </p:bldLst>
   </p:timing>
-</p:sld>
-</file>
-
-<file path=ppt/slides/slide9.xml><?xml version="1.0" encoding="utf-8"?>
-<p:sld xmlns:a="http://schemas.openxmlformats.org/drawingml/2006/main" xmlns:r="http://schemas.openxmlformats.org/officeDocument/2006/relationships" xmlns:p="http://schemas.openxmlformats.org/presentationml/2006/main">
-  <p:cSld>
-    <p:spTree>
-      <p:nvGrpSpPr>
-        <p:cNvPr id="1" name="">
-          <a:extLst>
-            <a:ext uri="{FF2B5EF4-FFF2-40B4-BE49-F238E27FC236}">
-              <a16:creationId xmlns:a16="http://schemas.microsoft.com/office/drawing/2014/main" id="{764B31EE-7C82-CF2C-8967-4AC6BA884BF9}"/>
-            </a:ext>
-          </a:extLst>
-        </p:cNvPr>
-        <p:cNvGrpSpPr/>
-        <p:nvPr/>
-      </p:nvGrpSpPr>
-      <p:grpSpPr>
-        <a:xfrm>
-          <a:off x="0" y="0"/>
-          <a:ext cx="0" cy="0"/>
-          <a:chOff x="0" y="0"/>
-          <a:chExt cx="0" cy="0"/>
-        </a:xfrm>
-      </p:grpSpPr>
-      <p:sp>
-        <p:nvSpPr>
-          <p:cNvPr id="2" name="Title 1">
-            <a:extLst>
-              <a:ext uri="{FF2B5EF4-FFF2-40B4-BE49-F238E27FC236}">
-                <a16:creationId xmlns:a16="http://schemas.microsoft.com/office/drawing/2014/main" id="{21767375-9BD3-45AB-E4D2-417905005B92}"/>
-              </a:ext>
-            </a:extLst>
-          </p:cNvPr>
-          <p:cNvSpPr>
-            <a:spLocks noGrp="1"/>
-          </p:cNvSpPr>
-          <p:nvPr>
-            <p:ph type="title"/>
-          </p:nvPr>
-        </p:nvSpPr>
-        <p:spPr>
-          <a:xfrm>
-            <a:off x="58083" y="75943"/>
-            <a:ext cx="8424001" cy="593817"/>
-          </a:xfrm>
-        </p:spPr>
-        <p:txBody>
-          <a:bodyPr/>
-          <a:lstStyle/>
-          <a:p>
-            <a:r>
-              <a:rPr lang="en-US" altLang="zh-CN"/>
-              <a:t>HDC function architecture design</a:t>
-            </a:r>
-            <a:endParaRPr lang="zh-CN" altLang="en-US"/>
-          </a:p>
-        </p:txBody>
-      </p:sp>
-      <p:sp>
-        <p:nvSpPr>
-          <p:cNvPr id="4" name="Footer Placeholder 3">
-            <a:extLst>
-              <a:ext uri="{FF2B5EF4-FFF2-40B4-BE49-F238E27FC236}">
-                <a16:creationId xmlns:a16="http://schemas.microsoft.com/office/drawing/2014/main" id="{9163F796-D80A-4D17-F058-3DEED6745D70}"/>
-              </a:ext>
-            </a:extLst>
-          </p:cNvPr>
-          <p:cNvSpPr>
-            <a:spLocks noGrp="1"/>
-          </p:cNvSpPr>
-          <p:nvPr>
-            <p:ph type="ftr" sz="quarter" idx="11"/>
-          </p:nvPr>
-        </p:nvSpPr>
-        <p:spPr/>
-        <p:txBody>
-          <a:bodyPr/>
-          <a:lstStyle/>
-          <a:p>
-            <a:endParaRPr lang="de-DE"/>
-          </a:p>
-        </p:txBody>
-      </p:sp>
-      <p:sp>
-        <p:nvSpPr>
-          <p:cNvPr id="5" name="Slide Number Placeholder 4">
-            <a:extLst>
-              <a:ext uri="{FF2B5EF4-FFF2-40B4-BE49-F238E27FC236}">
-                <a16:creationId xmlns:a16="http://schemas.microsoft.com/office/drawing/2014/main" id="{C0CEEAE6-A2F6-06EA-6568-E54520E8C869}"/>
-              </a:ext>
-            </a:extLst>
-          </p:cNvPr>
-          <p:cNvSpPr>
-            <a:spLocks noGrp="1"/>
-          </p:cNvSpPr>
-          <p:nvPr>
-            <p:ph type="sldNum" sz="quarter" idx="12"/>
-          </p:nvPr>
-        </p:nvSpPr>
-        <p:spPr/>
-        <p:txBody>
-          <a:bodyPr/>
-          <a:lstStyle/>
-          <a:p>
-            <a:fld id="{AE839375-43AA-4A5D-B991-4343C4570BCB}" type="slidenum">
-              <a:rPr lang="de-DE" smtClean="0"/>
-              <a:t>9</a:t>
-            </a:fld>
-            <a:endParaRPr lang="de-DE"/>
-          </a:p>
-        </p:txBody>
-      </p:sp>
-      <p:sp>
-        <p:nvSpPr>
-          <p:cNvPr id="7" name="Rectangle 6">
-            <a:extLst>
-              <a:ext uri="{FF2B5EF4-FFF2-40B4-BE49-F238E27FC236}">
-                <a16:creationId xmlns:a16="http://schemas.microsoft.com/office/drawing/2014/main" id="{85423592-75D6-161D-03DD-28CDE606EC69}"/>
-              </a:ext>
-            </a:extLst>
-          </p:cNvPr>
-          <p:cNvSpPr/>
-          <p:nvPr/>
-        </p:nvSpPr>
-        <p:spPr>
-          <a:xfrm>
-            <a:off x="555354" y="1897396"/>
-            <a:ext cx="1073200" cy="582967"/>
-          </a:xfrm>
-          <a:prstGeom prst="rect">
-            <a:avLst/>
-          </a:prstGeom>
-          <a:noFill/>
-          <a:ln w="12700" cap="flat" cmpd="sng" algn="ctr">
-            <a:solidFill>
-              <a:schemeClr val="tx1"/>
-            </a:solidFill>
-            <a:prstDash val="solid"/>
-          </a:ln>
-          <a:effectLst/>
-        </p:spPr>
-        <p:txBody>
-          <a:bodyPr rot="0" spcFirstLastPara="0" vertOverflow="overflow" horzOverflow="overflow" vert="horz" wrap="square" lIns="90000" tIns="90000" rIns="90000" bIns="90000" numCol="1" spcCol="0" rtlCol="0" fromWordArt="0" anchor="ctr" anchorCtr="0" forceAA="0" compatLnSpc="1">
-            <a:prstTxWarp prst="textNoShape">
-              <a:avLst/>
-            </a:prstTxWarp>
-            <a:noAutofit/>
-          </a:bodyPr>
-          <a:lstStyle/>
-          <a:p>
-            <a:pPr algn="ctr" fontAlgn="base">
-              <a:spcAft>
-                <a:spcPct val="0"/>
-              </a:spcAft>
-            </a:pPr>
-            <a:r>
-              <a:rPr lang="en-US" altLang="zh-CN" sz="800" kern="0">
-                <a:latin typeface="Tahoma"/>
-                <a:cs typeface="Tahoma" pitchFamily="34" charset="0"/>
-              </a:rPr>
-              <a:t>HDC</a:t>
-            </a:r>
-          </a:p>
-          <a:p>
-            <a:pPr algn="ctr" fontAlgn="base">
-              <a:spcAft>
-                <a:spcPct val="0"/>
-              </a:spcAft>
-            </a:pPr>
-            <a:r>
-              <a:rPr lang="en-US" altLang="zh-CN" sz="800" kern="0">
-                <a:latin typeface="Tahoma"/>
-                <a:cs typeface="Tahoma" pitchFamily="34" charset="0"/>
-              </a:rPr>
-              <a:t>(Calc sum </a:t>
-            </a:r>
-            <a:r>
-              <a:rPr lang="en-US" altLang="zh-CN" sz="800" kern="0" err="1">
-                <a:latin typeface="Tahoma"/>
-                <a:cs typeface="Tahoma" pitchFamily="34" charset="0"/>
-              </a:rPr>
-              <a:t>decel</a:t>
-            </a:r>
-            <a:r>
-              <a:rPr lang="en-US" altLang="zh-CN" sz="800" kern="0">
-                <a:latin typeface="Tahoma"/>
-                <a:cs typeface="Tahoma" pitchFamily="34" charset="0"/>
-              </a:rPr>
-              <a:t> torque)</a:t>
-            </a:r>
-            <a:endParaRPr lang="zh-CN" altLang="en-US" sz="800" kern="0" err="1">
-              <a:latin typeface="Tahoma"/>
-              <a:cs typeface="Tahoma" pitchFamily="34" charset="0"/>
-            </a:endParaRPr>
-          </a:p>
-        </p:txBody>
-      </p:sp>
-      <p:sp>
-        <p:nvSpPr>
-          <p:cNvPr id="8" name="Rectangle 7">
-            <a:extLst>
-              <a:ext uri="{FF2B5EF4-FFF2-40B4-BE49-F238E27FC236}">
-                <a16:creationId xmlns:a16="http://schemas.microsoft.com/office/drawing/2014/main" id="{B63EB8A0-EAB1-F075-777F-7005A5E7A194}"/>
-              </a:ext>
-            </a:extLst>
-          </p:cNvPr>
-          <p:cNvSpPr/>
-          <p:nvPr/>
-        </p:nvSpPr>
-        <p:spPr>
-          <a:xfrm>
-            <a:off x="2972871" y="1790367"/>
-            <a:ext cx="1159388" cy="795791"/>
-          </a:xfrm>
-          <a:prstGeom prst="rect">
-            <a:avLst/>
-          </a:prstGeom>
-          <a:noFill/>
-          <a:ln w="12700" cap="flat" cmpd="sng" algn="ctr">
-            <a:solidFill>
-              <a:schemeClr val="tx1"/>
-            </a:solidFill>
-            <a:prstDash val="solid"/>
-          </a:ln>
-          <a:effectLst/>
-        </p:spPr>
-        <p:txBody>
-          <a:bodyPr rot="0" spcFirstLastPara="0" vertOverflow="overflow" horzOverflow="overflow" vert="horz" wrap="square" lIns="90000" tIns="90000" rIns="90000" bIns="90000" numCol="1" spcCol="0" rtlCol="0" fromWordArt="0" anchor="ctr" anchorCtr="0" forceAA="0" compatLnSpc="1">
-            <a:prstTxWarp prst="textNoShape">
-              <a:avLst/>
-            </a:prstTxWarp>
-            <a:noAutofit/>
-          </a:bodyPr>
-          <a:lstStyle/>
-          <a:p>
-            <a:pPr algn="ctr" fontAlgn="base">
-              <a:spcAft>
-                <a:spcPct val="0"/>
-              </a:spcAft>
-            </a:pPr>
-            <a:r>
-              <a:rPr lang="en-US" altLang="zh-CN" sz="800" kern="0">
-                <a:latin typeface="Tahoma"/>
-                <a:cs typeface="Tahoma" pitchFamily="34" charset="0"/>
-              </a:rPr>
-              <a:t>ARB</a:t>
-            </a:r>
-          </a:p>
-          <a:p>
-            <a:pPr algn="ctr" fontAlgn="base">
-              <a:spcAft>
-                <a:spcPct val="0"/>
-              </a:spcAft>
-            </a:pPr>
-            <a:r>
-              <a:rPr lang="en-US" altLang="zh-CN" sz="800" kern="0">
-                <a:latin typeface="Tahoma"/>
-                <a:cs typeface="Tahoma" pitchFamily="34" charset="0"/>
-              </a:rPr>
-              <a:t>(Torque distribution)</a:t>
-            </a:r>
-          </a:p>
-        </p:txBody>
-      </p:sp>
-      <p:cxnSp>
-        <p:nvCxnSpPr>
-          <p:cNvPr id="9" name="Connector: Elbow 8">
-            <a:extLst>
-              <a:ext uri="{FF2B5EF4-FFF2-40B4-BE49-F238E27FC236}">
-                <a16:creationId xmlns:a16="http://schemas.microsoft.com/office/drawing/2014/main" id="{4CE8EE85-9E58-BEB9-BF74-AC7C1108FE79}"/>
-              </a:ext>
-            </a:extLst>
-          </p:cNvPr>
-          <p:cNvCxnSpPr>
-            <a:cxnSpLocks/>
-            <a:stCxn id="7" idx="3"/>
-            <a:endCxn id="8" idx="1"/>
-          </p:cNvCxnSpPr>
-          <p:nvPr/>
-        </p:nvCxnSpPr>
-        <p:spPr>
-          <a:xfrm flipV="1">
-            <a:off x="1628554" y="2188263"/>
-            <a:ext cx="1344317" cy="617"/>
-          </a:xfrm>
-          <a:prstGeom prst="bentConnector3">
-            <a:avLst/>
-          </a:prstGeom>
-          <a:ln>
-            <a:tailEnd type="triangle"/>
-          </a:ln>
-        </p:spPr>
-        <p:style>
-          <a:lnRef idx="1">
-            <a:schemeClr val="dk1"/>
-          </a:lnRef>
-          <a:fillRef idx="0">
-            <a:schemeClr val="dk1"/>
-          </a:fillRef>
-          <a:effectRef idx="0">
-            <a:schemeClr val="dk1"/>
-          </a:effectRef>
-          <a:fontRef idx="minor">
-            <a:schemeClr val="tx1"/>
-          </a:fontRef>
-        </p:style>
-      </p:cxnSp>
-      <p:sp>
-        <p:nvSpPr>
-          <p:cNvPr id="10" name="TextBox 9">
-            <a:extLst>
-              <a:ext uri="{FF2B5EF4-FFF2-40B4-BE49-F238E27FC236}">
-                <a16:creationId xmlns:a16="http://schemas.microsoft.com/office/drawing/2014/main" id="{8F01DC34-80F3-CD8D-288A-ABCE333660A4}"/>
-              </a:ext>
-            </a:extLst>
-          </p:cNvPr>
-          <p:cNvSpPr txBox="1"/>
-          <p:nvPr/>
-        </p:nvSpPr>
-        <p:spPr>
-          <a:xfrm>
-            <a:off x="1630846" y="1981382"/>
-            <a:ext cx="1444517" cy="246221"/>
-          </a:xfrm>
-          <a:prstGeom prst="rect">
-            <a:avLst/>
-          </a:prstGeom>
-          <a:noFill/>
-        </p:spPr>
-        <p:txBody>
-          <a:bodyPr wrap="square">
-            <a:spAutoFit/>
-          </a:bodyPr>
-          <a:lstStyle/>
-          <a:p>
-            <a:pPr algn="ctr" fontAlgn="base">
-              <a:spcAft>
-                <a:spcPct val="0"/>
-              </a:spcAft>
-            </a:pPr>
-            <a:r>
-              <a:rPr lang="en-US" altLang="zh-CN" sz="1000" kern="0">
-                <a:latin typeface="Tahoma"/>
-                <a:cs typeface="Tahoma" pitchFamily="34" charset="0"/>
-              </a:rPr>
-              <a:t>1× sum </a:t>
-            </a:r>
-            <a:r>
-              <a:rPr lang="en-US" altLang="zh-CN" sz="1000" kern="0" err="1">
-                <a:latin typeface="Tahoma"/>
-                <a:cs typeface="Tahoma" pitchFamily="34" charset="0"/>
-              </a:rPr>
-              <a:t>decel</a:t>
-            </a:r>
-            <a:r>
-              <a:rPr lang="en-US" altLang="zh-CN" sz="1000" kern="0">
-                <a:latin typeface="Tahoma"/>
-                <a:cs typeface="Tahoma" pitchFamily="34" charset="0"/>
-              </a:rPr>
-              <a:t> torque</a:t>
-            </a:r>
-            <a:endParaRPr lang="zh-CN" altLang="en-US" sz="1000" kern="0" err="1">
-              <a:latin typeface="Tahoma"/>
-              <a:cs typeface="Tahoma" pitchFamily="34" charset="0"/>
-            </a:endParaRPr>
-          </a:p>
-        </p:txBody>
-      </p:sp>
-      <p:cxnSp>
-        <p:nvCxnSpPr>
-          <p:cNvPr id="12" name="Straight Arrow Connector 11">
-            <a:extLst>
-              <a:ext uri="{FF2B5EF4-FFF2-40B4-BE49-F238E27FC236}">
-                <a16:creationId xmlns:a16="http://schemas.microsoft.com/office/drawing/2014/main" id="{ADD9E565-5E40-117F-AE3E-B03E602F2261}"/>
-              </a:ext>
-            </a:extLst>
-          </p:cNvPr>
-          <p:cNvCxnSpPr/>
-          <p:nvPr/>
-        </p:nvCxnSpPr>
-        <p:spPr>
-          <a:xfrm flipV="1">
-            <a:off x="689703" y="2481891"/>
-            <a:ext cx="0" cy="471268"/>
-          </a:xfrm>
-          <a:prstGeom prst="straightConnector1">
-            <a:avLst/>
-          </a:prstGeom>
-          <a:ln>
-            <a:tailEnd type="triangle"/>
-          </a:ln>
-        </p:spPr>
-        <p:style>
-          <a:lnRef idx="1">
-            <a:schemeClr val="dk1"/>
-          </a:lnRef>
-          <a:fillRef idx="0">
-            <a:schemeClr val="dk1"/>
-          </a:fillRef>
-          <a:effectRef idx="0">
-            <a:schemeClr val="dk1"/>
-          </a:effectRef>
-          <a:fontRef idx="minor">
-            <a:schemeClr val="tx1"/>
-          </a:fontRef>
-        </p:style>
-      </p:cxnSp>
-      <p:cxnSp>
-        <p:nvCxnSpPr>
-          <p:cNvPr id="13" name="Straight Arrow Connector 12">
-            <a:extLst>
-              <a:ext uri="{FF2B5EF4-FFF2-40B4-BE49-F238E27FC236}">
-                <a16:creationId xmlns:a16="http://schemas.microsoft.com/office/drawing/2014/main" id="{85617856-0CF3-51D6-5FD3-B68FD22E7057}"/>
-              </a:ext>
-            </a:extLst>
-          </p:cNvPr>
-          <p:cNvCxnSpPr/>
-          <p:nvPr/>
-        </p:nvCxnSpPr>
-        <p:spPr>
-          <a:xfrm flipV="1">
-            <a:off x="1525718" y="2481891"/>
-            <a:ext cx="0" cy="471268"/>
-          </a:xfrm>
-          <a:prstGeom prst="straightConnector1">
-            <a:avLst/>
-          </a:prstGeom>
-          <a:ln>
-            <a:tailEnd type="triangle"/>
-          </a:ln>
-        </p:spPr>
-        <p:style>
-          <a:lnRef idx="1">
-            <a:schemeClr val="dk1"/>
-          </a:lnRef>
-          <a:fillRef idx="0">
-            <a:schemeClr val="dk1"/>
-          </a:fillRef>
-          <a:effectRef idx="0">
-            <a:schemeClr val="dk1"/>
-          </a:effectRef>
-          <a:fontRef idx="minor">
-            <a:schemeClr val="tx1"/>
-          </a:fontRef>
-        </p:style>
-      </p:cxnSp>
-      <p:sp>
-        <p:nvSpPr>
-          <p:cNvPr id="15" name="TextBox 14">
-            <a:extLst>
-              <a:ext uri="{FF2B5EF4-FFF2-40B4-BE49-F238E27FC236}">
-                <a16:creationId xmlns:a16="http://schemas.microsoft.com/office/drawing/2014/main" id="{0E163FFF-6A50-15A0-7C77-189DA83D2F26}"/>
-              </a:ext>
-            </a:extLst>
-          </p:cNvPr>
-          <p:cNvSpPr txBox="1"/>
-          <p:nvPr/>
-        </p:nvSpPr>
-        <p:spPr>
-          <a:xfrm>
-            <a:off x="359247" y="2799248"/>
-            <a:ext cx="676467" cy="123111"/>
-          </a:xfrm>
-          <a:prstGeom prst="rect">
-            <a:avLst/>
-          </a:prstGeom>
-          <a:noFill/>
-        </p:spPr>
-        <p:txBody>
-          <a:bodyPr wrap="none" lIns="0" tIns="0" rIns="0" bIns="0" rtlCol="0">
-            <a:spAutoFit/>
-          </a:bodyPr>
-          <a:lstStyle/>
-          <a:p>
-            <a:pPr marL="0" marR="0" indent="0" defTabSz="914400" eaLnBrk="1" fontAlgn="base" latinLnBrk="0" hangingPunct="1">
-              <a:lnSpc>
-                <a:spcPct val="100000"/>
-              </a:lnSpc>
-              <a:spcBef>
-                <a:spcPts val="0"/>
-              </a:spcBef>
-              <a:spcAft>
-                <a:spcPct val="0"/>
-              </a:spcAft>
-              <a:buClrTx/>
-              <a:buSzTx/>
-              <a:buFontTx/>
-              <a:buNone/>
-              <a:tabLst/>
-            </a:pPr>
-            <a:r>
-              <a:rPr kumimoji="0" lang="en-US" altLang="zh-CN" sz="800" b="0" i="0" u="none" strike="noStrike" kern="0" cap="none" spc="0" normalizeH="0" baseline="0" noProof="0">
-                <a:ln>
-                  <a:noFill/>
-                </a:ln>
-                <a:solidFill>
-                  <a:srgbClr val="000000"/>
-                </a:solidFill>
-                <a:effectLst/>
-                <a:uLnTx/>
-                <a:uFillTx/>
-              </a:rPr>
-              <a:t>Motor Capacity</a:t>
-            </a:r>
-            <a:endParaRPr kumimoji="0" lang="zh-CN" altLang="en-US" sz="800" b="0" i="0" u="none" strike="noStrike" kern="0" cap="none" spc="0" normalizeH="0" baseline="0" noProof="0">
-              <a:ln>
-                <a:noFill/>
-              </a:ln>
-              <a:solidFill>
-                <a:srgbClr val="000000"/>
-              </a:solidFill>
-              <a:effectLst/>
-              <a:uLnTx/>
-              <a:uFillTx/>
-            </a:endParaRPr>
-          </a:p>
-        </p:txBody>
-      </p:sp>
-      <p:sp>
-        <p:nvSpPr>
-          <p:cNvPr id="16" name="TextBox 15">
-            <a:extLst>
-              <a:ext uri="{FF2B5EF4-FFF2-40B4-BE49-F238E27FC236}">
-                <a16:creationId xmlns:a16="http://schemas.microsoft.com/office/drawing/2014/main" id="{38736F32-F1B3-E545-2334-3CA1A714B869}"/>
-              </a:ext>
-            </a:extLst>
-          </p:cNvPr>
-          <p:cNvSpPr txBox="1"/>
-          <p:nvPr/>
-        </p:nvSpPr>
-        <p:spPr>
-          <a:xfrm>
-            <a:off x="1278555" y="2655969"/>
-            <a:ext cx="512961" cy="123111"/>
-          </a:xfrm>
-          <a:prstGeom prst="rect">
-            <a:avLst/>
-          </a:prstGeom>
-          <a:noFill/>
-        </p:spPr>
-        <p:txBody>
-          <a:bodyPr wrap="none" lIns="0" tIns="0" rIns="0" bIns="0" rtlCol="0">
-            <a:spAutoFit/>
-          </a:bodyPr>
-          <a:lstStyle/>
-          <a:p>
-            <a:pPr marL="0" marR="0" indent="0" defTabSz="914400" eaLnBrk="1" fontAlgn="base" latinLnBrk="0" hangingPunct="1">
-              <a:lnSpc>
-                <a:spcPct val="100000"/>
-              </a:lnSpc>
-              <a:spcBef>
-                <a:spcPts val="0"/>
-              </a:spcBef>
-              <a:spcAft>
-                <a:spcPct val="0"/>
-              </a:spcAft>
-              <a:buClrTx/>
-              <a:buSzTx/>
-              <a:buFontTx/>
-              <a:buNone/>
-              <a:tabLst/>
-            </a:pPr>
-            <a:r>
-              <a:rPr lang="en-US" altLang="zh-CN" sz="800" kern="0">
-                <a:solidFill>
-                  <a:srgbClr val="000000"/>
-                </a:solidFill>
-              </a:rPr>
-              <a:t>Brake state</a:t>
-            </a:r>
-            <a:endParaRPr kumimoji="0" lang="zh-CN" altLang="en-US" sz="800" b="0" i="0" u="none" strike="noStrike" kern="0" cap="none" spc="0" normalizeH="0" baseline="0" noProof="0">
-              <a:ln>
-                <a:noFill/>
-              </a:ln>
-              <a:solidFill>
-                <a:srgbClr val="000000"/>
-              </a:solidFill>
-              <a:effectLst/>
-              <a:uLnTx/>
-              <a:uFillTx/>
-            </a:endParaRPr>
-          </a:p>
-        </p:txBody>
-      </p:sp>
-      <p:sp>
-        <p:nvSpPr>
-          <p:cNvPr id="17" name="Rectangle 16">
-            <a:extLst>
-              <a:ext uri="{FF2B5EF4-FFF2-40B4-BE49-F238E27FC236}">
-                <a16:creationId xmlns:a16="http://schemas.microsoft.com/office/drawing/2014/main" id="{2F3C7507-6C46-88CC-D380-3CE999A125CF}"/>
-              </a:ext>
-            </a:extLst>
-          </p:cNvPr>
-          <p:cNvSpPr/>
-          <p:nvPr/>
-        </p:nvSpPr>
-        <p:spPr>
-          <a:xfrm>
-            <a:off x="5225484" y="1790367"/>
-            <a:ext cx="1073199" cy="815421"/>
-          </a:xfrm>
-          <a:prstGeom prst="rect">
-            <a:avLst/>
-          </a:prstGeom>
-          <a:noFill/>
-          <a:ln w="12700" cap="flat" cmpd="sng" algn="ctr">
-            <a:solidFill>
-              <a:schemeClr val="tx1"/>
-            </a:solidFill>
-            <a:prstDash val="solid"/>
-          </a:ln>
-          <a:effectLst/>
-        </p:spPr>
-        <p:txBody>
-          <a:bodyPr rot="0" spcFirstLastPara="0" vertOverflow="overflow" horzOverflow="overflow" vert="horz" wrap="square" lIns="90000" tIns="90000" rIns="90000" bIns="90000" numCol="1" spcCol="0" rtlCol="0" fromWordArt="0" anchor="ctr" anchorCtr="0" forceAA="0" compatLnSpc="1">
-            <a:prstTxWarp prst="textNoShape">
-              <a:avLst/>
-            </a:prstTxWarp>
-            <a:noAutofit/>
-          </a:bodyPr>
-          <a:lstStyle/>
-          <a:p>
-            <a:pPr algn="ctr" fontAlgn="base">
-              <a:spcAft>
-                <a:spcPct val="0"/>
-              </a:spcAft>
-            </a:pPr>
-            <a:r>
-              <a:rPr lang="en-US" altLang="zh-CN" sz="800" kern="0">
-                <a:latin typeface="Tahoma"/>
-                <a:cs typeface="Tahoma" pitchFamily="34" charset="0"/>
-              </a:rPr>
-              <a:t>Target Calculation</a:t>
-            </a:r>
-          </a:p>
-        </p:txBody>
-      </p:sp>
-      <p:cxnSp>
-        <p:nvCxnSpPr>
-          <p:cNvPr id="18" name="Straight Arrow Connector 17">
-            <a:extLst>
-              <a:ext uri="{FF2B5EF4-FFF2-40B4-BE49-F238E27FC236}">
-                <a16:creationId xmlns:a16="http://schemas.microsoft.com/office/drawing/2014/main" id="{B64BF7AC-7DB9-7FCD-D56F-880E22A0820C}"/>
-              </a:ext>
-            </a:extLst>
-          </p:cNvPr>
-          <p:cNvCxnSpPr/>
-          <p:nvPr/>
-        </p:nvCxnSpPr>
-        <p:spPr>
-          <a:xfrm>
-            <a:off x="4132259" y="2104492"/>
-            <a:ext cx="1093225" cy="0"/>
-          </a:xfrm>
-          <a:prstGeom prst="straightConnector1">
-            <a:avLst/>
-          </a:prstGeom>
-          <a:ln>
-            <a:tailEnd type="triangle"/>
-          </a:ln>
-        </p:spPr>
-        <p:style>
-          <a:lnRef idx="1">
-            <a:schemeClr val="dk1"/>
-          </a:lnRef>
-          <a:fillRef idx="0">
-            <a:schemeClr val="dk1"/>
-          </a:fillRef>
-          <a:effectRef idx="0">
-            <a:schemeClr val="dk1"/>
-          </a:effectRef>
-          <a:fontRef idx="minor">
-            <a:schemeClr val="tx1"/>
-          </a:fontRef>
-        </p:style>
-      </p:cxnSp>
-      <p:cxnSp>
-        <p:nvCxnSpPr>
-          <p:cNvPr id="19" name="Straight Arrow Connector 18">
-            <a:extLst>
-              <a:ext uri="{FF2B5EF4-FFF2-40B4-BE49-F238E27FC236}">
-                <a16:creationId xmlns:a16="http://schemas.microsoft.com/office/drawing/2014/main" id="{A187B2E0-6B62-B35D-7062-07844DFB96A1}"/>
-              </a:ext>
-            </a:extLst>
-          </p:cNvPr>
-          <p:cNvCxnSpPr/>
-          <p:nvPr/>
-        </p:nvCxnSpPr>
-        <p:spPr>
-          <a:xfrm>
-            <a:off x="4132259" y="2456184"/>
-            <a:ext cx="1093225" cy="0"/>
-          </a:xfrm>
-          <a:prstGeom prst="straightConnector1">
-            <a:avLst/>
-          </a:prstGeom>
-          <a:ln>
-            <a:tailEnd type="triangle"/>
-          </a:ln>
-        </p:spPr>
-        <p:style>
-          <a:lnRef idx="1">
-            <a:schemeClr val="dk1"/>
-          </a:lnRef>
-          <a:fillRef idx="0">
-            <a:schemeClr val="dk1"/>
-          </a:fillRef>
-          <a:effectRef idx="0">
-            <a:schemeClr val="dk1"/>
-          </a:effectRef>
-          <a:fontRef idx="minor">
-            <a:schemeClr val="tx1"/>
-          </a:fontRef>
-        </p:style>
-      </p:cxnSp>
-      <p:sp>
-        <p:nvSpPr>
-          <p:cNvPr id="20" name="TextBox 19">
-            <a:extLst>
-              <a:ext uri="{FF2B5EF4-FFF2-40B4-BE49-F238E27FC236}">
-                <a16:creationId xmlns:a16="http://schemas.microsoft.com/office/drawing/2014/main" id="{0EF8FBE3-1695-C104-957E-D2743E8C75EF}"/>
-              </a:ext>
-            </a:extLst>
-          </p:cNvPr>
-          <p:cNvSpPr txBox="1"/>
-          <p:nvPr/>
-        </p:nvSpPr>
-        <p:spPr>
-          <a:xfrm>
-            <a:off x="4029767" y="1897396"/>
-            <a:ext cx="1444517" cy="246221"/>
-          </a:xfrm>
-          <a:prstGeom prst="rect">
-            <a:avLst/>
-          </a:prstGeom>
-          <a:noFill/>
-        </p:spPr>
-        <p:txBody>
-          <a:bodyPr wrap="square">
-            <a:spAutoFit/>
-          </a:bodyPr>
-          <a:lstStyle/>
-          <a:p>
-            <a:pPr algn="ctr" fontAlgn="base">
-              <a:spcAft>
-                <a:spcPct val="0"/>
-              </a:spcAft>
-            </a:pPr>
-            <a:r>
-              <a:rPr lang="en-US" altLang="zh-CN" sz="1000" kern="0">
-                <a:latin typeface="Tahoma"/>
-                <a:cs typeface="Tahoma" pitchFamily="34" charset="0"/>
-              </a:rPr>
-              <a:t>1× brake torque</a:t>
-            </a:r>
-            <a:endParaRPr lang="zh-CN" altLang="en-US" sz="1000" kern="0" err="1">
-              <a:latin typeface="Tahoma"/>
-              <a:cs typeface="Tahoma" pitchFamily="34" charset="0"/>
-            </a:endParaRPr>
-          </a:p>
-        </p:txBody>
-      </p:sp>
-      <p:sp>
-        <p:nvSpPr>
-          <p:cNvPr id="21" name="TextBox 20">
-            <a:extLst>
-              <a:ext uri="{FF2B5EF4-FFF2-40B4-BE49-F238E27FC236}">
-                <a16:creationId xmlns:a16="http://schemas.microsoft.com/office/drawing/2014/main" id="{C5EDCD47-49ED-BDAD-3AE9-32540372818B}"/>
-              </a:ext>
-            </a:extLst>
-          </p:cNvPr>
-          <p:cNvSpPr txBox="1"/>
-          <p:nvPr/>
-        </p:nvSpPr>
-        <p:spPr>
-          <a:xfrm>
-            <a:off x="4029767" y="2234142"/>
-            <a:ext cx="1444517" cy="246221"/>
-          </a:xfrm>
-          <a:prstGeom prst="rect">
-            <a:avLst/>
-          </a:prstGeom>
-          <a:noFill/>
-        </p:spPr>
-        <p:txBody>
-          <a:bodyPr wrap="square">
-            <a:spAutoFit/>
-          </a:bodyPr>
-          <a:lstStyle/>
-          <a:p>
-            <a:pPr algn="ctr" fontAlgn="base">
-              <a:spcAft>
-                <a:spcPct val="0"/>
-              </a:spcAft>
-            </a:pPr>
-            <a:r>
-              <a:rPr lang="en-US" altLang="zh-CN" sz="1000" kern="0">
-                <a:latin typeface="Tahoma"/>
-                <a:cs typeface="Tahoma" pitchFamily="34" charset="0"/>
-              </a:rPr>
-              <a:t>1× regen torque</a:t>
-            </a:r>
-            <a:endParaRPr lang="zh-CN" altLang="en-US" sz="1000" kern="0" err="1">
-              <a:latin typeface="Tahoma"/>
-              <a:cs typeface="Tahoma" pitchFamily="34" charset="0"/>
-            </a:endParaRPr>
-          </a:p>
-        </p:txBody>
-      </p:sp>
-      <p:cxnSp>
-        <p:nvCxnSpPr>
-          <p:cNvPr id="22" name="Straight Arrow Connector 21">
-            <a:extLst>
-              <a:ext uri="{FF2B5EF4-FFF2-40B4-BE49-F238E27FC236}">
-                <a16:creationId xmlns:a16="http://schemas.microsoft.com/office/drawing/2014/main" id="{CAB7BE44-AD12-0E94-5170-596E59F4326F}"/>
-              </a:ext>
-            </a:extLst>
-          </p:cNvPr>
-          <p:cNvCxnSpPr/>
-          <p:nvPr/>
-        </p:nvCxnSpPr>
-        <p:spPr>
-          <a:xfrm>
-            <a:off x="6319785" y="2083721"/>
-            <a:ext cx="1093225" cy="0"/>
-          </a:xfrm>
-          <a:prstGeom prst="straightConnector1">
-            <a:avLst/>
-          </a:prstGeom>
-          <a:ln>
-            <a:tailEnd type="triangle"/>
-          </a:ln>
-        </p:spPr>
-        <p:style>
-          <a:lnRef idx="1">
-            <a:schemeClr val="dk1"/>
-          </a:lnRef>
-          <a:fillRef idx="0">
-            <a:schemeClr val="dk1"/>
-          </a:fillRef>
-          <a:effectRef idx="0">
-            <a:schemeClr val="dk1"/>
-          </a:effectRef>
-          <a:fontRef idx="minor">
-            <a:schemeClr val="tx1"/>
-          </a:fontRef>
-        </p:style>
-      </p:cxnSp>
-      <p:cxnSp>
-        <p:nvCxnSpPr>
-          <p:cNvPr id="23" name="Straight Arrow Connector 22">
-            <a:extLst>
-              <a:ext uri="{FF2B5EF4-FFF2-40B4-BE49-F238E27FC236}">
-                <a16:creationId xmlns:a16="http://schemas.microsoft.com/office/drawing/2014/main" id="{57CA9241-38B4-33EC-64BB-C1C9EE49A22F}"/>
-              </a:ext>
-            </a:extLst>
-          </p:cNvPr>
-          <p:cNvCxnSpPr/>
-          <p:nvPr/>
-        </p:nvCxnSpPr>
-        <p:spPr>
-          <a:xfrm>
-            <a:off x="6319785" y="2435413"/>
-            <a:ext cx="1093225" cy="0"/>
-          </a:xfrm>
-          <a:prstGeom prst="straightConnector1">
-            <a:avLst/>
-          </a:prstGeom>
-          <a:ln>
-            <a:tailEnd type="triangle"/>
-          </a:ln>
-        </p:spPr>
-        <p:style>
-          <a:lnRef idx="1">
-            <a:schemeClr val="dk1"/>
-          </a:lnRef>
-          <a:fillRef idx="0">
-            <a:schemeClr val="dk1"/>
-          </a:fillRef>
-          <a:effectRef idx="0">
-            <a:schemeClr val="dk1"/>
-          </a:effectRef>
-          <a:fontRef idx="minor">
-            <a:schemeClr val="tx1"/>
-          </a:fontRef>
-        </p:style>
-      </p:cxnSp>
-      <p:sp>
-        <p:nvSpPr>
-          <p:cNvPr id="24" name="TextBox 23">
-            <a:extLst>
-              <a:ext uri="{FF2B5EF4-FFF2-40B4-BE49-F238E27FC236}">
-                <a16:creationId xmlns:a16="http://schemas.microsoft.com/office/drawing/2014/main" id="{37F1B980-636B-8C07-CBC3-569FC310C84E}"/>
-              </a:ext>
-            </a:extLst>
-          </p:cNvPr>
-          <p:cNvSpPr txBox="1"/>
-          <p:nvPr/>
-        </p:nvSpPr>
-        <p:spPr>
-          <a:xfrm>
-            <a:off x="6314604" y="2434384"/>
-            <a:ext cx="2097661" cy="553998"/>
-          </a:xfrm>
-          <a:prstGeom prst="rect">
-            <a:avLst/>
-          </a:prstGeom>
-          <a:noFill/>
-        </p:spPr>
-        <p:txBody>
-          <a:bodyPr wrap="square" lIns="91440" tIns="45720" rIns="91440" bIns="45720" anchor="t">
-            <a:spAutoFit/>
-          </a:bodyPr>
-          <a:lstStyle/>
-          <a:p>
-            <a:pPr algn="ctr"/>
-            <a:r>
-              <a:rPr lang="en-US" sz="1000" kern="0">
-                <a:ea typeface="+mn-lt"/>
-                <a:cs typeface="+mn-lt"/>
-              </a:rPr>
-              <a:t>front regen torque</a:t>
-            </a:r>
-            <a:endParaRPr lang="en-US">
-              <a:ea typeface="+mn-lt"/>
-              <a:cs typeface="+mn-lt"/>
-            </a:endParaRPr>
-          </a:p>
-          <a:p>
-            <a:pPr algn="ctr"/>
-            <a:r>
-              <a:rPr lang="en-US" sz="1000" kern="0">
-                <a:ea typeface="+mn-lt"/>
-                <a:cs typeface="+mn-lt"/>
-              </a:rPr>
-              <a:t>rear regen torque</a:t>
-            </a:r>
-            <a:endParaRPr lang="en-US">
-              <a:ea typeface="+mn-lt"/>
-              <a:cs typeface="+mn-lt"/>
-            </a:endParaRPr>
-          </a:p>
-          <a:p>
-            <a:pPr algn="ctr"/>
-            <a:r>
-              <a:rPr lang="en-US" sz="1000" kern="0">
-                <a:latin typeface="Tahoma"/>
-                <a:ea typeface="Tahoma"/>
-                <a:cs typeface="Tahoma"/>
-              </a:rPr>
-              <a:t>Regen torque state(HDC state)</a:t>
-            </a:r>
-            <a:endParaRPr lang="en-US" sz="1000" kern="0">
-              <a:latin typeface="Tahoma"/>
-              <a:ea typeface="Tahoma"/>
-              <a:cs typeface="Tahoma" pitchFamily="34" charset="0"/>
-            </a:endParaRPr>
-          </a:p>
-        </p:txBody>
-      </p:sp>
-      <p:sp>
-        <p:nvSpPr>
-          <p:cNvPr id="26" name="TextBox 25">
-            <a:extLst>
-              <a:ext uri="{FF2B5EF4-FFF2-40B4-BE49-F238E27FC236}">
-                <a16:creationId xmlns:a16="http://schemas.microsoft.com/office/drawing/2014/main" id="{EADCE7BC-9853-38D7-A759-5067B2710DE6}"/>
-              </a:ext>
-            </a:extLst>
-          </p:cNvPr>
-          <p:cNvSpPr txBox="1"/>
-          <p:nvPr/>
-        </p:nvSpPr>
-        <p:spPr>
-          <a:xfrm>
-            <a:off x="179845" y="543381"/>
-            <a:ext cx="1824217" cy="184666"/>
-          </a:xfrm>
-          <a:prstGeom prst="rect">
-            <a:avLst/>
-          </a:prstGeom>
-          <a:noFill/>
-        </p:spPr>
-        <p:txBody>
-          <a:bodyPr wrap="none" lIns="0" tIns="0" rIns="0" bIns="0" rtlCol="0">
-            <a:spAutoFit/>
-          </a:bodyPr>
-          <a:lstStyle/>
-          <a:p>
-            <a:pPr marL="0" marR="0" indent="0" defTabSz="914400" eaLnBrk="1" fontAlgn="base" latinLnBrk="0" hangingPunct="1">
-              <a:lnSpc>
-                <a:spcPct val="100000"/>
-              </a:lnSpc>
-              <a:spcBef>
-                <a:spcPts val="0"/>
-              </a:spcBef>
-              <a:spcAft>
-                <a:spcPct val="0"/>
-              </a:spcAft>
-              <a:buClrTx/>
-              <a:buSzTx/>
-              <a:buFontTx/>
-              <a:buNone/>
-              <a:tabLst/>
-            </a:pPr>
-            <a:r>
-              <a:rPr kumimoji="0" lang="en-US" altLang="zh-CN" sz="1200" b="0" i="0" u="none" strike="noStrike" kern="0" cap="none" spc="0" normalizeH="0" baseline="0" noProof="0">
-                <a:ln>
-                  <a:noFill/>
-                </a:ln>
-                <a:solidFill>
-                  <a:schemeClr val="accent4">
-                    <a:lumMod val="60000"/>
-                    <a:lumOff val="40000"/>
-                  </a:schemeClr>
-                </a:solidFill>
-                <a:effectLst/>
-                <a:uLnTx/>
-                <a:uFillTx/>
-              </a:rPr>
-              <a:t>A proposal of HDC in VMC:</a:t>
-            </a:r>
-            <a:endParaRPr kumimoji="0" lang="zh-CN" altLang="en-US" sz="1200" b="0" i="0" u="none" strike="noStrike" kern="0" cap="none" spc="0" normalizeH="0" baseline="0" noProof="0">
-              <a:ln>
-                <a:noFill/>
-              </a:ln>
-              <a:solidFill>
-                <a:schemeClr val="accent4">
-                  <a:lumMod val="60000"/>
-                  <a:lumOff val="40000"/>
-                </a:schemeClr>
-              </a:solidFill>
-              <a:effectLst/>
-              <a:uLnTx/>
-              <a:uFillTx/>
-            </a:endParaRPr>
-          </a:p>
-        </p:txBody>
-      </p:sp>
-      <p:sp>
-        <p:nvSpPr>
-          <p:cNvPr id="11" name="Rectangle 10">
-            <a:extLst>
-              <a:ext uri="{FF2B5EF4-FFF2-40B4-BE49-F238E27FC236}">
-                <a16:creationId xmlns:a16="http://schemas.microsoft.com/office/drawing/2014/main" id="{EAC94B11-536E-98B9-1A6E-47A021A635C3}"/>
-              </a:ext>
-            </a:extLst>
-          </p:cNvPr>
-          <p:cNvSpPr/>
-          <p:nvPr/>
-        </p:nvSpPr>
-        <p:spPr>
-          <a:xfrm>
-            <a:off x="555354" y="1031084"/>
-            <a:ext cx="1073200" cy="582967"/>
-          </a:xfrm>
-          <a:prstGeom prst="rect">
-            <a:avLst/>
-          </a:prstGeom>
-          <a:noFill/>
-          <a:ln w="12700" cap="flat" cmpd="sng" algn="ctr">
-            <a:solidFill>
-              <a:srgbClr val="7F7F7F"/>
-            </a:solidFill>
-            <a:prstDash val="dash"/>
-          </a:ln>
-          <a:effectLst/>
-        </p:spPr>
-        <p:txBody>
-          <a:bodyPr rot="0" spcFirstLastPara="0" vertOverflow="overflow" horzOverflow="overflow" vert="horz" wrap="square" lIns="90000" tIns="90000" rIns="90000" bIns="90000" numCol="1" spcCol="0" rtlCol="0" fromWordArt="0" anchor="ctr" anchorCtr="0" forceAA="0" compatLnSpc="1">
-            <a:prstTxWarp prst="textNoShape">
-              <a:avLst/>
-            </a:prstTxWarp>
-            <a:noAutofit/>
-          </a:bodyPr>
-          <a:lstStyle/>
-          <a:p>
-            <a:pPr algn="ctr" fontAlgn="base">
-              <a:spcAft>
-                <a:spcPct val="0"/>
-              </a:spcAft>
-            </a:pPr>
-            <a:r>
-              <a:rPr lang="en-US" altLang="zh-CN" sz="800" kern="0">
-                <a:latin typeface="Tahoma"/>
-                <a:cs typeface="Tahoma" pitchFamily="34" charset="0"/>
-              </a:rPr>
-              <a:t>Infobase potential calculation longitudinal</a:t>
-            </a:r>
-            <a:endParaRPr lang="zh-CN" altLang="en-US" sz="800" kern="0" err="1">
-              <a:latin typeface="Tahoma"/>
-              <a:cs typeface="Tahoma" pitchFamily="34" charset="0"/>
-            </a:endParaRPr>
-          </a:p>
-        </p:txBody>
-      </p:sp>
-      <p:sp>
-        <p:nvSpPr>
-          <p:cNvPr id="14" name="TextBox 13">
-            <a:extLst>
-              <a:ext uri="{FF2B5EF4-FFF2-40B4-BE49-F238E27FC236}">
-                <a16:creationId xmlns:a16="http://schemas.microsoft.com/office/drawing/2014/main" id="{03835ECA-0D3E-079F-FFF8-AD57FEA290D8}"/>
-              </a:ext>
-            </a:extLst>
-          </p:cNvPr>
-          <p:cNvSpPr txBox="1"/>
-          <p:nvPr/>
-        </p:nvSpPr>
-        <p:spPr>
-          <a:xfrm>
-            <a:off x="1630847" y="1117949"/>
-            <a:ext cx="298754" cy="246221"/>
-          </a:xfrm>
-          <a:prstGeom prst="rect">
-            <a:avLst/>
-          </a:prstGeom>
-          <a:noFill/>
-        </p:spPr>
-        <p:txBody>
-          <a:bodyPr wrap="square">
-            <a:spAutoFit/>
-          </a:bodyPr>
-          <a:lstStyle/>
-          <a:p>
-            <a:pPr algn="ctr" fontAlgn="base">
-              <a:spcAft>
-                <a:spcPct val="0"/>
-              </a:spcAft>
-            </a:pPr>
-            <a:r>
-              <a:rPr lang="en-US" altLang="zh-CN" sz="1000" kern="0">
-                <a:latin typeface="Tahoma"/>
-                <a:cs typeface="Tahoma" pitchFamily="34" charset="0"/>
-              </a:rPr>
-              <a:t>?</a:t>
-            </a:r>
-            <a:endParaRPr lang="zh-CN" altLang="en-US" sz="1000" kern="0" err="1">
-              <a:latin typeface="Tahoma"/>
-              <a:cs typeface="Tahoma" pitchFamily="34" charset="0"/>
-            </a:endParaRPr>
-          </a:p>
-        </p:txBody>
-      </p:sp>
-      <p:cxnSp>
-        <p:nvCxnSpPr>
-          <p:cNvPr id="28" name="Straight Arrow Connector 27">
-            <a:extLst>
-              <a:ext uri="{FF2B5EF4-FFF2-40B4-BE49-F238E27FC236}">
-                <a16:creationId xmlns:a16="http://schemas.microsoft.com/office/drawing/2014/main" id="{F04C1994-47BF-59AE-D012-C8A9CEC1981F}"/>
-              </a:ext>
-            </a:extLst>
-          </p:cNvPr>
-          <p:cNvCxnSpPr>
-            <a:stCxn id="11" idx="2"/>
-            <a:endCxn id="7" idx="0"/>
-          </p:cNvCxnSpPr>
-          <p:nvPr/>
-        </p:nvCxnSpPr>
-        <p:spPr>
-          <a:xfrm>
-            <a:off x="1091954" y="1614051"/>
-            <a:ext cx="0" cy="283345"/>
-          </a:xfrm>
-          <a:prstGeom prst="straightConnector1">
-            <a:avLst/>
-          </a:prstGeom>
-          <a:noFill/>
-          <a:ln w="28575" cap="rnd" cmpd="sng" algn="ctr">
-            <a:solidFill>
-              <a:srgbClr val="7F7F7F"/>
-            </a:solidFill>
-            <a:prstDash val="sysDot"/>
-            <a:round/>
-            <a:tailEnd type="triangle"/>
-          </a:ln>
-          <a:effectLst/>
-        </p:spPr>
-      </p:cxnSp>
-      <p:sp>
-        <p:nvSpPr>
-          <p:cNvPr id="30" name="Rectangle 29">
-            <a:extLst>
-              <a:ext uri="{FF2B5EF4-FFF2-40B4-BE49-F238E27FC236}">
-                <a16:creationId xmlns:a16="http://schemas.microsoft.com/office/drawing/2014/main" id="{6909DE9B-0EEF-F7C4-EAF0-98BE1224A804}"/>
-              </a:ext>
-            </a:extLst>
-          </p:cNvPr>
-          <p:cNvSpPr/>
-          <p:nvPr/>
-        </p:nvSpPr>
-        <p:spPr>
-          <a:xfrm>
-            <a:off x="5225483" y="905659"/>
-            <a:ext cx="1073200" cy="582967"/>
-          </a:xfrm>
-          <a:prstGeom prst="rect">
-            <a:avLst/>
-          </a:prstGeom>
-          <a:noFill/>
-          <a:ln w="12700" cap="flat" cmpd="sng" algn="ctr">
-            <a:solidFill>
-              <a:srgbClr val="7F7F7F"/>
-            </a:solidFill>
-            <a:prstDash val="dash"/>
-          </a:ln>
-          <a:effectLst/>
-        </p:spPr>
-        <p:txBody>
-          <a:bodyPr rot="0" spcFirstLastPara="0" vertOverflow="overflow" horzOverflow="overflow" vert="horz" wrap="square" lIns="90000" tIns="90000" rIns="90000" bIns="90000" numCol="1" spcCol="0" rtlCol="0" fromWordArt="0" anchor="ctr" anchorCtr="0" forceAA="0" compatLnSpc="1">
-            <a:prstTxWarp prst="textNoShape">
-              <a:avLst/>
-            </a:prstTxWarp>
-            <a:noAutofit/>
-          </a:bodyPr>
-          <a:lstStyle/>
-          <a:p>
-            <a:pPr algn="ctr" fontAlgn="base">
-              <a:spcAft>
-                <a:spcPct val="0"/>
-              </a:spcAft>
-            </a:pPr>
-            <a:r>
-              <a:rPr lang="en-US" altLang="zh-CN" sz="800" kern="0">
-                <a:latin typeface="Tahoma"/>
-                <a:cs typeface="Tahoma" pitchFamily="34" charset="0"/>
-              </a:rPr>
-              <a:t>AWDBD in negative area torque</a:t>
-            </a:r>
-            <a:endParaRPr lang="zh-CN" altLang="en-US" sz="800" kern="0" err="1">
-              <a:latin typeface="Tahoma"/>
-              <a:cs typeface="Tahoma" pitchFamily="34" charset="0"/>
-            </a:endParaRPr>
-          </a:p>
-        </p:txBody>
-      </p:sp>
-      <p:cxnSp>
-        <p:nvCxnSpPr>
-          <p:cNvPr id="31" name="Straight Arrow Connector 30">
-            <a:extLst>
-              <a:ext uri="{FF2B5EF4-FFF2-40B4-BE49-F238E27FC236}">
-                <a16:creationId xmlns:a16="http://schemas.microsoft.com/office/drawing/2014/main" id="{6F49EC83-881F-0301-5AAA-99AEDE128376}"/>
-              </a:ext>
-            </a:extLst>
-          </p:cNvPr>
-          <p:cNvCxnSpPr/>
-          <p:nvPr/>
-        </p:nvCxnSpPr>
-        <p:spPr>
-          <a:xfrm>
-            <a:off x="5762083" y="1511844"/>
-            <a:ext cx="0" cy="283345"/>
-          </a:xfrm>
-          <a:prstGeom prst="straightConnector1">
-            <a:avLst/>
-          </a:prstGeom>
-          <a:noFill/>
-          <a:ln w="28575" cap="rnd" cmpd="sng" algn="ctr">
-            <a:solidFill>
-              <a:srgbClr val="7F7F7F"/>
-            </a:solidFill>
-            <a:prstDash val="sysDot"/>
-            <a:round/>
-            <a:tailEnd type="triangle"/>
-          </a:ln>
-          <a:effectLst/>
-        </p:spPr>
-      </p:cxnSp>
-      <p:sp>
-        <p:nvSpPr>
-          <p:cNvPr id="32" name="TextBox 31">
-            <a:extLst>
-              <a:ext uri="{FF2B5EF4-FFF2-40B4-BE49-F238E27FC236}">
-                <a16:creationId xmlns:a16="http://schemas.microsoft.com/office/drawing/2014/main" id="{797E60F3-F839-05A0-C765-4E142EDF89C7}"/>
-              </a:ext>
-            </a:extLst>
-          </p:cNvPr>
-          <p:cNvSpPr txBox="1"/>
-          <p:nvPr/>
-        </p:nvSpPr>
-        <p:spPr>
-          <a:xfrm>
-            <a:off x="1627084" y="2143617"/>
-            <a:ext cx="1444517" cy="553998"/>
-          </a:xfrm>
-          <a:prstGeom prst="rect">
-            <a:avLst/>
-          </a:prstGeom>
-          <a:noFill/>
-        </p:spPr>
-        <p:txBody>
-          <a:bodyPr wrap="square">
-            <a:spAutoFit/>
-          </a:bodyPr>
-          <a:lstStyle/>
-          <a:p>
-            <a:pPr algn="ctr" fontAlgn="base">
-              <a:spcAft>
-                <a:spcPct val="0"/>
-              </a:spcAft>
-            </a:pPr>
-            <a:r>
-              <a:rPr lang="en-US" altLang="zh-CN" sz="1000" kern="0">
-                <a:solidFill>
-                  <a:schemeClr val="accent2"/>
-                </a:solidFill>
-                <a:latin typeface="Tahoma"/>
-                <a:cs typeface="Tahoma" pitchFamily="34" charset="0"/>
-              </a:rPr>
-              <a:t>or</a:t>
-            </a:r>
-          </a:p>
-          <a:p>
-            <a:pPr algn="ctr" fontAlgn="base">
-              <a:spcAft>
-                <a:spcPct val="0"/>
-              </a:spcAft>
-            </a:pPr>
-            <a:r>
-              <a:rPr lang="en-US" altLang="zh-CN" sz="1000" kern="0">
-                <a:solidFill>
-                  <a:schemeClr val="accent2"/>
-                </a:solidFill>
-                <a:latin typeface="Tahoma"/>
-                <a:cs typeface="Tahoma" pitchFamily="34" charset="0"/>
-              </a:rPr>
-              <a:t>1× brake torque</a:t>
-            </a:r>
-          </a:p>
-          <a:p>
-            <a:pPr algn="ctr" fontAlgn="base">
-              <a:spcAft>
-                <a:spcPct val="0"/>
-              </a:spcAft>
-            </a:pPr>
-            <a:r>
-              <a:rPr lang="en-US" altLang="zh-CN" sz="1000" kern="0">
-                <a:solidFill>
-                  <a:schemeClr val="accent2"/>
-                </a:solidFill>
-                <a:cs typeface="Tahoma" pitchFamily="34" charset="0"/>
-              </a:rPr>
-              <a:t>1× regen torque</a:t>
-            </a:r>
-            <a:endParaRPr lang="zh-CN" altLang="en-US" sz="1000" kern="0">
-              <a:solidFill>
-                <a:schemeClr val="accent2"/>
-              </a:solidFill>
-              <a:cs typeface="Tahoma" pitchFamily="34" charset="0"/>
-            </a:endParaRPr>
-          </a:p>
-        </p:txBody>
-      </p:sp>
-      <p:sp>
-        <p:nvSpPr>
-          <p:cNvPr id="3" name="TextBox 2">
-            <a:extLst>
-              <a:ext uri="{FF2B5EF4-FFF2-40B4-BE49-F238E27FC236}">
-                <a16:creationId xmlns:a16="http://schemas.microsoft.com/office/drawing/2014/main" id="{5B545839-4A33-A09A-8661-4561AECEF3A6}"/>
-              </a:ext>
-            </a:extLst>
-          </p:cNvPr>
-          <p:cNvSpPr txBox="1"/>
-          <p:nvPr/>
-        </p:nvSpPr>
-        <p:spPr>
-          <a:xfrm>
-            <a:off x="6434942" y="1866654"/>
-            <a:ext cx="2449285" cy="161583"/>
-          </a:xfrm>
-          <a:prstGeom prst="rect">
-            <a:avLst/>
-          </a:prstGeom>
-          <a:noFill/>
-        </p:spPr>
-        <p:txBody>
-          <a:bodyPr rot="0" spcFirstLastPara="0" vertOverflow="overflow" horzOverflow="overflow" vert="horz" wrap="square" lIns="0" tIns="0" rIns="0" bIns="0" numCol="1" spcCol="0" rtlCol="0" fromWordArt="0" anchor="t" anchorCtr="0" forceAA="0" compatLnSpc="1">
-            <a:prstTxWarp prst="textNoShape">
-              <a:avLst/>
-            </a:prstTxWarp>
-            <a:spAutoFit/>
-          </a:bodyPr>
-          <a:lstStyle/>
-          <a:p>
-            <a:r>
-              <a:rPr lang="en-US" sz="1050"/>
-              <a:t>4×wheel brake </a:t>
-            </a:r>
-            <a:r>
-              <a:rPr lang="en-US" sz="1050" err="1"/>
-              <a:t>torque+sliplimit</a:t>
-            </a:r>
-            <a:endParaRPr lang="en-US" sz="1050" err="1">
-              <a:ea typeface="Tahoma"/>
-              <a:cs typeface="Tahoma"/>
-            </a:endParaRPr>
-          </a:p>
-        </p:txBody>
-      </p:sp>
-      <p:sp>
-        <p:nvSpPr>
-          <p:cNvPr id="6" name="TextBox 5">
-            <a:extLst>
-              <a:ext uri="{FF2B5EF4-FFF2-40B4-BE49-F238E27FC236}">
-                <a16:creationId xmlns:a16="http://schemas.microsoft.com/office/drawing/2014/main" id="{5CDE5CF9-A263-9C28-E44D-F4EE37069770}"/>
-              </a:ext>
-            </a:extLst>
-          </p:cNvPr>
-          <p:cNvSpPr txBox="1"/>
-          <p:nvPr/>
-        </p:nvSpPr>
-        <p:spPr>
-          <a:xfrm>
-            <a:off x="6507152" y="1073416"/>
-            <a:ext cx="298754" cy="246221"/>
-          </a:xfrm>
-          <a:prstGeom prst="rect">
-            <a:avLst/>
-          </a:prstGeom>
-          <a:noFill/>
-        </p:spPr>
-        <p:txBody>
-          <a:bodyPr wrap="square">
-            <a:spAutoFit/>
-          </a:bodyPr>
-          <a:lstStyle/>
-          <a:p>
-            <a:pPr algn="ctr" fontAlgn="base">
-              <a:spcAft>
-                <a:spcPct val="0"/>
-              </a:spcAft>
-            </a:pPr>
-            <a:r>
-              <a:rPr lang="en-US" altLang="zh-CN" sz="1000" kern="0">
-                <a:latin typeface="Tahoma"/>
-                <a:cs typeface="Tahoma" pitchFamily="34" charset="0"/>
-              </a:rPr>
-              <a:t>?</a:t>
-            </a:r>
-            <a:endParaRPr lang="zh-CN" altLang="en-US" sz="1000" kern="0" err="1">
-              <a:latin typeface="Tahoma"/>
-              <a:cs typeface="Tahoma" pitchFamily="34" charset="0"/>
-            </a:endParaRPr>
-          </a:p>
-        </p:txBody>
-      </p:sp>
-    </p:spTree>
-    <p:extLst>
-      <p:ext uri="{BB962C8B-B14F-4D97-AF65-F5344CB8AC3E}">
-        <p14:creationId xmlns:p14="http://schemas.microsoft.com/office/powerpoint/2010/main" val="315028215"/>
-      </p:ext>
-    </p:extLst>
-  </p:cSld>
-  <p:clrMapOvr>
-    <a:masterClrMapping/>
-  </p:clrMapOvr>
 </p:sld>
 </file>
 
@@ -39589,8 +41055,25 @@
 </file>
 
 <file path=customXml/item1.xml><?xml version="1.0" encoding="utf-8"?>
-<ct:contentTypeSchema xmlns:ct="http://schemas.microsoft.com/office/2006/metadata/contentType" xmlns:ma="http://schemas.microsoft.com/office/2006/metadata/properties/metaAttributes" ct:_="" ma:_="" ma:contentTypeName="Document" ma:contentTypeID="0x010100F4ECDE3992A08C4AB27EAAF617A05967" ma:contentTypeVersion="12" ma:contentTypeDescription="Create a new document." ma:contentTypeScope="" ma:versionID="23abac7df6da088bc4d1777ff4cd0726">
-  <xsd:schema xmlns:xsd="http://www.w3.org/2001/XMLSchema" xmlns:xs="http://www.w3.org/2001/XMLSchema" xmlns:p="http://schemas.microsoft.com/office/2006/metadata/properties" xmlns:ns2="455088e1-af34-4927-a3f0-bdce59540293" xmlns:ns3="f4ecdb93-bc7f-4438-8c77-236ab96c18a9" targetNamespace="http://schemas.microsoft.com/office/2006/metadata/properties" ma:root="true" ma:fieldsID="9aea9c9d6011f84f9fc63bffca9d29e3" ns2:_="" ns3:_="">
+<p:properties xmlns:p="http://schemas.microsoft.com/office/2006/metadata/properties" xmlns:xsi="http://www.w3.org/2001/XMLSchema-instance" xmlns:pc="http://schemas.microsoft.com/office/infopath/2007/PartnerControls">
+  <documentManagement>
+    <TaxCatchAll xmlns="f4ecdb93-bc7f-4438-8c77-236ab96c18a9" xsi:nil="true"/>
+    <lcf76f155ced4ddcb4097134ff3c332f xmlns="455088e1-af34-4927-a3f0-bdce59540293">
+      <Terms xmlns="http://schemas.microsoft.com/office/infopath/2007/PartnerControls"/>
+    </lcf76f155ced4ddcb4097134ff3c332f>
+    <PrimeCorrectedByUser xmlns="f4ecdb93-bc7f-4438-8c77-236ab96c18a9" xsi:nil="true"/>
+    <testStatus xmlns="455088e1-af34-4927-a3f0-bdce59540293">Not found</testStatus>
+    <PrimeClassificationStatusDetails xmlns="f4ecdb93-bc7f-4438-8c77-236ab96c18a9" xsi:nil="true"/>
+    <PrimeClassificationStatus xmlns="f4ecdb93-bc7f-4438-8c77-236ab96c18a9" xsi:nil="true"/>
+    <PrimeLastClassified xmlns="f4ecdb93-bc7f-4438-8c77-236ab96c18a9" xsi:nil="true"/>
+    <PrimeAutofillMeta xmlns="f4ecdb93-bc7f-4438-8c77-236ab96c18a9" xsi:nil="true"/>
+  </documentManagement>
+</p:properties>
+</file>
+
+<file path=customXml/item2.xml><?xml version="1.0" encoding="utf-8"?>
+<ct:contentTypeSchema xmlns:ct="http://schemas.microsoft.com/office/2006/metadata/contentType" xmlns:ma="http://schemas.microsoft.com/office/2006/metadata/properties/metaAttributes" ct:_="" ma:_="" ma:contentTypeName="Document" ma:contentTypeID="0x010100F4ECDE3992A08C4AB27EAAF617A05967" ma:contentTypeVersion="18" ma:contentTypeDescription="Create a new document." ma:contentTypeScope="" ma:versionID="9683c085a59988fd2dc84fe522921e1c">
+  <xsd:schema xmlns:xsd="http://www.w3.org/2001/XMLSchema" xmlns:xs="http://www.w3.org/2001/XMLSchema" xmlns:p="http://schemas.microsoft.com/office/2006/metadata/properties" xmlns:ns2="455088e1-af34-4927-a3f0-bdce59540293" xmlns:ns3="f4ecdb93-bc7f-4438-8c77-236ab96c18a9" targetNamespace="http://schemas.microsoft.com/office/2006/metadata/properties" ma:root="true" ma:fieldsID="7184c417cebe2c46bf9076e6fd8b1060" ns2:_="" ns3:_="">
     <xsd:import namespace="455088e1-af34-4927-a3f0-bdce59540293"/>
     <xsd:import namespace="f4ecdb93-bc7f-4438-8c77-236ab96c18a9"/>
     <xsd:element name="properties">
@@ -39610,6 +41093,12 @@
                 <xsd:element ref="ns2:MediaServiceOCR" minOccurs="0"/>
                 <xsd:element ref="ns2:MediaServiceLocation" minOccurs="0"/>
                 <xsd:element ref="ns2:MediaLengthInSeconds" minOccurs="0"/>
+                <xsd:element ref="ns2:testStatus" minOccurs="0"/>
+                <xsd:element ref="ns3:PrimeClassificationStatus" minOccurs="0"/>
+                <xsd:element ref="ns3:PrimeClassificationStatusDetails" minOccurs="0"/>
+                <xsd:element ref="ns3:PrimeLastClassified" minOccurs="0"/>
+                <xsd:element ref="ns3:PrimeCorrectedByUser" minOccurs="0"/>
+                <xsd:element ref="ns3:PrimeAutofillMeta" minOccurs="0"/>
               </xsd:all>
             </xsd:complexType>
           </xsd:element>
@@ -39674,6 +41163,18 @@
         <xsd:restriction base="dms:Unknown"/>
       </xsd:simpleType>
     </xsd:element>
+    <xsd:element name="testStatus" ma:index="20" nillable="true" ma:displayName="Test status" ma:description="Summarizes overall test outcome so failed or mixed-result files can be found quickly." ma:internalName="testStatus">
+      <xsd:simpleType>
+        <xsd:restriction base="dms:Choice">
+          <xsd:enumeration value="Pass"/>
+          <xsd:enumeration value="Fail"/>
+          <xsd:enumeration value="Error"/>
+          <xsd:enumeration value="Skipped"/>
+          <xsd:enumeration value="Mixed"/>
+          <xsd:enumeration value="Not found"/>
+        </xsd:restriction>
+      </xsd:simpleType>
+    </xsd:element>
   </xsd:schema>
   <xsd:schema xmlns:xsd="http://www.w3.org/2001/XMLSchema" xmlns:xs="http://www.w3.org/2001/XMLSchema" xmlns:dms="http://schemas.microsoft.com/office/2006/documentManagement/types" xmlns:pc="http://schemas.microsoft.com/office/infopath/2007/PartnerControls" targetNamespace="f4ecdb93-bc7f-4438-8c77-236ab96c18a9" elementFormDefault="qualified">
     <xsd:import namespace="http://schemas.microsoft.com/office/2006/documentManagement/types"/>
@@ -39688,6 +41189,33 @@
           </xsd:extension>
         </xsd:complexContent>
       </xsd:complexType>
+    </xsd:element>
+    <xsd:element name="PrimeClassificationStatus" ma:index="21" nillable="true" ma:displayName="Processing status" ma:internalName="PrimeClassificationStatus">
+      <xsd:simpleType>
+        <xsd:restriction base="dms:Text"/>
+      </xsd:simpleType>
+    </xsd:element>
+    <xsd:element name="PrimeClassificationStatusDetails" ma:index="22" nillable="true" ma:displayName="Processing details" ma:internalName="PrimeClassificationStatusDetails">
+      <xsd:simpleType>
+        <xsd:restriction base="dms:Note">
+          <xsd:maxLength value="255"/>
+        </xsd:restriction>
+      </xsd:simpleType>
+    </xsd:element>
+    <xsd:element name="PrimeLastClassified" ma:index="23" nillable="true" ma:displayName="Processed" ma:internalName="PrimeLastClassified">
+      <xsd:simpleType>
+        <xsd:restriction base="dms:DateTime"/>
+      </xsd:simpleType>
+    </xsd:element>
+    <xsd:element name="PrimeCorrectedByUser" ma:index="24" nillable="true" ma:displayName="Corrected" ma:internalName="PrimeCorrectedByUser">
+      <xsd:simpleType>
+        <xsd:restriction base="dms:Boolean"/>
+      </xsd:simpleType>
+    </xsd:element>
+    <xsd:element name="PrimeAutofillMeta" ma:index="25" nillable="true" ma:displayName="Autofill Meta" ma:hidden="true" ma:internalName="PrimeAutofillMeta">
+      <xsd:simpleType>
+        <xsd:restriction base="dms:Note"/>
+      </xsd:simpleType>
     </xsd:element>
   </xsd:schema>
   <xsd:schema xmlns="http://schemas.openxmlformats.org/package/2006/metadata/core-properties" xmlns:xsd="http://www.w3.org/2001/XMLSchema" xmlns:xsi="http://www.w3.org/2001/XMLSchema-instance" xmlns:dc="http://purl.org/dc/elements/1.1/" xmlns:dcterms="http://purl.org/dc/terms/" xmlns:odoc="http://schemas.microsoft.com/internal/obd" targetNamespace="http://schemas.openxmlformats.org/package/2006/metadata/core-properties" elementFormDefault="qualified" attributeFormDefault="unqualified" blockDefault="#all">
@@ -39789,17 +41317,6 @@
 </ct:contentTypeSchema>
 </file>
 
-<file path=customXml/item2.xml><?xml version="1.0" encoding="utf-8"?>
-<p:properties xmlns:p="http://schemas.microsoft.com/office/2006/metadata/properties" xmlns:xsi="http://www.w3.org/2001/XMLSchema-instance" xmlns:pc="http://schemas.microsoft.com/office/infopath/2007/PartnerControls">
-  <documentManagement>
-    <TaxCatchAll xmlns="f4ecdb93-bc7f-4438-8c77-236ab96c18a9" xsi:nil="true"/>
-    <lcf76f155ced4ddcb4097134ff3c332f xmlns="455088e1-af34-4927-a3f0-bdce59540293">
-      <Terms xmlns="http://schemas.microsoft.com/office/infopath/2007/PartnerControls"/>
-    </lcf76f155ced4ddcb4097134ff3c332f>
-  </documentManagement>
-</p:properties>
-</file>
-
 <file path=customXml/item3.xml><?xml version="1.0" encoding="utf-8"?>
 <?mso-contentType ?>
 <FormTemplates xmlns="http://schemas.microsoft.com/sharepoint/v3/contenttype/forms">
@@ -39810,16 +41327,31 @@
 </file>
 
 <file path=customXml/itemProps1.xml><?xml version="1.0" encoding="utf-8"?>
-<ds:datastoreItem xmlns:ds="http://schemas.openxmlformats.org/officeDocument/2006/customXml" ds:itemID="{2931B17C-09B1-4463-B6B2-E59FB39B57B9}"/>
-</file>
-
-<file path=customXml/itemProps2.xml><?xml version="1.0" encoding="utf-8"?>
 <ds:datastoreItem xmlns:ds="http://schemas.openxmlformats.org/officeDocument/2006/customXml" ds:itemID="{5F726A60-13BC-4ECD-AE70-BA20474CCF56}">
   <ds:schemaRefs>
     <ds:schemaRef ds:uri="455088e1-af34-4927-a3f0-bdce59540293"/>
     <ds:schemaRef ds:uri="f4ecdb93-bc7f-4438-8c77-236ab96c18a9"/>
     <ds:schemaRef ds:uri="http://schemas.microsoft.com/office/2006/metadata/properties"/>
     <ds:schemaRef ds:uri="http://schemas.microsoft.com/office/infopath/2007/PartnerControls"/>
+  </ds:schemaRefs>
+</ds:datastoreItem>
+</file>
+
+<file path=customXml/itemProps2.xml><?xml version="1.0" encoding="utf-8"?>
+<ds:datastoreItem xmlns:ds="http://schemas.openxmlformats.org/officeDocument/2006/customXml" ds:itemID="{4BCD379A-EEB4-4892-A8A9-CB930AA97589}">
+  <ds:schemaRefs>
+    <ds:schemaRef ds:uri="455088e1-af34-4927-a3f0-bdce59540293"/>
+    <ds:schemaRef ds:uri="f4ecdb93-bc7f-4438-8c77-236ab96c18a9"/>
+    <ds:schemaRef ds:uri="http://purl.org/dc/elements/1.1/"/>
+    <ds:schemaRef ds:uri="http://purl.org/dc/terms/"/>
+    <ds:schemaRef ds:uri="http://schemas.microsoft.com/internal/obd"/>
+    <ds:schemaRef ds:uri="http://schemas.microsoft.com/office/2006/documentManagement/types"/>
+    <ds:schemaRef ds:uri="http://schemas.microsoft.com/office/2006/metadata/contentType"/>
+    <ds:schemaRef ds:uri="http://schemas.microsoft.com/office/2006/metadata/properties"/>
+    <ds:schemaRef ds:uri="http://schemas.microsoft.com/office/2006/metadata/properties/metaAttributes"/>
+    <ds:schemaRef ds:uri="http://schemas.microsoft.com/office/infopath/2007/PartnerControls"/>
+    <ds:schemaRef ds:uri="http://schemas.openxmlformats.org/package/2006/metadata/core-properties"/>
+    <ds:schemaRef ds:uri="http://www.w3.org/2001/XMLSchema"/>
   </ds:schemaRefs>
 </ds:datastoreItem>
 </file>
